--- a/pdf/03_Unity基础_场景组件与打包.pptx
+++ b/pdf/03_Unity基础_场景组件与打包.pptx
@@ -1,26 +1,25 @@
 
 <file path=ppt/presentation.xml><?xml version="1.0" encoding="utf-8"?>
-<p:presentation xmlns:a="http://schemas.openxmlformats.org/drawingml/2006/main" xmlns:r="http://schemas.openxmlformats.org/officeDocument/2006/relationships" xmlns:p="http://schemas.openxmlformats.org/presentationml/2006/main" saveSubsetFonts="1" autoCompressPictures="0">
+<p:presentation xmlns:a="http://schemas.openxmlformats.org/drawingml/2006/main" xmlns:r="http://schemas.openxmlformats.org/officeDocument/2006/relationships" xmlns:p="http://schemas.openxmlformats.org/presentationml/2006/main" autoCompressPictures="0">
   <p:sldMasterIdLst>
     <p:sldMasterId id="2147483648" r:id="rId1"/>
   </p:sldMasterIdLst>
   <p:notesMasterIdLst>
-    <p:notesMasterId r:id="rId20"/>
+    <p:notesMasterId r:id="rId4"/>
   </p:notesMasterIdLst>
   <p:sldIdLst>
-    <p:sldId id="256" r:id="rId7"/>
-    <p:sldId id="257" r:id="rId8"/>
-    <p:sldId id="258" r:id="rId9"/>
-    <p:sldId id="259" r:id="rId10"/>
-    <p:sldId id="260" r:id="rId11"/>
-    <p:sldId id="261" r:id="rId12"/>
-    <p:sldId id="262" r:id="rId13"/>
-    <p:sldId id="263" r:id="rId14"/>
-    <p:sldId id="264" r:id="rId15"/>
-    <p:sldId id="265" r:id="rId16"/>
-    <p:sldId id="266" r:id="rId17"/>
-    <p:sldId id="267" r:id="rId18"/>
-    <p:sldId id="268" r:id="rId19"/>
+    <p:sldId id="256" r:id="rId3"/>
+    <p:sldId id="257" r:id="rId5"/>
+    <p:sldId id="258" r:id="rId6"/>
+    <p:sldId id="259" r:id="rId7"/>
+    <p:sldId id="260" r:id="rId8"/>
+    <p:sldId id="261" r:id="rId9"/>
+    <p:sldId id="262" r:id="rId10"/>
+    <p:sldId id="263" r:id="rId11"/>
+    <p:sldId id="264" r:id="rId12"/>
+    <p:sldId id="265" r:id="rId13"/>
+    <p:sldId id="266" r:id="rId14"/>
+    <p:sldId id="268" r:id="rId15"/>
   </p:sldIdLst>
   <p:sldSz cx="12192000" cy="6858000" type="screen4x3"/>
   <p:notesSz cx="6858000" cy="9144000"/>
@@ -119,12 +118,33 @@
       </a:defRPr>
     </a:lvl9pPr>
   </p:defaultTextStyle>
+  <p:extLst>
+    <p:ext uri="{EFAFB233-063F-42B5-8137-9DF3F51BA10A}">
+      <p15:sldGuideLst xmlns:p15="http://schemas.microsoft.com/office/powerpoint/2012/main">
+        <p15:guide id="1" orient="horz" pos="2160" userDrawn="1">
+          <p15:clr>
+            <a:srgbClr val="A4A3A4"/>
+          </p15:clr>
+        </p15:guide>
+        <p15:guide id="2" pos="2880" userDrawn="1">
+          <p15:clr>
+            <a:srgbClr val="A4A3A4"/>
+          </p15:clr>
+        </p15:guide>
+      </p15:sldGuideLst>
+    </p:ext>
+  </p:extLst>
 </p:presentation>
 </file>
 
 <file path=ppt/notesMasters/notesMaster1.xml><?xml version="1.0" encoding="utf-8"?>
 <p:notesMaster xmlns:a="http://schemas.openxmlformats.org/drawingml/2006/main" xmlns:r="http://schemas.openxmlformats.org/officeDocument/2006/relationships" xmlns:p="http://schemas.openxmlformats.org/presentationml/2006/main">
   <p:cSld>
+    <p:bg>
+      <p:bgRef idx="1001">
+        <a:schemeClr val="bg1"/>
+      </p:bgRef>
+    </p:bg>
     <p:spTree>
       <p:nvGrpSpPr>
         <p:cNvPr id="1" name=""/>
@@ -300,7 +320,7 @@
   <p:hf/>
   <p:notesStyle>
     <a:lvl1pPr marL="0" algn="l">
-      <a:defRPr sz="1200" lang="en-US"/>
+      <a:defRPr lang="en-US" sz="1200"/>
     </a:lvl1pPr>
   </p:notesStyle>
 </p:notesMaster>
@@ -354,6 +374,7 @@
               <a:rPr lang="zh-CN" dirty="0"/>
               <a:t>这一单元把 Unity 场景中的核心概念串成一条完整工作流。我们会从对象和组件开始，经过物理、渲染与复用，最后导出一个可以运行的 Windows 程序。</a:t>
             </a:r>
+            <a:endParaRPr lang="zh-CN" dirty="0"/>
           </a:p>
         </p:txBody>
       </p:sp>
@@ -413,6 +434,7 @@
               <a:rPr lang="zh-CN" dirty="0"/>
               <a:t>Camera 可以把结果写入 RenderTexture，RawImage 再把这张纹理显示在 Canvas 上。小地图、监控屏和角色预览都可以复用这条管线，关键是两端引用同一张纹理资产。</a:t>
             </a:r>
+            <a:endParaRPr lang="zh-CN" dirty="0"/>
           </a:p>
         </p:txBody>
       </p:sp>
@@ -472,6 +494,7 @@
               <a:rPr lang="zh-CN" dirty="0"/>
               <a:t>Prefab 把配置好的对象保存为可复用资产，多个实例共享来源，同时允许保留局部覆盖。角色则用 PlayerRoot 作为稳定根节点，让视觉、物理、镜头和脚本模块各司其职。</a:t>
             </a:r>
+            <a:endParaRPr lang="zh-CN" dirty="0"/>
           </a:p>
         </p:txBody>
       </p:sp>
@@ -529,67 +552,9 @@
           <a:p>
             <a:r>
               <a:rPr lang="zh-CN" dirty="0"/>
-              <a:t>练习时不要一次堆完全部功能，而要按层级、碰撞、材质灯光、动态物体、触发区、角色与相机逐步完成。每一步都运行验证，错误就会被限制在最小范围内。</a:t>
-            </a:r>
-          </a:p>
-        </p:txBody>
-      </p:sp>
-    </p:spTree>
-  </p:cSld>
-  <p:clrMapOvr>
-    <a:masterClrMapping/>
-  </p:clrMapOvr>
-</p:notes>
-</file>
-
-<file path=ppt/notesSlides/notesSlide13.xml><?xml version="1.0" encoding="utf-8"?>
-<p:notes xmlns:a="http://schemas.openxmlformats.org/drawingml/2006/main" xmlns:r="http://schemas.openxmlformats.org/officeDocument/2006/relationships" xmlns:p="http://schemas.openxmlformats.org/presentationml/2006/main">
-  <p:cSld>
-    <p:spTree>
-      <p:nvGrpSpPr>
-        <p:cNvPr id="1" name=""/>
-        <p:cNvGrpSpPr/>
-        <p:nvPr/>
-      </p:nvGrpSpPr>
-      <p:grpSpPr>
-        <a:xfrm>
-          <a:off x="0" y="0"/>
-          <a:ext cx="0" cy="0"/>
-          <a:chOff x="0" y="0"/>
-          <a:chExt cx="0" cy="0"/>
-        </a:xfrm>
-      </p:grpSpPr>
-      <p:sp>
-        <p:nvSpPr>
-          <p:cNvPr id="2" name="Slide Image Placeholder 1"/>
-          <p:cNvSpPr>
-            <a:spLocks noGrp="1" noRot="1" noChangeAspect="1"/>
-          </p:cNvSpPr>
-          <p:nvPr>
-            <p:ph type="sldImg" idx="2"/>
-          </p:nvPr>
-        </p:nvSpPr>
-        <p:spPr/>
-      </p:sp>
-      <p:sp>
-        <p:nvSpPr>
-          <p:cNvPr id="3" name="Notes Placeholder 2"/>
-          <p:cNvSpPr>
-            <a:spLocks noGrp="1"/>
-          </p:cNvSpPr>
-          <p:nvPr>
-            <p:ph type="body" sz="quarter" idx="3"/>
-          </p:nvPr>
-        </p:nvSpPr>
-        <p:spPr/>
-        <p:txBody>
-          <a:bodyPr/>
-          <a:lstStyle/>
-          <a:p>
-            <a:r>
-              <a:rPr lang="zh-CN" dirty="0"/>
               <a:t>打包前先保存场景并清理 Console，再在 Build Profiles 中选择 Windows、加入需要的场景并执行 Build。最终交付时要保留生成目录的完整结构，因为可执行文件通常依赖旁边的数据文件夹和运行库。</a:t>
             </a:r>
+            <a:endParaRPr lang="zh-CN" dirty="0"/>
           </a:p>
         </p:txBody>
       </p:sp>
@@ -649,6 +614,7 @@
               <a:rPr lang="zh-CN" dirty="0"/>
               <a:t>整套内容分成四段：先组织场景，再建立物理交互，然后完成渲染与镜头，最后用 Prefab 和 Build 收尾。学习时始终问自己两个问题：当前对象由谁驱动，它最终要输出什么结果。</a:t>
             </a:r>
+            <a:endParaRPr lang="zh-CN" dirty="0"/>
           </a:p>
         </p:txBody>
       </p:sp>
@@ -708,6 +674,7 @@
               <a:rPr lang="zh-CN" dirty="0"/>
               <a:t>Scene 是对象的组织容器，GameObject 本身更像一个空壳。对象通过 Transform、Collider、Renderer 和脚本等组件组合出具体能力，这也是 Unity 常见的组合式设计思路。</a:t>
             </a:r>
+            <a:endParaRPr lang="zh-CN" dirty="0"/>
           </a:p>
         </p:txBody>
       </p:sp>
@@ -767,6 +734,7 @@
               <a:rPr lang="zh-CN" dirty="0"/>
               <a:t>Transform 同时描述位置、旋转和缩放，并区分本地空间与世界空间。父物体变化会带动子物体，因此适合把角色模型、相机轴和功能节点挂到稳定的根节点下。</a:t>
             </a:r>
+            <a:endParaRPr lang="zh-CN" dirty="0"/>
           </a:p>
         </p:txBody>
       </p:sp>
@@ -826,6 +794,7 @@
               <a:rPr lang="zh-CN" dirty="0"/>
               <a:t>碰撞体只描述物理边界，不必和可见模型完全一致。优先使用 Box、Sphere 或 Capsule，只有在简单形状和组合碰撞体都无法满足需求时，才考虑 Mesh Collider。</a:t>
             </a:r>
+            <a:endParaRPr lang="zh-CN" dirty="0"/>
           </a:p>
         </p:txBody>
       </p:sp>
@@ -885,6 +854,7 @@
               <a:rPr lang="zh-CN" dirty="0"/>
               <a:t>静态对象属于世界，不应在运行时频繁移动；动态对象交给物理系统处理；运动学对象则由脚本控制轨迹。确定移动责任后再设置 Rigidbody，可以避免抖动、穿透和不可预期的碰撞。</a:t>
             </a:r>
+            <a:endParaRPr lang="zh-CN" dirty="0"/>
           </a:p>
         </p:txBody>
       </p:sp>
@@ -944,6 +914,7 @@
               <a:rPr lang="zh-CN" dirty="0"/>
               <a:t>Trigger 不产生阻挡，而是报告进入、停留与离开事件。事件不触发时，从 Rigidbody、Is Trigger、Layer 碰撞矩阵、脚本挂载位置和方法签名依次排查，效率最高。</a:t>
             </a:r>
+            <a:endParaRPr lang="zh-CN" dirty="0"/>
           </a:p>
         </p:txBody>
       </p:sp>
@@ -1003,6 +974,7 @@
               <a:rPr lang="zh-CN" dirty="0"/>
               <a:t>Texture 提供表面数据，Shader 定义计算规则，Material 保存参数，Renderer 负责把它们绑定到对象并输出画面。Skinned Mesh Renderer 在此基础上增加骨骼变形能力，通常用于角色动画。</a:t>
             </a:r>
+            <a:endParaRPr lang="zh-CN" dirty="0"/>
           </a:p>
         </p:txBody>
       </p:sp>
@@ -1062,6 +1034,7 @@
               <a:rPr lang="zh-CN" dirty="0"/>
               <a:t>先用天空盒和主方向光确定场景基调，再用局部光源补充重点区域。静态环境适合烘焙，动态变化适合实时光；两者合理组合，能同时兼顾效果与性能。</a:t>
             </a:r>
+            <a:endParaRPr lang="zh-CN" dirty="0"/>
           </a:p>
         </p:txBody>
       </p:sp>
@@ -1073,8 +1046,8 @@
 </p:notes>
 </file>
 
-<file path=ppt/slideLayouts/slideLayout12.xml><?xml version="1.0" encoding="utf-8"?>
-<p:sldLayout xmlns:a="http://schemas.openxmlformats.org/drawingml/2006/main" xmlns:p="http://schemas.openxmlformats.org/presentationml/2006/main" xmlns:p14="http://schemas.microsoft.com/office/powerpoint/2010/main" type="cust" preserve="1" showMasterSp="1">
+<file path=ppt/slideLayouts/slideLayout1.xml><?xml version="1.0" encoding="utf-8"?>
+<p:sldLayout xmlns:a="http://schemas.openxmlformats.org/drawingml/2006/main" xmlns:r="http://schemas.openxmlformats.org/officeDocument/2006/relationships" xmlns:p="http://schemas.openxmlformats.org/presentationml/2006/main" preserve="1">
   <p:cSld name="Cover">
     <p:spTree>
       <p:nvGrpSpPr>
@@ -1091,11 +1064,6 @@
         </a:xfrm>
       </p:grpSpPr>
     </p:spTree>
-    <p:extLst>
-      <p:ext uri="{BB962C8B-B14F-4D97-AF65-F5344CB8AC3E}">
-        <p14:creationId val="1212999818"/>
-      </p:ext>
-    </p:extLst>
   </p:cSld>
   <p:clrMapOvr>
     <a:masterClrMapping/>
@@ -1103,8 +1071,8 @@
 </p:sldLayout>
 </file>
 
-<file path=ppt/slideLayouts/slideLayout13.xml><?xml version="1.0" encoding="utf-8"?>
-<p:sldLayout xmlns:a="http://schemas.openxmlformats.org/drawingml/2006/main" xmlns:p="http://schemas.openxmlformats.org/presentationml/2006/main" xmlns:p14="http://schemas.microsoft.com/office/powerpoint/2010/main" type="cust" preserve="1" showMasterSp="1">
+<file path=ppt/slideLayouts/slideLayout2.xml><?xml version="1.0" encoding="utf-8"?>
+<p:sldLayout xmlns:a="http://schemas.openxmlformats.org/drawingml/2006/main" xmlns:r="http://schemas.openxmlformats.org/officeDocument/2006/relationships" xmlns:p="http://schemas.openxmlformats.org/presentationml/2006/main" preserve="1">
   <p:cSld name="Agenda">
     <p:spTree>
       <p:nvGrpSpPr>
@@ -1121,11 +1089,6 @@
         </a:xfrm>
       </p:grpSpPr>
     </p:spTree>
-    <p:extLst>
-      <p:ext uri="{BB962C8B-B14F-4D97-AF65-F5344CB8AC3E}">
-        <p14:creationId val="1212999818"/>
-      </p:ext>
-    </p:extLst>
   </p:cSld>
   <p:clrMapOvr>
     <a:masterClrMapping/>
@@ -1133,8 +1096,8 @@
 </p:sldLayout>
 </file>
 
-<file path=ppt/slideLayouts/slideLayout14.xml><?xml version="1.0" encoding="utf-8"?>
-<p:sldLayout xmlns:a="http://schemas.openxmlformats.org/drawingml/2006/main" xmlns:p="http://schemas.openxmlformats.org/presentationml/2006/main" xmlns:p14="http://schemas.microsoft.com/office/powerpoint/2010/main" type="cust" preserve="1" showMasterSp="1">
+<file path=ppt/slideLayouts/slideLayout3.xml><?xml version="1.0" encoding="utf-8"?>
+<p:sldLayout xmlns:a="http://schemas.openxmlformats.org/drawingml/2006/main" xmlns:r="http://schemas.openxmlformats.org/officeDocument/2006/relationships" xmlns:p="http://schemas.openxmlformats.org/presentationml/2006/main" preserve="1">
   <p:cSld name="Content">
     <p:spTree>
       <p:nvGrpSpPr>
@@ -1151,11 +1114,6 @@
         </a:xfrm>
       </p:grpSpPr>
     </p:spTree>
-    <p:extLst>
-      <p:ext uri="{BB962C8B-B14F-4D97-AF65-F5344CB8AC3E}">
-        <p14:creationId val="1212999818"/>
-      </p:ext>
-    </p:extLst>
   </p:cSld>
   <p:clrMapOvr>
     <a:masterClrMapping/>
@@ -1163,8 +1121,8 @@
 </p:sldLayout>
 </file>
 
-<file path=ppt/slideLayouts/slideLayout15.xml><?xml version="1.0" encoding="utf-8"?>
-<p:sldLayout xmlns:a="http://schemas.openxmlformats.org/drawingml/2006/main" xmlns:p="http://schemas.openxmlformats.org/presentationml/2006/main" xmlns:p14="http://schemas.microsoft.com/office/powerpoint/2010/main" type="cust" preserve="1" showMasterSp="1">
+<file path=ppt/slideLayouts/slideLayout4.xml><?xml version="1.0" encoding="utf-8"?>
+<p:sldLayout xmlns:a="http://schemas.openxmlformats.org/drawingml/2006/main" xmlns:r="http://schemas.openxmlformats.org/officeDocument/2006/relationships" xmlns:p="http://schemas.openxmlformats.org/presentationml/2006/main" preserve="1">
   <p:cSld name="Closing">
     <p:bg>
       <p:bgPr>
@@ -1189,11 +1147,6 @@
         </a:xfrm>
       </p:grpSpPr>
     </p:spTree>
-    <p:extLst>
-      <p:ext uri="{BB962C8B-B14F-4D97-AF65-F5344CB8AC3E}">
-        <p14:creationId val="1212999818"/>
-      </p:ext>
-    </p:extLst>
   </p:cSld>
   <p:clrMapOvr>
     <a:masterClrMapping/>
@@ -1289,6 +1242,7 @@
               <a:rPr lang="en-US" smtClean="0"/>
               <a:t>Click to edit Master text styles</a:t>
             </a:r>
+            <a:endParaRPr lang="en-US" smtClean="0"/>
           </a:p>
           <a:p>
             <a:pPr lvl="1"/>
@@ -1296,6 +1250,7 @@
               <a:rPr lang="en-US" smtClean="0"/>
               <a:t>Second level</a:t>
             </a:r>
+            <a:endParaRPr lang="en-US" smtClean="0"/>
           </a:p>
           <a:p>
             <a:pPr lvl="2"/>
@@ -1303,6 +1258,7 @@
               <a:rPr lang="en-US" smtClean="0"/>
               <a:t>Third level</a:t>
             </a:r>
+            <a:endParaRPr lang="en-US" smtClean="0"/>
           </a:p>
           <a:p>
             <a:pPr lvl="3"/>
@@ -1310,6 +1266,7 @@
               <a:rPr lang="en-US" smtClean="0"/>
               <a:t>Fourth level</a:t>
             </a:r>
+            <a:endParaRPr lang="en-US" smtClean="0"/>
           </a:p>
           <a:p>
             <a:pPr lvl="4"/>
@@ -1356,7 +1313,6 @@
           <a:p>
             <a:fld id="{5BCAD085-E8A6-8845-BD4E-CB4CCA059FC4}" type="datetimeFigureOut">
               <a:rPr lang="en-US" smtClean="0"/>
-              <a:t>1/27/13</a:t>
             </a:fld>
             <a:endParaRPr lang="en-US"/>
           </a:p>
@@ -1434,25 +1390,19 @@
           <a:p>
             <a:fld id="{C1FF6DA9-008F-8B48-92A6-B652298478BF}" type="slidenum">
               <a:rPr lang="en-US" smtClean="0"/>
-              <a:t>‹#›</a:t>
             </a:fld>
             <a:endParaRPr lang="en-US"/>
           </a:p>
         </p:txBody>
       </p:sp>
     </p:spTree>
-    <p:extLst>
-      <p:ext uri="{BB962C8B-B14F-4D97-AF65-F5344CB8AC3E}">
-        <p14:creationId xmlns:p14="http://schemas.microsoft.com/office/powerpoint/2010/main" val="2209977519"/>
-      </p:ext>
-    </p:extLst>
   </p:cSld>
   <p:clrMap bg1="lt1" tx1="dk1" bg2="lt2" tx2="dk2" accent1="accent1" accent2="accent2" accent3="accent3" accent4="accent4" accent5="accent5" accent6="accent6" hlink="hlink" folHlink="folHlink"/>
   <p:sldLayoutIdLst>
-    <p:sldLayoutId id="2147483660" r:id="rId13"/>
-    <p:sldLayoutId id="2147483661" r:id="rId14"/>
-    <p:sldLayoutId id="2147483662" r:id="rId15"/>
-    <p:sldLayoutId id="2147483663" r:id="rId16"/>
+    <p:sldLayoutId id="2147483649" r:id="rId1"/>
+    <p:sldLayoutId id="2147483650" r:id="rId2"/>
+    <p:sldLayoutId id="2147483651" r:id="rId3"/>
+    <p:sldLayoutId id="2147483652" r:id="rId4"/>
   </p:sldLayoutIdLst>
   <p:txStyles>
     <p:titleStyle>
@@ -1476,7 +1426,7 @@
         <a:spcBef>
           <a:spcPct val="20000"/>
         </a:spcBef>
-        <a:buFont typeface="Arial"/>
+        <a:buFont typeface="Arial" panose="020B0604020202020204"/>
         <a:buChar char="•"/>
         <a:defRPr sz="3200" kern="1200">
           <a:solidFill>
@@ -1491,7 +1441,7 @@
         <a:spcBef>
           <a:spcPct val="20000"/>
         </a:spcBef>
-        <a:buFont typeface="Arial"/>
+        <a:buFont typeface="Arial" panose="020B0604020202020204"/>
         <a:buChar char="–"/>
         <a:defRPr sz="2800" kern="1200">
           <a:solidFill>
@@ -1506,7 +1456,7 @@
         <a:spcBef>
           <a:spcPct val="20000"/>
         </a:spcBef>
-        <a:buFont typeface="Arial"/>
+        <a:buFont typeface="Arial" panose="020B0604020202020204"/>
         <a:buChar char="•"/>
         <a:defRPr sz="2400" kern="1200">
           <a:solidFill>
@@ -1521,7 +1471,7 @@
         <a:spcBef>
           <a:spcPct val="20000"/>
         </a:spcBef>
-        <a:buFont typeface="Arial"/>
+        <a:buFont typeface="Arial" panose="020B0604020202020204"/>
         <a:buChar char="–"/>
         <a:defRPr sz="2000" kern="1200">
           <a:solidFill>
@@ -1536,7 +1486,7 @@
         <a:spcBef>
           <a:spcPct val="20000"/>
         </a:spcBef>
-        <a:buFont typeface="Arial"/>
+        <a:buFont typeface="Arial" panose="020B0604020202020204"/>
         <a:buChar char="»"/>
         <a:defRPr sz="2000" kern="1200">
           <a:solidFill>
@@ -1551,7 +1501,7 @@
         <a:spcBef>
           <a:spcPct val="20000"/>
         </a:spcBef>
-        <a:buFont typeface="Arial"/>
+        <a:buFont typeface="Arial" panose="020B0604020202020204"/>
         <a:buChar char="•"/>
         <a:defRPr sz="2000" kern="1200">
           <a:solidFill>
@@ -1566,7 +1516,7 @@
         <a:spcBef>
           <a:spcPct val="20000"/>
         </a:spcBef>
-        <a:buFont typeface="Arial"/>
+        <a:buFont typeface="Arial" panose="020B0604020202020204"/>
         <a:buChar char="•"/>
         <a:defRPr sz="2000" kern="1200">
           <a:solidFill>
@@ -1581,7 +1531,7 @@
         <a:spcBef>
           <a:spcPct val="20000"/>
         </a:spcBef>
-        <a:buFont typeface="Arial"/>
+        <a:buFont typeface="Arial" panose="020B0604020202020204"/>
         <a:buChar char="•"/>
         <a:defRPr sz="2000" kern="1200">
           <a:solidFill>
@@ -1596,7 +1546,7 @@
         <a:spcBef>
           <a:spcPct val="20000"/>
         </a:spcBef>
-        <a:buFont typeface="Arial"/>
+        <a:buFont typeface="Arial" panose="020B0604020202020204"/>
         <a:buChar char="•"/>
         <a:defRPr sz="2000" kern="1200">
           <a:solidFill>
@@ -1849,6 +1799,14 @@
               </a:rPr>
               <a:t>Unity 基础</a:t>
             </a:r>
+            <a:endParaRPr lang="zh-CN" sz="6900" b="1" dirty="0">
+              <a:solidFill>
+                <a:schemeClr val="dk1"/>
+              </a:solidFill>
+              <a:latin typeface="+mj-lt"/>
+              <a:ea typeface="+mj-ea"/>
+              <a:cs typeface="+mj-cs"/>
+            </a:endParaRPr>
           </a:p>
         </p:txBody>
       </p:sp>
@@ -1889,6 +1847,14 @@
               </a:rPr>
               <a:t>场景、组件、物理、渲染与打包</a:t>
             </a:r>
+            <a:endParaRPr lang="zh-CN" sz="3150" b="1" dirty="0">
+              <a:solidFill>
+                <a:schemeClr val="accent1"/>
+              </a:solidFill>
+              <a:latin typeface="+mj-lt"/>
+              <a:ea typeface="+mj-ea"/>
+              <a:cs typeface="+mj-cs"/>
+            </a:endParaRPr>
           </a:p>
         </p:txBody>
       </p:sp>
@@ -1929,6 +1895,14 @@
               </a:rPr>
               <a:t>把编辑器里的层级结构，变成可以运行的游戏</a:t>
             </a:r>
+            <a:endParaRPr lang="zh-CN" sz="2400" dirty="0">
+              <a:solidFill>
+                <a:schemeClr val="dk2"/>
+              </a:solidFill>
+              <a:latin typeface="+mn-lt"/>
+              <a:ea typeface="+mn-ea"/>
+              <a:cs typeface="+mn-cs"/>
+            </a:endParaRPr>
           </a:p>
         </p:txBody>
       </p:sp>
@@ -1936,7 +1910,11 @@
         <p:nvGrpSpPr>
           <p:cNvPr id="35" name="Group 35"/>
           <p:cNvGrpSpPr/>
-          <p:nvPr/>
+          <p:nvPr>
+            <p:custDataLst>
+              <p:tags r:id="rId1"/>
+            </p:custDataLst>
+          </p:nvPr>
         </p:nvGrpSpPr>
         <p:grpSpPr>
           <a:xfrm>
@@ -1950,7 +1928,11 @@
           <p:nvSpPr>
             <p:cNvPr id="7" name="Rectangle 7"/>
             <p:cNvSpPr/>
-            <p:nvPr/>
+            <p:nvPr>
+              <p:custDataLst>
+                <p:tags r:id="rId2"/>
+              </p:custDataLst>
+            </p:nvPr>
           </p:nvSpPr>
           <p:spPr>
             <a:xfrm>
@@ -1976,7 +1958,11 @@
           <p:nvSpPr>
             <p:cNvPr id="8" name="TextBox 8"/>
             <p:cNvSpPr txBox="1"/>
-            <p:nvPr/>
+            <p:nvPr>
+              <p:custDataLst>
+                <p:tags r:id="rId3"/>
+              </p:custDataLst>
+            </p:nvPr>
           </p:nvSpPr>
           <p:spPr>
             <a:xfrm>
@@ -2003,12 +1989,20 @@
                   <a:solidFill>
                     <a:schemeClr val="accent5"/>
                   </a:solidFill>
-                  <a:latin typeface="Consolas"/>
-                  <a:ea typeface="Consolas"/>
-                  <a:cs typeface="Consolas"/>
+                  <a:latin typeface="Consolas" panose="020B0609020204030204"/>
+                  <a:ea typeface="Consolas" panose="020B0609020204030204"/>
+                  <a:cs typeface="Consolas" panose="020B0609020204030204"/>
                 </a:rPr>
                 <a:t>SCENE → BUILD</a:t>
               </a:r>
+              <a:endParaRPr lang="en-US" sz="1800" dirty="0">
+                <a:solidFill>
+                  <a:schemeClr val="accent5"/>
+                </a:solidFill>
+                <a:latin typeface="Consolas" panose="020B0609020204030204"/>
+                <a:ea typeface="Consolas" panose="020B0609020204030204"/>
+                <a:cs typeface="Consolas" panose="020B0609020204030204"/>
+              </a:endParaRPr>
             </a:p>
           </p:txBody>
         </p:sp>
@@ -2030,7 +2024,11 @@
             <p:nvSpPr>
               <p:cNvPr id="9" name="Line 9"/>
               <p:cNvSpPr/>
-              <p:nvPr/>
+              <p:nvPr>
+                <p:custDataLst>
+                  <p:tags r:id="rId4"/>
+                </p:custDataLst>
+              </p:nvPr>
             </p:nvSpPr>
             <p:spPr>
               <a:xfrm>
@@ -2067,7 +2065,11 @@
             <p:nvSpPr>
               <p:cNvPr id="10" name="Line 10"/>
               <p:cNvSpPr/>
-              <p:nvPr/>
+              <p:nvPr>
+                <p:custDataLst>
+                  <p:tags r:id="rId5"/>
+                </p:custDataLst>
+              </p:nvPr>
             </p:nvSpPr>
             <p:spPr>
               <a:xfrm>
@@ -2104,7 +2106,11 @@
             <p:nvSpPr>
               <p:cNvPr id="11" name="Line 11"/>
               <p:cNvSpPr/>
-              <p:nvPr/>
+              <p:nvPr>
+                <p:custDataLst>
+                  <p:tags r:id="rId6"/>
+                </p:custDataLst>
+              </p:nvPr>
             </p:nvSpPr>
             <p:spPr>
               <a:xfrm>
@@ -2141,7 +2147,11 @@
             <p:nvSpPr>
               <p:cNvPr id="12" name="Line 12"/>
               <p:cNvSpPr/>
-              <p:nvPr/>
+              <p:nvPr>
+                <p:custDataLst>
+                  <p:tags r:id="rId7"/>
+                </p:custDataLst>
+              </p:nvPr>
             </p:nvSpPr>
             <p:spPr>
               <a:xfrm>
@@ -2178,7 +2188,11 @@
             <p:nvSpPr>
               <p:cNvPr id="13" name="Line 13"/>
               <p:cNvSpPr/>
-              <p:nvPr/>
+              <p:nvPr>
+                <p:custDataLst>
+                  <p:tags r:id="rId8"/>
+                </p:custDataLst>
+              </p:nvPr>
             </p:nvSpPr>
             <p:spPr>
               <a:xfrm>
@@ -2216,7 +2230,11 @@
           <p:nvSpPr>
             <p:cNvPr id="15" name="Rectangle 15"/>
             <p:cNvSpPr/>
-            <p:nvPr/>
+            <p:nvPr>
+              <p:custDataLst>
+                <p:tags r:id="rId9"/>
+              </p:custDataLst>
+            </p:nvPr>
           </p:nvSpPr>
           <p:spPr>
             <a:xfrm>
@@ -2240,7 +2258,11 @@
           <p:nvSpPr>
             <p:cNvPr id="16" name="TextBox 16"/>
             <p:cNvSpPr txBox="1"/>
-            <p:nvPr/>
+            <p:nvPr>
+              <p:custDataLst>
+                <p:tags r:id="rId10"/>
+              </p:custDataLst>
+            </p:nvPr>
           </p:nvSpPr>
           <p:spPr>
             <a:xfrm>
@@ -2273,6 +2295,14 @@
                 </a:rPr>
                 <a:t>Scene</a:t>
               </a:r>
+              <a:endParaRPr lang="en-US" sz="1800" b="1" dirty="0">
+                <a:solidFill>
+                  <a:srgbClr val="FFFFFF"/>
+                </a:solidFill>
+                <a:latin typeface="+mn-lt"/>
+                <a:ea typeface="+mn-ea"/>
+                <a:cs typeface="+mn-cs"/>
+              </a:endParaRPr>
             </a:p>
           </p:txBody>
         </p:sp>
@@ -2294,7 +2324,11 @@
             <p:nvSpPr>
               <p:cNvPr id="17" name="Rectangle 17"/>
               <p:cNvSpPr/>
-              <p:nvPr/>
+              <p:nvPr>
+                <p:custDataLst>
+                  <p:tags r:id="rId11"/>
+                </p:custDataLst>
+              </p:nvPr>
             </p:nvSpPr>
             <p:spPr>
               <a:xfrm>
@@ -2320,7 +2354,11 @@
             <p:nvSpPr>
               <p:cNvPr id="18" name="TextBox 18"/>
               <p:cNvSpPr txBox="1"/>
-              <p:nvPr/>
+              <p:nvPr>
+                <p:custDataLst>
+                  <p:tags r:id="rId12"/>
+                </p:custDataLst>
+              </p:nvPr>
             </p:nvSpPr>
             <p:spPr>
               <a:xfrm>
@@ -2353,6 +2391,14 @@
                   </a:rPr>
                   <a:t>环境</a:t>
                 </a:r>
+                <a:endParaRPr lang="zh-CN" sz="1800" b="1" dirty="0">
+                  <a:solidFill>
+                    <a:schemeClr val="accent1"/>
+                  </a:solidFill>
+                  <a:latin typeface="+mn-lt"/>
+                  <a:ea typeface="+mn-ea"/>
+                  <a:cs typeface="+mn-cs"/>
+                </a:endParaRPr>
               </a:p>
             </p:txBody>
           </p:sp>
@@ -2360,7 +2406,11 @@
             <p:nvSpPr>
               <p:cNvPr id="19" name="Rectangle 19"/>
               <p:cNvSpPr/>
-              <p:nvPr/>
+              <p:nvPr>
+                <p:custDataLst>
+                  <p:tags r:id="rId13"/>
+                </p:custDataLst>
+              </p:nvPr>
             </p:nvSpPr>
             <p:spPr>
               <a:xfrm>
@@ -2386,7 +2436,11 @@
             <p:nvSpPr>
               <p:cNvPr id="20" name="TextBox 20"/>
               <p:cNvSpPr txBox="1"/>
-              <p:nvPr/>
+              <p:nvPr>
+                <p:custDataLst>
+                  <p:tags r:id="rId14"/>
+                </p:custDataLst>
+              </p:nvPr>
             </p:nvSpPr>
             <p:spPr>
               <a:xfrm>
@@ -2419,6 +2473,14 @@
                   </a:rPr>
                   <a:t>玩家</a:t>
                 </a:r>
+                <a:endParaRPr lang="zh-CN" sz="1800" b="1" dirty="0">
+                  <a:solidFill>
+                    <a:srgbClr val="2F8F6A"/>
+                  </a:solidFill>
+                  <a:latin typeface="+mn-lt"/>
+                  <a:ea typeface="+mn-ea"/>
+                  <a:cs typeface="+mn-cs"/>
+                </a:endParaRPr>
               </a:p>
             </p:txBody>
           </p:sp>
@@ -2426,7 +2488,11 @@
             <p:nvSpPr>
               <p:cNvPr id="21" name="Rectangle 21"/>
               <p:cNvSpPr/>
-              <p:nvPr/>
+              <p:nvPr>
+                <p:custDataLst>
+                  <p:tags r:id="rId15"/>
+                </p:custDataLst>
+              </p:nvPr>
             </p:nvSpPr>
             <p:spPr>
               <a:xfrm>
@@ -2452,7 +2518,11 @@
             <p:nvSpPr>
               <p:cNvPr id="22" name="TextBox 22"/>
               <p:cNvSpPr txBox="1"/>
-              <p:nvPr/>
+              <p:nvPr>
+                <p:custDataLst>
+                  <p:tags r:id="rId16"/>
+                </p:custDataLst>
+              </p:nvPr>
             </p:nvSpPr>
             <p:spPr>
               <a:xfrm>
@@ -2485,6 +2555,14 @@
                   </a:rPr>
                   <a:t>相机</a:t>
                 </a:r>
+                <a:endParaRPr lang="zh-CN" sz="1800" b="1" dirty="0">
+                  <a:solidFill>
+                    <a:srgbClr val="8C5A00"/>
+                  </a:solidFill>
+                  <a:latin typeface="+mn-lt"/>
+                  <a:ea typeface="+mn-ea"/>
+                  <a:cs typeface="+mn-cs"/>
+                </a:endParaRPr>
               </a:p>
             </p:txBody>
           </p:sp>
@@ -2493,7 +2571,11 @@
           <p:nvSpPr>
             <p:cNvPr id="24" name="Freeform 24"/>
             <p:cNvSpPr/>
-            <p:nvPr/>
+            <p:nvPr>
+              <p:custDataLst>
+                <p:tags r:id="rId17"/>
+              </p:custDataLst>
+            </p:nvPr>
           </p:nvSpPr>
           <p:spPr>
             <a:xfrm>
@@ -2531,7 +2613,11 @@
           <p:nvSpPr>
             <p:cNvPr id="25" name="Freeform 25"/>
             <p:cNvSpPr/>
-            <p:nvPr/>
+            <p:nvPr>
+              <p:custDataLst>
+                <p:tags r:id="rId18"/>
+              </p:custDataLst>
+            </p:nvPr>
           </p:nvSpPr>
           <p:spPr>
             <a:xfrm>
@@ -2571,7 +2657,11 @@
           <p:nvSpPr>
             <p:cNvPr id="26" name="Rectangle 26"/>
             <p:cNvSpPr/>
-            <p:nvPr/>
+            <p:nvPr>
+              <p:custDataLst>
+                <p:tags r:id="rId19"/>
+              </p:custDataLst>
+            </p:nvPr>
           </p:nvSpPr>
           <p:spPr>
             <a:xfrm>
@@ -2609,7 +2699,11 @@
             <p:nvSpPr>
               <p:cNvPr id="27" name="Freeform 27"/>
               <p:cNvSpPr/>
-              <p:nvPr/>
+              <p:nvPr>
+                <p:custDataLst>
+                  <p:tags r:id="rId20"/>
+                </p:custDataLst>
+              </p:nvPr>
             </p:nvSpPr>
             <p:spPr>
               <a:xfrm>
@@ -2657,7 +2751,11 @@
             <p:nvSpPr>
               <p:cNvPr id="28" name="Freeform 28"/>
               <p:cNvSpPr/>
-              <p:nvPr/>
+              <p:nvPr>
+                <p:custDataLst>
+                  <p:tags r:id="rId21"/>
+                </p:custDataLst>
+              </p:nvPr>
             </p:nvSpPr>
             <p:spPr>
               <a:xfrm>
@@ -2693,7 +2791,11 @@
             <p:nvSpPr>
               <p:cNvPr id="29" name="Freeform 29"/>
               <p:cNvSpPr/>
-              <p:nvPr/>
+              <p:nvPr>
+                <p:custDataLst>
+                  <p:tags r:id="rId22"/>
+                </p:custDataLst>
+              </p:nvPr>
             </p:nvSpPr>
             <p:spPr>
               <a:xfrm>
@@ -2729,7 +2831,11 @@
             <p:nvSpPr>
               <p:cNvPr id="30" name="Freeform 30"/>
               <p:cNvSpPr/>
-              <p:nvPr/>
+              <p:nvPr>
+                <p:custDataLst>
+                  <p:tags r:id="rId23"/>
+                </p:custDataLst>
+              </p:nvPr>
             </p:nvSpPr>
             <p:spPr>
               <a:xfrm>
@@ -2765,7 +2871,11 @@
             <p:nvSpPr>
               <p:cNvPr id="31" name="Freeform 31"/>
               <p:cNvSpPr/>
-              <p:nvPr/>
+              <p:nvPr>
+                <p:custDataLst>
+                  <p:tags r:id="rId24"/>
+                </p:custDataLst>
+              </p:nvPr>
             </p:nvSpPr>
             <p:spPr>
               <a:xfrm>
@@ -2801,7 +2911,11 @@
             <p:nvSpPr>
               <p:cNvPr id="32" name="Freeform 32"/>
               <p:cNvSpPr/>
-              <p:nvPr/>
+              <p:nvPr>
+                <p:custDataLst>
+                  <p:tags r:id="rId25"/>
+                </p:custDataLst>
+              </p:nvPr>
             </p:nvSpPr>
             <p:spPr>
               <a:xfrm>
@@ -2841,12 +2955,16 @@
           <p:nvSpPr>
             <p:cNvPr id="34" name="TextBox 34"/>
             <p:cNvSpPr txBox="1"/>
-            <p:nvPr/>
+            <p:nvPr>
+              <p:custDataLst>
+                <p:tags r:id="rId26"/>
+              </p:custDataLst>
+            </p:nvPr>
           </p:nvSpPr>
           <p:spPr>
             <a:xfrm>
-              <a:off x="8589006" y="4587240"/>
-              <a:ext cx="1700538" cy="352044"/>
+              <a:off x="9121775" y="4587240"/>
+              <a:ext cx="635000" cy="276860"/>
             </a:xfrm>
             <a:prstGeom prst="rect">
               <a:avLst/>
@@ -2872,8 +2990,16 @@
                   <a:ea typeface="+mn-ea"/>
                   <a:cs typeface="+mn-cs"/>
                 </a:rPr>
-                <a:t>Windows Build</a:t>
+                <a:t> Build</a:t>
               </a:r>
+              <a:endParaRPr lang="en-US" sz="1800" b="1" dirty="0">
+                <a:solidFill>
+                  <a:srgbClr val="FFFFFF"/>
+                </a:solidFill>
+                <a:latin typeface="+mn-lt"/>
+                <a:ea typeface="+mn-ea"/>
+                <a:cs typeface="+mn-cs"/>
+              </a:endParaRPr>
             </a:p>
           </p:txBody>
         </p:sp>
@@ -3153,69 +3279,46 @@
                   <a:solidFill>
                     <a:schemeClr val="dk1"/>
                   </a:solidFill>
-                  <a:latin typeface="Consolas"/>
-                  <a:ea typeface="Consolas"/>
-                  <a:cs typeface="Consolas"/>
+                  <a:latin typeface="Consolas" panose="020B0609020204030204"/>
+                  <a:ea typeface="Consolas" panose="020B0609020204030204"/>
+                  <a:cs typeface="Consolas" panose="020B0609020204030204"/>
                 </a:rPr>
                 <a:t>GameObject + Component + Transform</a:t>
               </a:r>
+              <a:endParaRPr lang="en-US" sz="1800" b="1" dirty="0">
+                <a:solidFill>
+                  <a:schemeClr val="dk1"/>
+                </a:solidFill>
+                <a:latin typeface="Consolas" panose="020B0609020204030204"/>
+                <a:ea typeface="Consolas" panose="020B0609020204030204"/>
+                <a:cs typeface="Consolas" panose="020B0609020204030204"/>
+              </a:endParaRPr>
             </a:p>
           </p:txBody>
         </p:sp>
       </p:grpSp>
-      <p:sp>
-        <p:nvSpPr>
-          <p:cNvPr id="44" name="TextBox 44"/>
-          <p:cNvSpPr txBox="1"/>
-          <p:nvPr/>
-        </p:nvSpPr>
-        <p:spPr>
-          <a:xfrm>
-            <a:off x="678942" y="6274118"/>
-            <a:ext cx="2338715" cy="264033"/>
-          </a:xfrm>
-          <a:prstGeom prst="rect">
-            <a:avLst/>
-          </a:prstGeom>
-          <a:noFill/>
-          <a:ln>
-            <a:noFill/>
-          </a:ln>
-        </p:spPr>
-        <p:txBody>
-          <a:bodyPr wrap="none" lIns="0" tIns="0" rIns="0" bIns="0" anchor="t" anchorCtr="0">
-            <a:spAutoFit/>
-          </a:bodyPr>
-          <a:lstStyle/>
-          <a:p>
-            <a:pPr algn="l"/>
-            <a:r>
-              <a:rPr lang="zh-CN" sz="1350" dirty="0">
-                <a:solidFill>
-                  <a:schemeClr val="accent5"/>
-                </a:solidFill>
-                <a:latin typeface="+mn-lt"/>
-                <a:ea typeface="+mn-ea"/>
-                <a:cs typeface="+mn-cs"/>
-              </a:rPr>
-              <a:t>Unity 基础课程 · 第 03 单元</a:t>
-            </a:r>
-          </a:p>
-        </p:txBody>
-      </p:sp>
     </p:spTree>
   </p:cSld>
   <p:clrMapOvr>
     <a:masterClrMapping/>
   </p:clrMapOvr>
-  <p:transition xmlns:p14="http://schemas.microsoft.com/office/powerpoint/2010/main" p14:dur="400">
-    <p:fade/>
-  </p:transition>
+  <mc:AlternateContent xmlns:mc="http://schemas.openxmlformats.org/markup-compatibility/2006">
+    <mc:Choice xmlns:p14="http://schemas.microsoft.com/office/powerpoint/2010/main" Requires="p14">
+      <p:transition p14:dur="400">
+        <p:fade/>
+      </p:transition>
+    </mc:Choice>
+    <mc:Fallback>
+      <p:transition>
+        <p:fade/>
+      </p:transition>
+    </mc:Fallback>
+  </mc:AlternateContent>
 </p:sld>
 </file>
 
 <file path=ppt/slides/slide10.xml><?xml version="1.0" encoding="utf-8"?>
-<p:sld xmlns:a="http://schemas.openxmlformats.org/drawingml/2006/main" xmlns:p="http://schemas.openxmlformats.org/presentationml/2006/main" xmlns:p14="http://schemas.microsoft.com/office/powerpoint/2010/main">
+<p:sld xmlns:a="http://schemas.openxmlformats.org/drawingml/2006/main" xmlns:r="http://schemas.openxmlformats.org/officeDocument/2006/relationships" xmlns:p="http://schemas.openxmlformats.org/presentationml/2006/main">
   <p:cSld>
     <p:bg>
       <p:bgPr>
@@ -3248,7 +3351,7 @@
         <p:spPr>
           <a:xfrm>
             <a:off x="552450" y="270510"/>
-            <a:ext cx="17619740" cy="819150"/>
+            <a:ext cx="4422140" cy="645795"/>
           </a:xfrm>
           <a:prstGeom prst="rect">
             <a:avLst/>
@@ -3274,8 +3377,16 @@
                 <a:ea typeface="+mj-ea"/>
                 <a:cs typeface="+mj-cs"/>
               </a:rPr>
-              <a:t>把相机画面送进 UI：Camera → RenderTexture → RawImage</a:t>
+              <a:t>把相机画面送进 UI</a:t>
             </a:r>
+            <a:endParaRPr lang="zh-CN" sz="4200" b="1" dirty="0">
+              <a:solidFill>
+                <a:schemeClr val="dk1"/>
+              </a:solidFill>
+              <a:latin typeface="+mj-lt"/>
+              <a:ea typeface="+mj-ea"/>
+              <a:cs typeface="+mj-cs"/>
+            </a:endParaRPr>
           </a:p>
         </p:txBody>
       </p:sp>
@@ -3316,6 +3427,14 @@
               </a:rPr>
               <a:t>常见于小地图、监控屏、角色预览与画中画</a:t>
             </a:r>
+            <a:endParaRPr lang="zh-CN" sz="1800" dirty="0">
+              <a:solidFill>
+                <a:schemeClr val="dk2"/>
+              </a:solidFill>
+              <a:latin typeface="+mn-lt"/>
+              <a:ea typeface="+mn-ea"/>
+              <a:cs typeface="+mn-cs"/>
+            </a:endParaRPr>
           </a:p>
         </p:txBody>
       </p:sp>
@@ -3591,6 +3710,14 @@
                   </a:rPr>
                   <a:t>Camera</a:t>
                 </a:r>
+                <a:endParaRPr lang="en-US" sz="2700" b="1" dirty="0">
+                  <a:solidFill>
+                    <a:schemeClr val="dk1"/>
+                  </a:solidFill>
+                  <a:latin typeface="+mn-lt"/>
+                  <a:ea typeface="+mn-ea"/>
+                  <a:cs typeface="+mn-cs"/>
+                </a:endParaRPr>
               </a:p>
             </p:txBody>
           </p:sp>
@@ -3631,6 +3758,14 @@
                   </a:rPr>
                   <a:t>选择要渲染的场景</a:t>
                 </a:r>
+                <a:endParaRPr lang="zh-CN" sz="1800" dirty="0">
+                  <a:solidFill>
+                    <a:schemeClr val="dk2"/>
+                  </a:solidFill>
+                  <a:latin typeface="+mn-lt"/>
+                  <a:ea typeface="+mn-ea"/>
+                  <a:cs typeface="+mn-cs"/>
+                </a:endParaRPr>
               </a:p>
             </p:txBody>
           </p:sp>
@@ -3695,6 +3830,14 @@
                   </a:rPr>
                   <a:t>Target Texture</a:t>
                 </a:r>
+                <a:endParaRPr lang="en-US" sz="1800" b="1" dirty="0">
+                  <a:solidFill>
+                    <a:schemeClr val="accent1"/>
+                  </a:solidFill>
+                  <a:latin typeface="+mn-lt"/>
+                  <a:ea typeface="+mn-ea"/>
+                  <a:cs typeface="+mn-cs"/>
+                </a:endParaRPr>
               </a:p>
             </p:txBody>
           </p:sp>
@@ -3965,6 +4108,14 @@
                   </a:rPr>
                   <a:t>RenderTexture</a:t>
                 </a:r>
+                <a:endParaRPr lang="en-US" sz="2700" b="1" dirty="0">
+                  <a:solidFill>
+                    <a:schemeClr val="dk1"/>
+                  </a:solidFill>
+                  <a:latin typeface="+mn-lt"/>
+                  <a:ea typeface="+mn-ea"/>
+                  <a:cs typeface="+mn-cs"/>
+                </a:endParaRPr>
               </a:p>
             </p:txBody>
           </p:sp>
@@ -4005,6 +4156,14 @@
                   </a:rPr>
                   <a:t>接收相机输出的纹理</a:t>
                 </a:r>
+                <a:endParaRPr lang="zh-CN" sz="1800" dirty="0">
+                  <a:solidFill>
+                    <a:schemeClr val="dk2"/>
+                  </a:solidFill>
+                  <a:latin typeface="+mn-lt"/>
+                  <a:ea typeface="+mn-ea"/>
+                  <a:cs typeface="+mn-cs"/>
+                </a:endParaRPr>
               </a:p>
             </p:txBody>
           </p:sp>
@@ -4069,6 +4228,14 @@
                   </a:rPr>
                   <a:t>分辨率影响清晰度</a:t>
                 </a:r>
+                <a:endParaRPr lang="zh-CN" sz="1800" b="1" dirty="0">
+                  <a:solidFill>
+                    <a:srgbClr val="8C5A00"/>
+                  </a:solidFill>
+                  <a:latin typeface="+mn-lt"/>
+                  <a:ea typeface="+mn-ea"/>
+                  <a:cs typeface="+mn-cs"/>
+                </a:endParaRPr>
               </a:p>
             </p:txBody>
           </p:sp>
@@ -4341,6 +4508,14 @@
                   </a:rPr>
                   <a:t>RawImage</a:t>
                 </a:r>
+                <a:endParaRPr lang="en-US" sz="2700" b="1" dirty="0">
+                  <a:solidFill>
+                    <a:schemeClr val="dk1"/>
+                  </a:solidFill>
+                  <a:latin typeface="+mn-lt"/>
+                  <a:ea typeface="+mn-ea"/>
+                  <a:cs typeface="+mn-cs"/>
+                </a:endParaRPr>
               </a:p>
             </p:txBody>
           </p:sp>
@@ -4381,6 +4556,14 @@
                   </a:rPr>
                   <a:t>在 Canvas 上显示纹理</a:t>
                 </a:r>
+                <a:endParaRPr lang="zh-CN" sz="1800" dirty="0">
+                  <a:solidFill>
+                    <a:schemeClr val="dk2"/>
+                  </a:solidFill>
+                  <a:latin typeface="+mn-lt"/>
+                  <a:ea typeface="+mn-ea"/>
+                  <a:cs typeface="+mn-cs"/>
+                </a:endParaRPr>
               </a:p>
             </p:txBody>
           </p:sp>
@@ -4445,6 +4628,14 @@
                   </a:rPr>
                   <a:t>Texture = 输出纹理</a:t>
                 </a:r>
+                <a:endParaRPr lang="zh-CN" sz="1800" b="1" dirty="0">
+                  <a:solidFill>
+                    <a:srgbClr val="2F8F6A"/>
+                  </a:solidFill>
+                  <a:latin typeface="+mn-lt"/>
+                  <a:ea typeface="+mn-ea"/>
+                  <a:cs typeface="+mn-cs"/>
+                </a:endParaRPr>
               </a:p>
             </p:txBody>
           </p:sp>
@@ -4513,6 +4704,14 @@
               </a:rPr>
               <a:t>关键：相机与 UI 共享同一张 RenderTexture 资产</a:t>
             </a:r>
+            <a:endParaRPr lang="zh-CN" sz="2400" b="1" dirty="0">
+              <a:solidFill>
+                <a:schemeClr val="dk1"/>
+              </a:solidFill>
+              <a:latin typeface="+mn-lt"/>
+              <a:ea typeface="+mn-ea"/>
+              <a:cs typeface="+mn-cs"/>
+            </a:endParaRPr>
           </a:p>
         </p:txBody>
       </p:sp>
@@ -4568,46 +4767,6 @@
         </p:sp>
         <p:sp>
           <p:nvSpPr>
-            <p:cNvPr id="40" name="TextBox 40"/>
-            <p:cNvSpPr txBox="1"/>
-            <p:nvPr/>
-          </p:nvSpPr>
-          <p:spPr>
-            <a:xfrm>
-              <a:off x="564642" y="6521768"/>
-              <a:ext cx="2322119" cy="264033"/>
-            </a:xfrm>
-            <a:prstGeom prst="rect">
-              <a:avLst/>
-            </a:prstGeom>
-            <a:noFill/>
-            <a:ln>
-              <a:noFill/>
-            </a:ln>
-          </p:spPr>
-          <p:txBody>
-            <a:bodyPr wrap="none" lIns="0" tIns="0" rIns="0" bIns="0" anchor="t" anchorCtr="0">
-              <a:spAutoFit/>
-            </a:bodyPr>
-            <a:lstStyle/>
-            <a:p>
-              <a:pPr algn="l"/>
-              <a:r>
-                <a:rPr lang="zh-CN" sz="1350" dirty="0">
-                  <a:solidFill>
-                    <a:schemeClr val="accent5"/>
-                  </a:solidFill>
-                  <a:latin typeface="+mn-lt"/>
-                  <a:ea typeface="+mn-ea"/>
-                  <a:cs typeface="+mn-cs"/>
-                </a:rPr>
-                <a:t>Camera Pipeline · 画面复用</a:t>
-              </a:r>
-            </a:p>
-          </p:txBody>
-        </p:sp>
-        <p:sp>
-          <p:nvSpPr>
             <p:cNvPr id="41" name="TextBox 41"/>
             <p:cNvSpPr txBox="1"/>
             <p:nvPr/>
@@ -4641,8 +4800,15 @@
                   <a:ea typeface="+mn-ea"/>
                   <a:cs typeface="+mn-cs"/>
                 </a:rPr>
-                <a:t>10</a:t>
               </a:fld>
+              <a:endParaRPr lang="en-US" sz="1350" dirty="0">
+                <a:solidFill>
+                  <a:schemeClr val="accent5"/>
+                </a:solidFill>
+                <a:latin typeface="+mn-lt"/>
+                <a:ea typeface="+mn-ea"/>
+                <a:cs typeface="+mn-cs"/>
+              </a:endParaRPr>
             </a:p>
           </p:txBody>
         </p:sp>
@@ -4652,14 +4818,23 @@
   <p:clrMapOvr>
     <a:masterClrMapping/>
   </p:clrMapOvr>
-  <p:transition p14:dur="400">
-    <p:fade/>
-  </p:transition>
+  <mc:AlternateContent xmlns:mc="http://schemas.openxmlformats.org/markup-compatibility/2006">
+    <mc:Choice xmlns:p14="http://schemas.microsoft.com/office/powerpoint/2010/main" Requires="p14">
+      <p:transition p14:dur="400">
+        <p:fade/>
+      </p:transition>
+    </mc:Choice>
+    <mc:Fallback>
+      <p:transition>
+        <p:fade/>
+      </p:transition>
+    </mc:Fallback>
+  </mc:AlternateContent>
 </p:sld>
 </file>
 
 <file path=ppt/slides/slide11.xml><?xml version="1.0" encoding="utf-8"?>
-<p:sld xmlns:a="http://schemas.openxmlformats.org/drawingml/2006/main" xmlns:p="http://schemas.openxmlformats.org/presentationml/2006/main" xmlns:p14="http://schemas.microsoft.com/office/powerpoint/2010/main">
+<p:sld xmlns:a="http://schemas.openxmlformats.org/drawingml/2006/main" xmlns:r="http://schemas.openxmlformats.org/officeDocument/2006/relationships" xmlns:p="http://schemas.openxmlformats.org/presentationml/2006/main">
   <p:cSld>
     <p:bg>
       <p:bgPr>
@@ -4720,6 +4895,14 @@
               </a:rPr>
               <a:t>Prefab：把调好的对象，变成可复用的资产</a:t>
             </a:r>
+            <a:endParaRPr lang="zh-CN" sz="4200" b="1" dirty="0">
+              <a:solidFill>
+                <a:schemeClr val="dk1"/>
+              </a:solidFill>
+              <a:latin typeface="+mj-lt"/>
+              <a:ea typeface="+mj-ea"/>
+              <a:cs typeface="+mj-cs"/>
+            </a:endParaRPr>
           </a:p>
         </p:txBody>
       </p:sp>
@@ -4760,6 +4943,14 @@
               </a:rPr>
               <a:t>统一来源、批量复用、局部覆盖；角色再用 PlayerRoot 组织模块</a:t>
             </a:r>
+            <a:endParaRPr lang="zh-CN" sz="1800" dirty="0">
+              <a:solidFill>
+                <a:schemeClr val="dk2"/>
+              </a:solidFill>
+              <a:latin typeface="+mn-lt"/>
+              <a:ea typeface="+mn-ea"/>
+              <a:cs typeface="+mn-cs"/>
+            </a:endParaRPr>
           </a:p>
         </p:txBody>
       </p:sp>
@@ -4840,6 +5031,14 @@
                 </a:rPr>
                 <a:t>Prefab 资产与实例</a:t>
               </a:r>
+              <a:endParaRPr lang="zh-CN" sz="2700" b="1" dirty="0">
+                <a:solidFill>
+                  <a:schemeClr val="accent1"/>
+                </a:solidFill>
+                <a:latin typeface="+mn-lt"/>
+                <a:ea typeface="+mn-ea"/>
+                <a:cs typeface="+mn-cs"/>
+              </a:endParaRPr>
             </a:p>
           </p:txBody>
         </p:sp>
@@ -5114,6 +5313,14 @@
                 </a:rPr>
                 <a:t>Player.prefab</a:t>
               </a:r>
+              <a:endParaRPr lang="en-US" sz="1800" b="1" dirty="0">
+                <a:solidFill>
+                  <a:srgbClr val="FFFFFF"/>
+                </a:solidFill>
+                <a:latin typeface="+mn-lt"/>
+                <a:ea typeface="+mn-ea"/>
+                <a:cs typeface="+mn-cs"/>
+              </a:endParaRPr>
             </a:p>
           </p:txBody>
         </p:sp>
@@ -5441,6 +5648,14 @@
                   </a:rPr>
                   <a:t>实例 A</a:t>
                 </a:r>
+                <a:endParaRPr lang="zh-CN" sz="1800" dirty="0">
+                  <a:solidFill>
+                    <a:schemeClr val="accent1"/>
+                  </a:solidFill>
+                  <a:latin typeface="+mn-lt"/>
+                  <a:ea typeface="+mn-ea"/>
+                  <a:cs typeface="+mn-cs"/>
+                </a:endParaRPr>
               </a:p>
             </p:txBody>
           </p:sp>
@@ -5481,6 +5696,14 @@
                   </a:rPr>
                   <a:t>实例 B</a:t>
                 </a:r>
+                <a:endParaRPr lang="zh-CN" sz="1800" dirty="0">
+                  <a:solidFill>
+                    <a:srgbClr val="2F8F6A"/>
+                  </a:solidFill>
+                  <a:latin typeface="+mn-lt"/>
+                  <a:ea typeface="+mn-ea"/>
+                  <a:cs typeface="+mn-cs"/>
+                </a:endParaRPr>
               </a:p>
             </p:txBody>
           </p:sp>
@@ -5521,6 +5744,14 @@
                   </a:rPr>
                   <a:t>实例 C</a:t>
                 </a:r>
+                <a:endParaRPr lang="zh-CN" sz="1800" dirty="0">
+                  <a:solidFill>
+                    <a:srgbClr val="8C5A00"/>
+                  </a:solidFill>
+                  <a:latin typeface="+mn-lt"/>
+                  <a:ea typeface="+mn-ea"/>
+                  <a:cs typeface="+mn-cs"/>
+                </a:endParaRPr>
               </a:p>
             </p:txBody>
           </p:sp>
@@ -5562,6 +5793,14 @@
                 </a:rPr>
                 <a:t>修改资产 → 实例同步</a:t>
               </a:r>
+              <a:endParaRPr lang="zh-CN" sz="1800" dirty="0">
+                <a:solidFill>
+                  <a:schemeClr val="dk2"/>
+                </a:solidFill>
+                <a:latin typeface="+mn-lt"/>
+                <a:ea typeface="+mn-ea"/>
+                <a:cs typeface="+mn-cs"/>
+              </a:endParaRPr>
             </a:p>
           </p:txBody>
         </p:sp>
@@ -5602,6 +5841,14 @@
                 </a:rPr>
                 <a:t>Override 只保留差异</a:t>
               </a:r>
+              <a:endParaRPr lang="zh-CN" sz="1800" b="1" dirty="0">
+                <a:solidFill>
+                  <a:srgbClr val="D85C45"/>
+                </a:solidFill>
+                <a:latin typeface="+mn-lt"/>
+                <a:ea typeface="+mn-ea"/>
+                <a:cs typeface="+mn-cs"/>
+              </a:endParaRPr>
             </a:p>
           </p:txBody>
         </p:sp>
@@ -5874,6 +6121,14 @@
                 </a:rPr>
                 <a:t>PlayerRoot：稳定的角色根节点</a:t>
               </a:r>
+              <a:endParaRPr lang="zh-CN" sz="2700" b="1" dirty="0">
+                <a:solidFill>
+                  <a:schemeClr val="dk1"/>
+                </a:solidFill>
+                <a:latin typeface="+mn-lt"/>
+                <a:ea typeface="+mn-ea"/>
+                <a:cs typeface="+mn-cs"/>
+              </a:endParaRPr>
             </a:p>
           </p:txBody>
         </p:sp>
@@ -5938,6 +6193,14 @@
                 </a:rPr>
                 <a:t>PlayerRoot</a:t>
               </a:r>
+              <a:endParaRPr lang="en-US" sz="2400" b="1" dirty="0">
+                <a:solidFill>
+                  <a:srgbClr val="FFFFFF"/>
+                </a:solidFill>
+                <a:latin typeface="+mn-lt"/>
+                <a:ea typeface="+mn-ea"/>
+                <a:cs typeface="+mn-cs"/>
+              </a:endParaRPr>
             </a:p>
           </p:txBody>
         </p:sp>
@@ -6327,6 +6590,14 @@
                   </a:rPr>
                   <a:t>Visual</a:t>
                 </a:r>
+                <a:endParaRPr lang="en-US" sz="1800" b="1" dirty="0">
+                  <a:solidFill>
+                    <a:schemeClr val="accent1"/>
+                  </a:solidFill>
+                  <a:latin typeface="+mn-lt"/>
+                  <a:ea typeface="+mn-ea"/>
+                  <a:cs typeface="+mn-cs"/>
+                </a:endParaRPr>
               </a:p>
             </p:txBody>
           </p:sp>
@@ -6367,6 +6638,14 @@
                   </a:rPr>
                   <a:t>模型动画</a:t>
                 </a:r>
+                <a:endParaRPr lang="zh-CN" sz="1800" dirty="0">
+                  <a:solidFill>
+                    <a:schemeClr val="dk2"/>
+                  </a:solidFill>
+                  <a:latin typeface="+mn-lt"/>
+                  <a:ea typeface="+mn-ea"/>
+                  <a:cs typeface="+mn-cs"/>
+                </a:endParaRPr>
               </a:p>
             </p:txBody>
           </p:sp>
@@ -6407,6 +6686,14 @@
                   </a:rPr>
                   <a:t>Physics</a:t>
                 </a:r>
+                <a:endParaRPr lang="en-US" sz="1800" b="1" dirty="0">
+                  <a:solidFill>
+                    <a:srgbClr val="2F8F6A"/>
+                  </a:solidFill>
+                  <a:latin typeface="+mn-lt"/>
+                  <a:ea typeface="+mn-ea"/>
+                  <a:cs typeface="+mn-cs"/>
+                </a:endParaRPr>
               </a:p>
             </p:txBody>
           </p:sp>
@@ -6447,6 +6734,14 @@
                   </a:rPr>
                   <a:t>碰撞控制</a:t>
                 </a:r>
+                <a:endParaRPr lang="zh-CN" sz="1800" dirty="0">
+                  <a:solidFill>
+                    <a:schemeClr val="dk2"/>
+                  </a:solidFill>
+                  <a:latin typeface="+mn-lt"/>
+                  <a:ea typeface="+mn-ea"/>
+                  <a:cs typeface="+mn-cs"/>
+                </a:endParaRPr>
               </a:p>
             </p:txBody>
           </p:sp>
@@ -6487,6 +6782,14 @@
                   </a:rPr>
                   <a:t>Camera</a:t>
                 </a:r>
+                <a:endParaRPr lang="en-US" sz="1800" b="1" dirty="0">
+                  <a:solidFill>
+                    <a:srgbClr val="8C5A00"/>
+                  </a:solidFill>
+                  <a:latin typeface="+mn-lt"/>
+                  <a:ea typeface="+mn-ea"/>
+                  <a:cs typeface="+mn-cs"/>
+                </a:endParaRPr>
               </a:p>
             </p:txBody>
           </p:sp>
@@ -6527,6 +6830,14 @@
                   </a:rPr>
                   <a:t>镜头轴</a:t>
                 </a:r>
+                <a:endParaRPr lang="zh-CN" sz="1800" dirty="0">
+                  <a:solidFill>
+                    <a:schemeClr val="dk2"/>
+                  </a:solidFill>
+                  <a:latin typeface="+mn-lt"/>
+                  <a:ea typeface="+mn-ea"/>
+                  <a:cs typeface="+mn-cs"/>
+                </a:endParaRPr>
               </a:p>
             </p:txBody>
           </p:sp>
@@ -6567,6 +6878,14 @@
                   </a:rPr>
                   <a:t>Scripts</a:t>
                 </a:r>
+                <a:endParaRPr lang="en-US" sz="1800" b="1" dirty="0">
+                  <a:solidFill>
+                    <a:schemeClr val="dk2"/>
+                  </a:solidFill>
+                  <a:latin typeface="+mn-lt"/>
+                  <a:ea typeface="+mn-ea"/>
+                  <a:cs typeface="+mn-cs"/>
+                </a:endParaRPr>
               </a:p>
             </p:txBody>
           </p:sp>
@@ -6607,6 +6926,14 @@
                   </a:rPr>
                   <a:t>输入行为</a:t>
                 </a:r>
+                <a:endParaRPr lang="zh-CN" sz="1800" dirty="0">
+                  <a:solidFill>
+                    <a:schemeClr val="dk2"/>
+                  </a:solidFill>
+                  <a:latin typeface="+mn-lt"/>
+                  <a:ea typeface="+mn-ea"/>
+                  <a:cs typeface="+mn-cs"/>
+                </a:endParaRPr>
               </a:p>
             </p:txBody>
           </p:sp>
@@ -6648,6 +6975,14 @@
                 </a:rPr>
                 <a:t>根节点负责移动，子节点各司其职</a:t>
               </a:r>
+              <a:endParaRPr lang="zh-CN" sz="1800" b="1" dirty="0">
+                <a:solidFill>
+                  <a:schemeClr val="dk1"/>
+                </a:solidFill>
+                <a:latin typeface="+mn-lt"/>
+                <a:ea typeface="+mn-ea"/>
+                <a:cs typeface="+mn-cs"/>
+              </a:endParaRPr>
             </a:p>
           </p:txBody>
         </p:sp>
@@ -6704,46 +7039,6 @@
         </p:sp>
         <p:sp>
           <p:nvSpPr>
-            <p:cNvPr id="62" name="TextBox 62"/>
-            <p:cNvSpPr txBox="1"/>
-            <p:nvPr/>
-          </p:nvSpPr>
-          <p:spPr>
-            <a:xfrm>
-              <a:off x="564642" y="6521768"/>
-              <a:ext cx="2114236" cy="264033"/>
-            </a:xfrm>
-            <a:prstGeom prst="rect">
-              <a:avLst/>
-            </a:prstGeom>
-            <a:noFill/>
-            <a:ln>
-              <a:noFill/>
-            </a:ln>
-          </p:spPr>
-          <p:txBody>
-            <a:bodyPr wrap="none" lIns="0" tIns="0" rIns="0" bIns="0" anchor="t" anchorCtr="0">
-              <a:spAutoFit/>
-            </a:bodyPr>
-            <a:lstStyle/>
-            <a:p>
-              <a:pPr algn="l"/>
-              <a:r>
-                <a:rPr lang="zh-CN" sz="1350" dirty="0">
-                  <a:solidFill>
-                    <a:schemeClr val="accent5"/>
-                  </a:solidFill>
-                  <a:latin typeface="+mn-lt"/>
-                  <a:ea typeface="+mn-ea"/>
-                  <a:cs typeface="+mn-cs"/>
-                </a:rPr>
-                <a:t>Prefab · 复用与模块组合</a:t>
-              </a:r>
-            </a:p>
-          </p:txBody>
-        </p:sp>
-        <p:sp>
-          <p:nvSpPr>
             <p:cNvPr id="63" name="TextBox 63"/>
             <p:cNvSpPr txBox="1"/>
             <p:nvPr/>
@@ -6777,8 +7072,15 @@
                   <a:ea typeface="+mn-ea"/>
                   <a:cs typeface="+mn-cs"/>
                 </a:rPr>
-                <a:t>11</a:t>
               </a:fld>
+              <a:endParaRPr lang="en-US" sz="1350" dirty="0">
+                <a:solidFill>
+                  <a:schemeClr val="accent5"/>
+                </a:solidFill>
+                <a:latin typeface="+mn-lt"/>
+                <a:ea typeface="+mn-ea"/>
+                <a:cs typeface="+mn-cs"/>
+              </a:endParaRPr>
             </a:p>
           </p:txBody>
         </p:sp>
@@ -6788,1967 +7090,23 @@
   <p:clrMapOvr>
     <a:masterClrMapping/>
   </p:clrMapOvr>
-  <p:transition p14:dur="400">
-    <p:fade/>
-  </p:transition>
+  <mc:AlternateContent xmlns:mc="http://schemas.openxmlformats.org/markup-compatibility/2006">
+    <mc:Choice xmlns:p14="http://schemas.microsoft.com/office/powerpoint/2010/main" Requires="p14">
+      <p:transition p14:dur="400">
+        <p:fade/>
+      </p:transition>
+    </mc:Choice>
+    <mc:Fallback>
+      <p:transition>
+        <p:fade/>
+      </p:transition>
+    </mc:Fallback>
+  </mc:AlternateContent>
 </p:sld>
 </file>
 
 <file path=ppt/slides/slide12.xml><?xml version="1.0" encoding="utf-8"?>
-<p:sld xmlns:a="http://schemas.openxmlformats.org/drawingml/2006/main" xmlns:p="http://schemas.openxmlformats.org/presentationml/2006/main" xmlns:p14="http://schemas.microsoft.com/office/powerpoint/2010/main">
-  <p:cSld>
-    <p:bg>
-      <p:bgPr>
-        <a:solidFill>
-          <a:schemeClr val="lt1"/>
-        </a:solidFill>
-        <a:effectLst/>
-      </p:bgPr>
-    </p:bg>
-    <p:spTree>
-      <p:nvGrpSpPr>
-        <p:cNvPr id="1" name=""/>
-        <p:cNvGrpSpPr/>
-        <p:nvPr/>
-      </p:nvGrpSpPr>
-      <p:grpSpPr>
-        <a:xfrm>
-          <a:off x="0" y="0"/>
-          <a:ext cx="0" cy="0"/>
-          <a:chOff x="0" y="0"/>
-          <a:chExt cx="0" cy="0"/>
-        </a:xfrm>
-      </p:grpSpPr>
-      <p:sp>
-        <p:nvSpPr>
-          <p:cNvPr id="2" name="TextBox 2"/>
-          <p:cNvSpPr txBox="1"/>
-          <p:nvPr/>
-        </p:nvSpPr>
-        <p:spPr>
-          <a:xfrm>
-            <a:off x="552450" y="270510"/>
-            <a:ext cx="13838225" cy="819150"/>
-          </a:xfrm>
-          <a:prstGeom prst="rect">
-            <a:avLst/>
-          </a:prstGeom>
-          <a:noFill/>
-          <a:ln>
-            <a:noFill/>
-          </a:ln>
-        </p:spPr>
-        <p:txBody>
-          <a:bodyPr wrap="none" lIns="0" tIns="0" rIns="0" bIns="0" anchor="t" anchorCtr="0">
-            <a:spAutoFit/>
-          </a:bodyPr>
-          <a:lstStyle/>
-          <a:p>
-            <a:pPr algn="l"/>
-            <a:r>
-              <a:rPr lang="zh-CN" sz="4200" b="1" dirty="0">
-                <a:solidFill>
-                  <a:schemeClr val="dk1"/>
-                </a:solidFill>
-                <a:latin typeface="+mj-lt"/>
-                <a:ea typeface="+mj-ea"/>
-                <a:cs typeface="+mj-cs"/>
-              </a:rPr>
-              <a:t>综合练习：搭一间可进入、可观察、可打包的房间</a:t>
-            </a:r>
-          </a:p>
-        </p:txBody>
-      </p:sp>
-      <p:sp>
-        <p:nvSpPr>
-          <p:cNvPr id="3" name="TextBox 3"/>
-          <p:cNvSpPr txBox="1"/>
-          <p:nvPr/>
-        </p:nvSpPr>
-        <p:spPr>
-          <a:xfrm>
-            <a:off x="581406" y="986790"/>
-            <a:ext cx="4137660" cy="352044"/>
-          </a:xfrm>
-          <a:prstGeom prst="rect">
-            <a:avLst/>
-          </a:prstGeom>
-          <a:noFill/>
-          <a:ln>
-            <a:noFill/>
-          </a:ln>
-        </p:spPr>
-        <p:txBody>
-          <a:bodyPr wrap="none" lIns="0" tIns="0" rIns="0" bIns="0" anchor="t" anchorCtr="0">
-            <a:spAutoFit/>
-          </a:bodyPr>
-          <a:lstStyle/>
-          <a:p>
-            <a:pPr algn="l"/>
-            <a:r>
-              <a:rPr lang="zh-CN" sz="1800" dirty="0">
-                <a:solidFill>
-                  <a:schemeClr val="dk2"/>
-                </a:solidFill>
-                <a:latin typeface="+mn-lt"/>
-                <a:ea typeface="+mn-ea"/>
-                <a:cs typeface="+mn-cs"/>
-              </a:rPr>
-              <a:t>按顺序完成，每一步都能单独运行验证</a:t>
-            </a:r>
-          </a:p>
-        </p:txBody>
-      </p:sp>
-      <p:grpSp>
-        <p:nvGrpSpPr>
-          <p:cNvPr id="58" name="Group 58"/>
-          <p:cNvGrpSpPr/>
-          <p:nvPr/>
-        </p:nvGrpSpPr>
-        <p:grpSpPr>
-          <a:xfrm>
-            <a:off x="685800" y="1428750"/>
-            <a:ext cx="10744200" cy="4686300"/>
-            <a:chOff x="685800" y="1428750"/>
-            <a:chExt cx="10744200" cy="4686300"/>
-          </a:xfrm>
-        </p:grpSpPr>
-        <p:sp>
-          <p:nvSpPr>
-            <p:cNvPr id="4" name="Freeform 4"/>
-            <p:cNvSpPr/>
-            <p:nvPr/>
-          </p:nvSpPr>
-          <p:spPr>
-            <a:xfrm>
-              <a:off x="1428750" y="2247900"/>
-              <a:ext cx="9525000" cy="3181350"/>
-            </a:xfrm>
-            <a:custGeom>
-              <a:avLst/>
-              <a:gdLst/>
-              <a:ahLst/>
-              <a:cxnLst/>
-              <a:rect l="l" t="t" r="r" b="b"/>
-              <a:pathLst>
-                <a:path w="9525000" h="3181350">
-                  <a:moveTo>
-                    <a:pt x="0" y="0"/>
-                  </a:moveTo>
-                  <a:lnTo>
-                    <a:pt x="8667750" y="0"/>
-                  </a:lnTo>
-                  <a:cubicBezTo>
-                    <a:pt x="9141196" y="0"/>
-                    <a:pt x="9525000" y="383804"/>
-                    <a:pt x="9525000" y="857250"/>
-                  </a:cubicBezTo>
-                  <a:cubicBezTo>
-                    <a:pt x="9525000" y="1330696"/>
-                    <a:pt x="9141196" y="1714500"/>
-                    <a:pt x="8667750" y="1714500"/>
-                  </a:cubicBezTo>
-                  <a:lnTo>
-                    <a:pt x="666750" y="1714500"/>
-                  </a:lnTo>
-                  <a:cubicBezTo>
-                    <a:pt x="338318" y="1807069"/>
-                    <a:pt x="111467" y="2106697"/>
-                    <a:pt x="111467" y="2447925"/>
-                  </a:cubicBezTo>
-                  <a:cubicBezTo>
-                    <a:pt x="111467" y="2789153"/>
-                    <a:pt x="338318" y="3088781"/>
-                    <a:pt x="666750" y="3181350"/>
-                  </a:cubicBezTo>
-                  <a:lnTo>
-                    <a:pt x="8572500" y="3181350"/>
-                  </a:lnTo>
-                </a:path>
-              </a:pathLst>
-            </a:custGeom>
-            <a:noFill/>
-            <a:ln w="266700" cap="rnd">
-              <a:solidFill>
-                <a:srgbClr val="E9E3D8"/>
-              </a:solidFill>
-            </a:ln>
-          </p:spPr>
-        </p:sp>
-        <p:sp>
-          <p:nvSpPr>
-            <p:cNvPr id="5" name="Freeform 5"/>
-            <p:cNvSpPr/>
-            <p:nvPr/>
-          </p:nvSpPr>
-          <p:spPr>
-            <a:xfrm>
-              <a:off x="1428750" y="2247900"/>
-              <a:ext cx="9525000" cy="3181350"/>
-            </a:xfrm>
-            <a:custGeom>
-              <a:avLst/>
-              <a:gdLst/>
-              <a:ahLst/>
-              <a:cxnLst/>
-              <a:rect l="l" t="t" r="r" b="b"/>
-              <a:pathLst>
-                <a:path w="9525000" h="3181350">
-                  <a:moveTo>
-                    <a:pt x="0" y="0"/>
-                  </a:moveTo>
-                  <a:lnTo>
-                    <a:pt x="8667750" y="0"/>
-                  </a:lnTo>
-                  <a:cubicBezTo>
-                    <a:pt x="9141196" y="0"/>
-                    <a:pt x="9525000" y="383804"/>
-                    <a:pt x="9525000" y="857250"/>
-                  </a:cubicBezTo>
-                  <a:cubicBezTo>
-                    <a:pt x="9525000" y="1330696"/>
-                    <a:pt x="9141196" y="1714500"/>
-                    <a:pt x="8667750" y="1714500"/>
-                  </a:cubicBezTo>
-                  <a:lnTo>
-                    <a:pt x="666750" y="1714500"/>
-                  </a:lnTo>
-                  <a:cubicBezTo>
-                    <a:pt x="338318" y="1807069"/>
-                    <a:pt x="111467" y="2106697"/>
-                    <a:pt x="111467" y="2447925"/>
-                  </a:cubicBezTo>
-                  <a:cubicBezTo>
-                    <a:pt x="111467" y="2789153"/>
-                    <a:pt x="338318" y="3088781"/>
-                    <a:pt x="666750" y="3181350"/>
-                  </a:cubicBezTo>
-                  <a:lnTo>
-                    <a:pt x="8572500" y="3181350"/>
-                  </a:lnTo>
-                </a:path>
-              </a:pathLst>
-            </a:custGeom>
-            <a:noFill/>
-            <a:ln w="38100" cap="rnd">
-              <a:solidFill>
-                <a:schemeClr val="accent1">
-                  <a:alpha val="32000"/>
-                </a:schemeClr>
-              </a:solidFill>
-            </a:ln>
-          </p:spPr>
-        </p:sp>
-        <p:grpSp>
-          <p:nvGrpSpPr>
-            <p:cNvPr id="11" name="Group 11"/>
-            <p:cNvGrpSpPr/>
-            <p:nvPr/>
-          </p:nvGrpSpPr>
-          <p:grpSpPr>
-            <a:xfrm>
-              <a:off x="685800" y="1428750"/>
-              <a:ext cx="2419350" cy="1143000"/>
-              <a:chOff x="685800" y="1428750"/>
-              <a:chExt cx="2419350" cy="1143000"/>
-            </a:xfrm>
-          </p:grpSpPr>
-          <p:sp>
-            <p:nvSpPr>
-              <p:cNvPr id="6" name="Rectangle 6"/>
-              <p:cNvSpPr/>
-              <p:nvPr/>
-            </p:nvSpPr>
-            <p:spPr>
-              <a:xfrm>
-                <a:off x="685800" y="1428750"/>
-                <a:ext cx="2419350" cy="685800"/>
-              </a:xfrm>
-              <a:prstGeom prst="roundRect">
-                <a:avLst>
-                  <a:gd name="adj" fmla="val 25000"/>
-                </a:avLst>
-              </a:prstGeom>
-              <a:solidFill>
-                <a:srgbClr val="FFFFFF"/>
-              </a:solidFill>
-              <a:ln w="28575">
-                <a:solidFill>
-                  <a:schemeClr val="accent1"/>
-                </a:solidFill>
-              </a:ln>
-            </p:spPr>
-          </p:sp>
-          <p:sp>
-            <p:nvSpPr>
-              <p:cNvPr id="7" name="TextBox 7"/>
-              <p:cNvSpPr txBox="1"/>
-              <p:nvPr/>
-            </p:nvSpPr>
-            <p:spPr>
-              <a:xfrm>
-                <a:off x="1377467" y="1529715"/>
-                <a:ext cx="1036015" cy="352044"/>
-              </a:xfrm>
-              <a:prstGeom prst="rect">
-                <a:avLst/>
-              </a:prstGeom>
-              <a:noFill/>
-              <a:ln>
-                <a:noFill/>
-              </a:ln>
-            </p:spPr>
-            <p:txBody>
-              <a:bodyPr wrap="none" lIns="0" tIns="0" rIns="0" bIns="0" anchor="t" anchorCtr="0">
-                <a:spAutoFit/>
-              </a:bodyPr>
-              <a:lstStyle/>
-              <a:p>
-                <a:pPr algn="ctr"/>
-                <a:r>
-                  <a:rPr lang="zh-CN" sz="1800" b="1" dirty="0">
-                    <a:solidFill>
-                      <a:schemeClr val="dk1"/>
-                    </a:solidFill>
-                    <a:latin typeface="+mn-lt"/>
-                    <a:ea typeface="+mn-ea"/>
-                    <a:cs typeface="+mn-cs"/>
-                  </a:rPr>
-                  <a:t>建立层级</a:t>
-                </a:r>
-              </a:p>
-            </p:txBody>
-          </p:sp>
-          <p:sp>
-            <p:nvSpPr>
-              <p:cNvPr id="8" name="TextBox 8"/>
-              <p:cNvSpPr txBox="1"/>
-              <p:nvPr/>
-            </p:nvSpPr>
-            <p:spPr>
-              <a:xfrm>
-                <a:off x="1321118" y="1805940"/>
-                <a:ext cx="1148715" cy="352044"/>
-              </a:xfrm>
-              <a:prstGeom prst="rect">
-                <a:avLst/>
-              </a:prstGeom>
-              <a:noFill/>
-              <a:ln>
-                <a:noFill/>
-              </a:ln>
-            </p:spPr>
-            <p:txBody>
-              <a:bodyPr wrap="none" lIns="0" tIns="0" rIns="0" bIns="0" anchor="t" anchorCtr="0">
-                <a:spAutoFit/>
-              </a:bodyPr>
-              <a:lstStyle/>
-              <a:p>
-                <a:pPr algn="ctr"/>
-                <a:r>
-                  <a:rPr lang="en-US" sz="1800" dirty="0">
-                    <a:solidFill>
-                      <a:schemeClr val="dk2"/>
-                    </a:solidFill>
-                    <a:latin typeface="+mn-lt"/>
-                    <a:ea typeface="+mn-ea"/>
-                    <a:cs typeface="+mn-cs"/>
-                  </a:rPr>
-                  <a:t>RoomRoot</a:t>
-                </a:r>
-              </a:p>
-            </p:txBody>
-          </p:sp>
-          <p:sp>
-            <p:nvSpPr>
-              <p:cNvPr id="9" name="Ellipse 9"/>
-              <p:cNvSpPr/>
-              <p:nvPr/>
-            </p:nvSpPr>
-            <p:spPr>
-              <a:xfrm>
-                <a:off x="1104900" y="1924050"/>
-                <a:ext cx="647700" cy="647700"/>
-              </a:xfrm>
-              <a:prstGeom prst="ellipse">
-                <a:avLst/>
-              </a:prstGeom>
-              <a:solidFill>
-                <a:schemeClr val="accent1"/>
-              </a:solidFill>
-              <a:ln>
-                <a:noFill/>
-              </a:ln>
-            </p:spPr>
-          </p:sp>
-          <p:sp>
-            <p:nvSpPr>
-              <p:cNvPr id="10" name="TextBox 10"/>
-              <p:cNvSpPr txBox="1"/>
-              <p:nvPr/>
-            </p:nvSpPr>
-            <p:spPr>
-              <a:xfrm>
-                <a:off x="1323266" y="2093595"/>
-                <a:ext cx="210967" cy="469392"/>
-              </a:xfrm>
-              <a:prstGeom prst="rect">
-                <a:avLst/>
-              </a:prstGeom>
-              <a:noFill/>
-              <a:ln>
-                <a:noFill/>
-              </a:ln>
-            </p:spPr>
-            <p:txBody>
-              <a:bodyPr wrap="none" lIns="0" tIns="0" rIns="0" bIns="0" anchor="t" anchorCtr="0">
-                <a:spAutoFit/>
-              </a:bodyPr>
-              <a:lstStyle/>
-              <a:p>
-                <a:pPr algn="ctr"/>
-                <a:r>
-                  <a:rPr lang="en-US" sz="2400" b="1" dirty="0">
-                    <a:solidFill>
-                      <a:srgbClr val="FFFFFF"/>
-                    </a:solidFill>
-                    <a:latin typeface="+mn-lt"/>
-                    <a:ea typeface="+mn-ea"/>
-                    <a:cs typeface="+mn-cs"/>
-                  </a:rPr>
-                  <a:t>1</a:t>
-                </a:r>
-              </a:p>
-            </p:txBody>
-          </p:sp>
-        </p:grpSp>
-        <p:grpSp>
-          <p:nvGrpSpPr>
-            <p:cNvPr id="17" name="Group 17"/>
-            <p:cNvGrpSpPr/>
-            <p:nvPr/>
-          </p:nvGrpSpPr>
-          <p:grpSpPr>
-            <a:xfrm>
-              <a:off x="3429000" y="1428750"/>
-              <a:ext cx="2419350" cy="1143000"/>
-              <a:chOff x="3429000" y="1428750"/>
-              <a:chExt cx="2419350" cy="1143000"/>
-            </a:xfrm>
-          </p:grpSpPr>
-          <p:sp>
-            <p:nvSpPr>
-              <p:cNvPr id="12" name="Rectangle 12"/>
-              <p:cNvSpPr/>
-              <p:nvPr/>
-            </p:nvSpPr>
-            <p:spPr>
-              <a:xfrm>
-                <a:off x="3429000" y="1428750"/>
-                <a:ext cx="2419350" cy="685800"/>
-              </a:xfrm>
-              <a:prstGeom prst="roundRect">
-                <a:avLst>
-                  <a:gd name="adj" fmla="val 25000"/>
-                </a:avLst>
-              </a:prstGeom>
-              <a:solidFill>
-                <a:srgbClr val="FFFFFF"/>
-              </a:solidFill>
-              <a:ln w="28575">
-                <a:solidFill>
-                  <a:schemeClr val="accent3"/>
-                </a:solidFill>
-              </a:ln>
-            </p:spPr>
-          </p:sp>
-          <p:sp>
-            <p:nvSpPr>
-              <p:cNvPr id="13" name="TextBox 13"/>
-              <p:cNvSpPr txBox="1"/>
-              <p:nvPr/>
-            </p:nvSpPr>
-            <p:spPr>
-              <a:xfrm>
-                <a:off x="3993452" y="1529715"/>
-                <a:ext cx="1290447" cy="352044"/>
-              </a:xfrm>
-              <a:prstGeom prst="rect">
-                <a:avLst/>
-              </a:prstGeom>
-              <a:noFill/>
-              <a:ln>
-                <a:noFill/>
-              </a:ln>
-            </p:spPr>
-            <p:txBody>
-              <a:bodyPr wrap="none" lIns="0" tIns="0" rIns="0" bIns="0" anchor="t" anchorCtr="0">
-                <a:spAutoFit/>
-              </a:bodyPr>
-              <a:lstStyle/>
-              <a:p>
-                <a:pPr algn="ctr"/>
-                <a:r>
-                  <a:rPr lang="zh-CN" sz="1800" b="1" dirty="0">
-                    <a:solidFill>
-                      <a:schemeClr val="dk1"/>
-                    </a:solidFill>
-                    <a:latin typeface="+mn-lt"/>
-                    <a:ea typeface="+mn-ea"/>
-                    <a:cs typeface="+mn-cs"/>
-                  </a:rPr>
-                  <a:t>搭墙与地面</a:t>
-                </a:r>
-              </a:p>
-            </p:txBody>
-          </p:sp>
-          <p:sp>
-            <p:nvSpPr>
-              <p:cNvPr id="14" name="TextBox 14"/>
-              <p:cNvSpPr txBox="1"/>
-              <p:nvPr/>
-            </p:nvSpPr>
-            <p:spPr>
-              <a:xfrm>
-                <a:off x="3944064" y="1805940"/>
-                <a:ext cx="1389223" cy="352044"/>
-              </a:xfrm>
-              <a:prstGeom prst="rect">
-                <a:avLst/>
-              </a:prstGeom>
-              <a:noFill/>
-              <a:ln>
-                <a:noFill/>
-              </a:ln>
-            </p:spPr>
-            <p:txBody>
-              <a:bodyPr wrap="none" lIns="0" tIns="0" rIns="0" bIns="0" anchor="t" anchorCtr="0">
-                <a:spAutoFit/>
-              </a:bodyPr>
-              <a:lstStyle/>
-              <a:p>
-                <a:pPr algn="ctr"/>
-                <a:r>
-                  <a:rPr lang="en-US" sz="1800" dirty="0">
-                    <a:solidFill>
-                      <a:schemeClr val="dk2"/>
-                    </a:solidFill>
-                    <a:latin typeface="+mn-lt"/>
-                    <a:ea typeface="+mn-ea"/>
-                    <a:cs typeface="+mn-cs"/>
-                  </a:rPr>
-                  <a:t>Box Collider</a:t>
-                </a:r>
-              </a:p>
-            </p:txBody>
-          </p:sp>
-          <p:sp>
-            <p:nvSpPr>
-              <p:cNvPr id="15" name="Ellipse 15"/>
-              <p:cNvSpPr/>
-              <p:nvPr/>
-            </p:nvSpPr>
-            <p:spPr>
-              <a:xfrm>
-                <a:off x="4314825" y="1924050"/>
-                <a:ext cx="647700" cy="647700"/>
-              </a:xfrm>
-              <a:prstGeom prst="ellipse">
-                <a:avLst/>
-              </a:prstGeom>
-              <a:solidFill>
-                <a:schemeClr val="accent3"/>
-              </a:solidFill>
-              <a:ln>
-                <a:noFill/>
-              </a:ln>
-            </p:spPr>
-          </p:sp>
-          <p:sp>
-            <p:nvSpPr>
-              <p:cNvPr id="16" name="TextBox 16"/>
-              <p:cNvSpPr txBox="1"/>
-              <p:nvPr/>
-            </p:nvSpPr>
-            <p:spPr>
-              <a:xfrm>
-                <a:off x="4533191" y="2093595"/>
-                <a:ext cx="210967" cy="469392"/>
-              </a:xfrm>
-              <a:prstGeom prst="rect">
-                <a:avLst/>
-              </a:prstGeom>
-              <a:noFill/>
-              <a:ln>
-                <a:noFill/>
-              </a:ln>
-            </p:spPr>
-            <p:txBody>
-              <a:bodyPr wrap="none" lIns="0" tIns="0" rIns="0" bIns="0" anchor="t" anchorCtr="0">
-                <a:spAutoFit/>
-              </a:bodyPr>
-              <a:lstStyle/>
-              <a:p>
-                <a:pPr algn="ctr"/>
-                <a:r>
-                  <a:rPr lang="en-US" sz="2400" b="1" dirty="0">
-                    <a:solidFill>
-                      <a:srgbClr val="FFFFFF"/>
-                    </a:solidFill>
-                    <a:latin typeface="+mn-lt"/>
-                    <a:ea typeface="+mn-ea"/>
-                    <a:cs typeface="+mn-cs"/>
-                  </a:rPr>
-                  <a:t>2</a:t>
-                </a:r>
-              </a:p>
-            </p:txBody>
-          </p:sp>
-        </p:grpSp>
-        <p:grpSp>
-          <p:nvGrpSpPr>
-            <p:cNvPr id="23" name="Group 23"/>
-            <p:cNvGrpSpPr/>
-            <p:nvPr/>
-          </p:nvGrpSpPr>
-          <p:grpSpPr>
-            <a:xfrm>
-              <a:off x="6172200" y="1428750"/>
-              <a:ext cx="2419350" cy="1143000"/>
-              <a:chOff x="6172200" y="1428750"/>
-              <a:chExt cx="2419350" cy="1143000"/>
-            </a:xfrm>
-          </p:grpSpPr>
-          <p:sp>
-            <p:nvSpPr>
-              <p:cNvPr id="18" name="Rectangle 18"/>
-              <p:cNvSpPr/>
-              <p:nvPr/>
-            </p:nvSpPr>
-            <p:spPr>
-              <a:xfrm>
-                <a:off x="6172200" y="1428750"/>
-                <a:ext cx="2419350" cy="685800"/>
-              </a:xfrm>
-              <a:prstGeom prst="roundRect">
-                <a:avLst>
-                  <a:gd name="adj" fmla="val 25000"/>
-                </a:avLst>
-              </a:prstGeom>
-              <a:solidFill>
-                <a:srgbClr val="FFFFFF"/>
-              </a:solidFill>
-              <a:ln w="28575">
-                <a:solidFill>
-                  <a:schemeClr val="accent2"/>
-                </a:solidFill>
-              </a:ln>
-            </p:spPr>
-          </p:sp>
-          <p:sp>
-            <p:nvSpPr>
-              <p:cNvPr id="19" name="TextBox 19"/>
-              <p:cNvSpPr txBox="1"/>
-              <p:nvPr/>
-            </p:nvSpPr>
-            <p:spPr>
-              <a:xfrm>
-                <a:off x="6609436" y="1529715"/>
-                <a:ext cx="1544879" cy="352044"/>
-              </a:xfrm>
-              <a:prstGeom prst="rect">
-                <a:avLst/>
-              </a:prstGeom>
-              <a:noFill/>
-              <a:ln>
-                <a:noFill/>
-              </a:ln>
-            </p:spPr>
-            <p:txBody>
-              <a:bodyPr wrap="none" lIns="0" tIns="0" rIns="0" bIns="0" anchor="t" anchorCtr="0">
-                <a:spAutoFit/>
-              </a:bodyPr>
-              <a:lstStyle/>
-              <a:p>
-                <a:pPr algn="ctr"/>
-                <a:r>
-                  <a:rPr lang="zh-CN" sz="1800" b="1" dirty="0">
-                    <a:solidFill>
-                      <a:schemeClr val="dk1"/>
-                    </a:solidFill>
-                    <a:latin typeface="+mn-lt"/>
-                    <a:ea typeface="+mn-ea"/>
-                    <a:cs typeface="+mn-cs"/>
-                  </a:rPr>
-                  <a:t>布置材质灯光</a:t>
-                </a:r>
-              </a:p>
-            </p:txBody>
-          </p:sp>
-          <p:sp>
-            <p:nvSpPr>
-              <p:cNvPr id="20" name="TextBox 20"/>
-              <p:cNvSpPr txBox="1"/>
-              <p:nvPr/>
-            </p:nvSpPr>
-            <p:spPr>
-              <a:xfrm>
-                <a:off x="6425580" y="1805940"/>
-                <a:ext cx="1912591" cy="352044"/>
-              </a:xfrm>
-              <a:prstGeom prst="rect">
-                <a:avLst/>
-              </a:prstGeom>
-              <a:noFill/>
-              <a:ln>
-                <a:noFill/>
-              </a:ln>
-            </p:spPr>
-            <p:txBody>
-              <a:bodyPr wrap="none" lIns="0" tIns="0" rIns="0" bIns="0" anchor="t" anchorCtr="0">
-                <a:spAutoFit/>
-              </a:bodyPr>
-              <a:lstStyle/>
-              <a:p>
-                <a:pPr algn="ctr"/>
-                <a:r>
-                  <a:rPr lang="en-US" sz="1800" dirty="0">
-                    <a:solidFill>
-                      <a:schemeClr val="dk2"/>
-                    </a:solidFill>
-                    <a:latin typeface="+mn-lt"/>
-                    <a:ea typeface="+mn-ea"/>
-                    <a:cs typeface="+mn-cs"/>
-                  </a:rPr>
-                  <a:t>Material + Light</a:t>
-                </a:r>
-              </a:p>
-            </p:txBody>
-          </p:sp>
-          <p:sp>
-            <p:nvSpPr>
-              <p:cNvPr id="21" name="Ellipse 21"/>
-              <p:cNvSpPr/>
-              <p:nvPr/>
-            </p:nvSpPr>
-            <p:spPr>
-              <a:xfrm>
-                <a:off x="7058025" y="1924050"/>
-                <a:ext cx="647700" cy="647700"/>
-              </a:xfrm>
-              <a:prstGeom prst="ellipse">
-                <a:avLst/>
-              </a:prstGeom>
-              <a:solidFill>
-                <a:schemeClr val="accent2"/>
-              </a:solidFill>
-              <a:ln>
-                <a:noFill/>
-              </a:ln>
-            </p:spPr>
-          </p:sp>
-          <p:sp>
-            <p:nvSpPr>
-              <p:cNvPr id="22" name="TextBox 22"/>
-              <p:cNvSpPr txBox="1"/>
-              <p:nvPr/>
-            </p:nvSpPr>
-            <p:spPr>
-              <a:xfrm>
-                <a:off x="7276391" y="2093595"/>
-                <a:ext cx="210967" cy="469392"/>
-              </a:xfrm>
-              <a:prstGeom prst="rect">
-                <a:avLst/>
-              </a:prstGeom>
-              <a:noFill/>
-              <a:ln>
-                <a:noFill/>
-              </a:ln>
-            </p:spPr>
-            <p:txBody>
-              <a:bodyPr wrap="none" lIns="0" tIns="0" rIns="0" bIns="0" anchor="t" anchorCtr="0">
-                <a:spAutoFit/>
-              </a:bodyPr>
-              <a:lstStyle/>
-              <a:p>
-                <a:pPr algn="ctr"/>
-                <a:r>
-                  <a:rPr lang="en-US" sz="2400" b="1" dirty="0">
-                    <a:solidFill>
-                      <a:srgbClr val="FFFFFF"/>
-                    </a:solidFill>
-                    <a:latin typeface="+mn-lt"/>
-                    <a:ea typeface="+mn-ea"/>
-                    <a:cs typeface="+mn-cs"/>
-                  </a:rPr>
-                  <a:t>3</a:t>
-                </a:r>
-              </a:p>
-            </p:txBody>
-          </p:sp>
-        </p:grpSp>
-        <p:grpSp>
-          <p:nvGrpSpPr>
-            <p:cNvPr id="29" name="Group 29"/>
-            <p:cNvGrpSpPr/>
-            <p:nvPr/>
-          </p:nvGrpSpPr>
-          <p:grpSpPr>
-            <a:xfrm>
-              <a:off x="8915400" y="1428750"/>
-              <a:ext cx="2419350" cy="1143000"/>
-              <a:chOff x="8915400" y="1428750"/>
-              <a:chExt cx="2419350" cy="1143000"/>
-            </a:xfrm>
-          </p:grpSpPr>
-          <p:sp>
-            <p:nvSpPr>
-              <p:cNvPr id="24" name="Rectangle 24"/>
-              <p:cNvSpPr/>
-              <p:nvPr/>
-            </p:nvSpPr>
-            <p:spPr>
-              <a:xfrm>
-                <a:off x="8915400" y="1428750"/>
-                <a:ext cx="2419350" cy="685800"/>
-              </a:xfrm>
-              <a:prstGeom prst="roundRect">
-                <a:avLst>
-                  <a:gd name="adj" fmla="val 25000"/>
-                </a:avLst>
-              </a:prstGeom>
-              <a:solidFill>
-                <a:srgbClr val="FFFFFF"/>
-              </a:solidFill>
-              <a:ln w="28575">
-                <a:solidFill>
-                  <a:srgbClr val="D85C45"/>
-                </a:solidFill>
-              </a:ln>
-            </p:spPr>
-          </p:sp>
-          <p:sp>
-            <p:nvSpPr>
-              <p:cNvPr id="25" name="TextBox 25"/>
-              <p:cNvSpPr txBox="1"/>
-              <p:nvPr/>
-            </p:nvSpPr>
-            <p:spPr>
-              <a:xfrm>
-                <a:off x="9352636" y="1529715"/>
-                <a:ext cx="1544879" cy="352044"/>
-              </a:xfrm>
-              <a:prstGeom prst="rect">
-                <a:avLst/>
-              </a:prstGeom>
-              <a:noFill/>
-              <a:ln>
-                <a:noFill/>
-              </a:ln>
-            </p:spPr>
-            <p:txBody>
-              <a:bodyPr wrap="none" lIns="0" tIns="0" rIns="0" bIns="0" anchor="t" anchorCtr="0">
-                <a:spAutoFit/>
-              </a:bodyPr>
-              <a:lstStyle/>
-              <a:p>
-                <a:pPr algn="ctr"/>
-                <a:r>
-                  <a:rPr lang="zh-CN" sz="1800" b="1" dirty="0">
-                    <a:solidFill>
-                      <a:schemeClr val="dk1"/>
-                    </a:solidFill>
-                    <a:latin typeface="+mn-lt"/>
-                    <a:ea typeface="+mn-ea"/>
-                    <a:cs typeface="+mn-cs"/>
-                  </a:rPr>
-                  <a:t>加入可动物体</a:t>
-                </a:r>
-              </a:p>
-            </p:txBody>
-          </p:sp>
-          <p:sp>
-            <p:nvSpPr>
-              <p:cNvPr id="26" name="TextBox 26"/>
-              <p:cNvSpPr txBox="1"/>
-              <p:nvPr/>
-            </p:nvSpPr>
-            <p:spPr>
-              <a:xfrm>
-                <a:off x="9573387" y="1805940"/>
-                <a:ext cx="1103376" cy="352044"/>
-              </a:xfrm>
-              <a:prstGeom prst="rect">
-                <a:avLst/>
-              </a:prstGeom>
-              <a:noFill/>
-              <a:ln>
-                <a:noFill/>
-              </a:ln>
-            </p:spPr>
-            <p:txBody>
-              <a:bodyPr wrap="none" lIns="0" tIns="0" rIns="0" bIns="0" anchor="t" anchorCtr="0">
-                <a:spAutoFit/>
-              </a:bodyPr>
-              <a:lstStyle/>
-              <a:p>
-                <a:pPr algn="ctr"/>
-                <a:r>
-                  <a:rPr lang="en-US" sz="1800" dirty="0">
-                    <a:solidFill>
-                      <a:schemeClr val="dk2"/>
-                    </a:solidFill>
-                    <a:latin typeface="+mn-lt"/>
-                    <a:ea typeface="+mn-ea"/>
-                    <a:cs typeface="+mn-cs"/>
-                  </a:rPr>
-                  <a:t>Rigidbody</a:t>
-                </a:r>
-              </a:p>
-            </p:txBody>
-          </p:sp>
-          <p:sp>
-            <p:nvSpPr>
-              <p:cNvPr id="27" name="Ellipse 27"/>
-              <p:cNvSpPr/>
-              <p:nvPr/>
-            </p:nvSpPr>
-            <p:spPr>
-              <a:xfrm>
-                <a:off x="9801225" y="1924050"/>
-                <a:ext cx="647700" cy="647700"/>
-              </a:xfrm>
-              <a:prstGeom prst="ellipse">
-                <a:avLst/>
-              </a:prstGeom>
-              <a:solidFill>
-                <a:srgbClr val="D85C45"/>
-              </a:solidFill>
-              <a:ln>
-                <a:noFill/>
-              </a:ln>
-            </p:spPr>
-          </p:sp>
-          <p:sp>
-            <p:nvSpPr>
-              <p:cNvPr id="28" name="TextBox 28"/>
-              <p:cNvSpPr txBox="1"/>
-              <p:nvPr/>
-            </p:nvSpPr>
-            <p:spPr>
-              <a:xfrm>
-                <a:off x="10019591" y="2093595"/>
-                <a:ext cx="210967" cy="469392"/>
-              </a:xfrm>
-              <a:prstGeom prst="rect">
-                <a:avLst/>
-              </a:prstGeom>
-              <a:noFill/>
-              <a:ln>
-                <a:noFill/>
-              </a:ln>
-            </p:spPr>
-            <p:txBody>
-              <a:bodyPr wrap="none" lIns="0" tIns="0" rIns="0" bIns="0" anchor="t" anchorCtr="0">
-                <a:spAutoFit/>
-              </a:bodyPr>
-              <a:lstStyle/>
-              <a:p>
-                <a:pPr algn="ctr"/>
-                <a:r>
-                  <a:rPr lang="en-US" sz="2400" b="1" dirty="0">
-                    <a:solidFill>
-                      <a:srgbClr val="FFFFFF"/>
-                    </a:solidFill>
-                    <a:latin typeface="+mn-lt"/>
-                    <a:ea typeface="+mn-ea"/>
-                    <a:cs typeface="+mn-cs"/>
-                  </a:rPr>
-                  <a:t>4</a:t>
-                </a:r>
-              </a:p>
-            </p:txBody>
-          </p:sp>
-        </p:grpSp>
-        <p:grpSp>
-          <p:nvGrpSpPr>
-            <p:cNvPr id="35" name="Group 35"/>
-            <p:cNvGrpSpPr/>
-            <p:nvPr/>
-          </p:nvGrpSpPr>
-          <p:grpSpPr>
-            <a:xfrm>
-              <a:off x="6743700" y="3638550"/>
-              <a:ext cx="2419350" cy="1243584"/>
-              <a:chOff x="6743700" y="3638550"/>
-              <a:chExt cx="2419350" cy="1243584"/>
-            </a:xfrm>
-          </p:grpSpPr>
-          <p:sp>
-            <p:nvSpPr>
-              <p:cNvPr id="30" name="Rectangle 30"/>
-              <p:cNvSpPr/>
-              <p:nvPr/>
-            </p:nvSpPr>
-            <p:spPr>
-              <a:xfrm>
-                <a:off x="6743700" y="4152900"/>
-                <a:ext cx="2419350" cy="685800"/>
-              </a:xfrm>
-              <a:prstGeom prst="roundRect">
-                <a:avLst>
-                  <a:gd name="adj" fmla="val 25000"/>
-                </a:avLst>
-              </a:prstGeom>
-              <a:solidFill>
-                <a:srgbClr val="FFFFFF"/>
-              </a:solidFill>
-              <a:ln w="28575">
-                <a:solidFill>
-                  <a:schemeClr val="accent1"/>
-                </a:solidFill>
-              </a:ln>
-            </p:spPr>
-          </p:sp>
-          <p:sp>
-            <p:nvSpPr>
-              <p:cNvPr id="31" name="TextBox 31"/>
-              <p:cNvSpPr txBox="1"/>
-              <p:nvPr/>
-            </p:nvSpPr>
-            <p:spPr>
-              <a:xfrm>
-                <a:off x="7308152" y="4253865"/>
-                <a:ext cx="1290447" cy="352044"/>
-              </a:xfrm>
-              <a:prstGeom prst="rect">
-                <a:avLst/>
-              </a:prstGeom>
-              <a:noFill/>
-              <a:ln>
-                <a:noFill/>
-              </a:ln>
-            </p:spPr>
-            <p:txBody>
-              <a:bodyPr wrap="none" lIns="0" tIns="0" rIns="0" bIns="0" anchor="t" anchorCtr="0">
-                <a:spAutoFit/>
-              </a:bodyPr>
-              <a:lstStyle/>
-              <a:p>
-                <a:pPr algn="ctr"/>
-                <a:r>
-                  <a:rPr lang="zh-CN" sz="1800" b="1" dirty="0">
-                    <a:solidFill>
-                      <a:schemeClr val="dk1"/>
-                    </a:solidFill>
-                    <a:latin typeface="+mn-lt"/>
-                    <a:ea typeface="+mn-ea"/>
-                    <a:cs typeface="+mn-cs"/>
-                  </a:rPr>
-                  <a:t>加入触发区</a:t>
-                </a:r>
-              </a:p>
-            </p:txBody>
-          </p:sp>
-          <p:sp>
-            <p:nvSpPr>
-              <p:cNvPr id="32" name="TextBox 32"/>
-              <p:cNvSpPr txBox="1"/>
-              <p:nvPr/>
-            </p:nvSpPr>
-            <p:spPr>
-              <a:xfrm>
-                <a:off x="7059778" y="4530090"/>
-                <a:ext cx="1787195" cy="352044"/>
-              </a:xfrm>
-              <a:prstGeom prst="rect">
-                <a:avLst/>
-              </a:prstGeom>
-              <a:noFill/>
-              <a:ln>
-                <a:noFill/>
-              </a:ln>
-            </p:spPr>
-            <p:txBody>
-              <a:bodyPr wrap="none" lIns="0" tIns="0" rIns="0" bIns="0" anchor="t" anchorCtr="0">
-                <a:spAutoFit/>
-              </a:bodyPr>
-              <a:lstStyle/>
-              <a:p>
-                <a:pPr algn="ctr"/>
-                <a:r>
-                  <a:rPr lang="zh-CN" sz="1800" dirty="0">
-                    <a:solidFill>
-                      <a:schemeClr val="dk2"/>
-                    </a:solidFill>
-                    <a:latin typeface="+mn-lt"/>
-                    <a:ea typeface="+mn-ea"/>
-                    <a:cs typeface="+mn-cs"/>
-                  </a:rPr>
-                  <a:t>门 / 提示 / 拾取</a:t>
-                </a:r>
-              </a:p>
-            </p:txBody>
-          </p:sp>
-          <p:sp>
-            <p:nvSpPr>
-              <p:cNvPr id="33" name="Ellipse 33"/>
-              <p:cNvSpPr/>
-              <p:nvPr/>
-            </p:nvSpPr>
-            <p:spPr>
-              <a:xfrm>
-                <a:off x="7629525" y="3638550"/>
-                <a:ext cx="647700" cy="647700"/>
-              </a:xfrm>
-              <a:prstGeom prst="ellipse">
-                <a:avLst/>
-              </a:prstGeom>
-              <a:solidFill>
-                <a:schemeClr val="accent1"/>
-              </a:solidFill>
-              <a:ln>
-                <a:noFill/>
-              </a:ln>
-            </p:spPr>
-          </p:sp>
-          <p:sp>
-            <p:nvSpPr>
-              <p:cNvPr id="34" name="TextBox 34"/>
-              <p:cNvSpPr txBox="1"/>
-              <p:nvPr/>
-            </p:nvSpPr>
-            <p:spPr>
-              <a:xfrm>
-                <a:off x="7847891" y="3808095"/>
-                <a:ext cx="210967" cy="469392"/>
-              </a:xfrm>
-              <a:prstGeom prst="rect">
-                <a:avLst/>
-              </a:prstGeom>
-              <a:noFill/>
-              <a:ln>
-                <a:noFill/>
-              </a:ln>
-            </p:spPr>
-            <p:txBody>
-              <a:bodyPr wrap="none" lIns="0" tIns="0" rIns="0" bIns="0" anchor="t" anchorCtr="0">
-                <a:spAutoFit/>
-              </a:bodyPr>
-              <a:lstStyle/>
-              <a:p>
-                <a:pPr algn="ctr"/>
-                <a:r>
-                  <a:rPr lang="en-US" sz="2400" b="1" dirty="0">
-                    <a:solidFill>
-                      <a:srgbClr val="FFFFFF"/>
-                    </a:solidFill>
-                    <a:latin typeface="+mn-lt"/>
-                    <a:ea typeface="+mn-ea"/>
-                    <a:cs typeface="+mn-cs"/>
-                  </a:rPr>
-                  <a:t>5</a:t>
-                </a:r>
-              </a:p>
-            </p:txBody>
-          </p:sp>
-        </p:grpSp>
-        <p:grpSp>
-          <p:nvGrpSpPr>
-            <p:cNvPr id="41" name="Group 41"/>
-            <p:cNvGrpSpPr/>
-            <p:nvPr/>
-          </p:nvGrpSpPr>
-          <p:grpSpPr>
-            <a:xfrm>
-              <a:off x="3524250" y="3638550"/>
-              <a:ext cx="2419350" cy="1243584"/>
-              <a:chOff x="3524250" y="3638550"/>
-              <a:chExt cx="2419350" cy="1243584"/>
-            </a:xfrm>
-          </p:grpSpPr>
-          <p:sp>
-            <p:nvSpPr>
-              <p:cNvPr id="36" name="Rectangle 36"/>
-              <p:cNvSpPr/>
-              <p:nvPr/>
-            </p:nvSpPr>
-            <p:spPr>
-              <a:xfrm>
-                <a:off x="3524250" y="4152900"/>
-                <a:ext cx="2419350" cy="685800"/>
-              </a:xfrm>
-              <a:prstGeom prst="roundRect">
-                <a:avLst>
-                  <a:gd name="adj" fmla="val 25000"/>
-                </a:avLst>
-              </a:prstGeom>
-              <a:solidFill>
-                <a:srgbClr val="FFFFFF"/>
-              </a:solidFill>
-              <a:ln w="28575">
-                <a:solidFill>
-                  <a:schemeClr val="accent3"/>
-                </a:solidFill>
-              </a:ln>
-            </p:spPr>
-          </p:sp>
-          <p:sp>
-            <p:nvSpPr>
-              <p:cNvPr id="37" name="TextBox 37"/>
-              <p:cNvSpPr txBox="1"/>
-              <p:nvPr/>
-            </p:nvSpPr>
-            <p:spPr>
-              <a:xfrm>
-                <a:off x="4215917" y="4253865"/>
-                <a:ext cx="1036015" cy="352044"/>
-              </a:xfrm>
-              <a:prstGeom prst="rect">
-                <a:avLst/>
-              </a:prstGeom>
-              <a:noFill/>
-              <a:ln>
-                <a:noFill/>
-              </a:ln>
-            </p:spPr>
-            <p:txBody>
-              <a:bodyPr wrap="none" lIns="0" tIns="0" rIns="0" bIns="0" anchor="t" anchorCtr="0">
-                <a:spAutoFit/>
-              </a:bodyPr>
-              <a:lstStyle/>
-              <a:p>
-                <a:pPr algn="ctr"/>
-                <a:r>
-                  <a:rPr lang="zh-CN" sz="1800" b="1" dirty="0">
-                    <a:solidFill>
-                      <a:schemeClr val="dk1"/>
-                    </a:solidFill>
-                    <a:latin typeface="+mn-lt"/>
-                    <a:ea typeface="+mn-ea"/>
-                    <a:cs typeface="+mn-cs"/>
-                  </a:rPr>
-                  <a:t>放入角色</a:t>
-                </a:r>
-              </a:p>
-            </p:txBody>
-          </p:sp>
-          <p:sp>
-            <p:nvSpPr>
-              <p:cNvPr id="38" name="TextBox 38"/>
-              <p:cNvSpPr txBox="1"/>
-              <p:nvPr/>
-            </p:nvSpPr>
-            <p:spPr>
-              <a:xfrm>
-                <a:off x="4081501" y="4530090"/>
-                <a:ext cx="1304849" cy="352044"/>
-              </a:xfrm>
-              <a:prstGeom prst="rect">
-                <a:avLst/>
-              </a:prstGeom>
-              <a:noFill/>
-              <a:ln>
-                <a:noFill/>
-              </a:ln>
-            </p:spPr>
-            <p:txBody>
-              <a:bodyPr wrap="none" lIns="0" tIns="0" rIns="0" bIns="0" anchor="t" anchorCtr="0">
-                <a:spAutoFit/>
-              </a:bodyPr>
-              <a:lstStyle/>
-              <a:p>
-                <a:pPr algn="ctr"/>
-                <a:r>
-                  <a:rPr lang="en-US" sz="1800" dirty="0">
-                    <a:solidFill>
-                      <a:schemeClr val="dk2"/>
-                    </a:solidFill>
-                    <a:latin typeface="+mn-lt"/>
-                    <a:ea typeface="+mn-ea"/>
-                    <a:cs typeface="+mn-cs"/>
-                  </a:rPr>
-                  <a:t>PlayerRoot</a:t>
-                </a:r>
-              </a:p>
-            </p:txBody>
-          </p:sp>
-          <p:sp>
-            <p:nvSpPr>
-              <p:cNvPr id="39" name="Ellipse 39"/>
-              <p:cNvSpPr/>
-              <p:nvPr/>
-            </p:nvSpPr>
-            <p:spPr>
-              <a:xfrm>
-                <a:off x="4410075" y="3638550"/>
-                <a:ext cx="647700" cy="647700"/>
-              </a:xfrm>
-              <a:prstGeom prst="ellipse">
-                <a:avLst/>
-              </a:prstGeom>
-              <a:solidFill>
-                <a:schemeClr val="accent3"/>
-              </a:solidFill>
-              <a:ln>
-                <a:noFill/>
-              </a:ln>
-            </p:spPr>
-          </p:sp>
-          <p:sp>
-            <p:nvSpPr>
-              <p:cNvPr id="40" name="TextBox 40"/>
-              <p:cNvSpPr txBox="1"/>
-              <p:nvPr/>
-            </p:nvSpPr>
-            <p:spPr>
-              <a:xfrm>
-                <a:off x="4628441" y="3808095"/>
-                <a:ext cx="210967" cy="469392"/>
-              </a:xfrm>
-              <a:prstGeom prst="rect">
-                <a:avLst/>
-              </a:prstGeom>
-              <a:noFill/>
-              <a:ln>
-                <a:noFill/>
-              </a:ln>
-            </p:spPr>
-            <p:txBody>
-              <a:bodyPr wrap="none" lIns="0" tIns="0" rIns="0" bIns="0" anchor="t" anchorCtr="0">
-                <a:spAutoFit/>
-              </a:bodyPr>
-              <a:lstStyle/>
-              <a:p>
-                <a:pPr algn="ctr"/>
-                <a:r>
-                  <a:rPr lang="en-US" sz="2400" b="1" dirty="0">
-                    <a:solidFill>
-                      <a:srgbClr val="FFFFFF"/>
-                    </a:solidFill>
-                    <a:latin typeface="+mn-lt"/>
-                    <a:ea typeface="+mn-ea"/>
-                    <a:cs typeface="+mn-cs"/>
-                  </a:rPr>
-                  <a:t>6</a:t>
-                </a:r>
-              </a:p>
-            </p:txBody>
-          </p:sp>
-        </p:grpSp>
-        <p:grpSp>
-          <p:nvGrpSpPr>
-            <p:cNvPr id="47" name="Group 47"/>
-            <p:cNvGrpSpPr/>
-            <p:nvPr/>
-          </p:nvGrpSpPr>
-          <p:grpSpPr>
-            <a:xfrm>
-              <a:off x="685800" y="3638550"/>
-              <a:ext cx="2419350" cy="1243584"/>
-              <a:chOff x="685800" y="3638550"/>
-              <a:chExt cx="2419350" cy="1243584"/>
-            </a:xfrm>
-          </p:grpSpPr>
-          <p:sp>
-            <p:nvSpPr>
-              <p:cNvPr id="42" name="Rectangle 42"/>
-              <p:cNvSpPr/>
-              <p:nvPr/>
-            </p:nvSpPr>
-            <p:spPr>
-              <a:xfrm>
-                <a:off x="685800" y="4152900"/>
-                <a:ext cx="2419350" cy="685800"/>
-              </a:xfrm>
-              <a:prstGeom prst="roundRect">
-                <a:avLst>
-                  <a:gd name="adj" fmla="val 25000"/>
-                </a:avLst>
-              </a:prstGeom>
-              <a:solidFill>
-                <a:srgbClr val="FFFFFF"/>
-              </a:solidFill>
-              <a:ln w="28575">
-                <a:solidFill>
-                  <a:schemeClr val="accent2"/>
-                </a:solidFill>
-              </a:ln>
-            </p:spPr>
-          </p:sp>
-          <p:sp>
-            <p:nvSpPr>
-              <p:cNvPr id="43" name="TextBox 43"/>
-              <p:cNvSpPr txBox="1"/>
-              <p:nvPr/>
-            </p:nvSpPr>
-            <p:spPr>
-              <a:xfrm>
-                <a:off x="1377467" y="4253865"/>
-                <a:ext cx="1036015" cy="352044"/>
-              </a:xfrm>
-              <a:prstGeom prst="rect">
-                <a:avLst/>
-              </a:prstGeom>
-              <a:noFill/>
-              <a:ln>
-                <a:noFill/>
-              </a:ln>
-            </p:spPr>
-            <p:txBody>
-              <a:bodyPr wrap="none" lIns="0" tIns="0" rIns="0" bIns="0" anchor="t" anchorCtr="0">
-                <a:spAutoFit/>
-              </a:bodyPr>
-              <a:lstStyle/>
-              <a:p>
-                <a:pPr algn="ctr"/>
-                <a:r>
-                  <a:rPr lang="zh-CN" sz="1800" b="1" dirty="0">
-                    <a:solidFill>
-                      <a:schemeClr val="dk1"/>
-                    </a:solidFill>
-                    <a:latin typeface="+mn-lt"/>
-                    <a:ea typeface="+mn-ea"/>
-                    <a:cs typeface="+mn-cs"/>
-                  </a:rPr>
-                  <a:t>接入相机</a:t>
-                </a:r>
-              </a:p>
-            </p:txBody>
-          </p:sp>
-          <p:sp>
-            <p:nvSpPr>
-              <p:cNvPr id="44" name="TextBox 44"/>
-              <p:cNvSpPr txBox="1"/>
-              <p:nvPr/>
-            </p:nvSpPr>
-            <p:spPr>
-              <a:xfrm>
-                <a:off x="1280541" y="4530090"/>
-                <a:ext cx="1229868" cy="352044"/>
-              </a:xfrm>
-              <a:prstGeom prst="rect">
-                <a:avLst/>
-              </a:prstGeom>
-              <a:noFill/>
-              <a:ln>
-                <a:noFill/>
-              </a:ln>
-            </p:spPr>
-            <p:txBody>
-              <a:bodyPr wrap="none" lIns="0" tIns="0" rIns="0" bIns="0" anchor="t" anchorCtr="0">
-                <a:spAutoFit/>
-              </a:bodyPr>
-              <a:lstStyle/>
-              <a:p>
-                <a:pPr algn="ctr"/>
-                <a:r>
-                  <a:rPr lang="zh-CN" sz="1800" dirty="0">
-                    <a:solidFill>
-                      <a:schemeClr val="dk2"/>
-                    </a:solidFill>
-                    <a:latin typeface="+mn-lt"/>
-                    <a:ea typeface="+mn-ea"/>
-                    <a:cs typeface="+mn-cs"/>
-                  </a:rPr>
-                  <a:t>观察与小屏</a:t>
-                </a:r>
-              </a:p>
-            </p:txBody>
-          </p:sp>
-          <p:sp>
-            <p:nvSpPr>
-              <p:cNvPr id="45" name="Ellipse 45"/>
-              <p:cNvSpPr/>
-              <p:nvPr/>
-            </p:nvSpPr>
-            <p:spPr>
-              <a:xfrm>
-                <a:off x="1771650" y="3638550"/>
-                <a:ext cx="647700" cy="647700"/>
-              </a:xfrm>
-              <a:prstGeom prst="ellipse">
-                <a:avLst/>
-              </a:prstGeom>
-              <a:solidFill>
-                <a:schemeClr val="accent2"/>
-              </a:solidFill>
-              <a:ln>
-                <a:noFill/>
-              </a:ln>
-            </p:spPr>
-          </p:sp>
-          <p:sp>
-            <p:nvSpPr>
-              <p:cNvPr id="46" name="TextBox 46"/>
-              <p:cNvSpPr txBox="1"/>
-              <p:nvPr/>
-            </p:nvSpPr>
-            <p:spPr>
-              <a:xfrm>
-                <a:off x="1990016" y="3808095"/>
-                <a:ext cx="210967" cy="469392"/>
-              </a:xfrm>
-              <a:prstGeom prst="rect">
-                <a:avLst/>
-              </a:prstGeom>
-              <a:noFill/>
-              <a:ln>
-                <a:noFill/>
-              </a:ln>
-            </p:spPr>
-            <p:txBody>
-              <a:bodyPr wrap="none" lIns="0" tIns="0" rIns="0" bIns="0" anchor="t" anchorCtr="0">
-                <a:spAutoFit/>
-              </a:bodyPr>
-              <a:lstStyle/>
-              <a:p>
-                <a:pPr algn="ctr"/>
-                <a:r>
-                  <a:rPr lang="en-US" sz="2400" b="1" dirty="0">
-                    <a:solidFill>
-                      <a:srgbClr val="FFFFFF"/>
-                    </a:solidFill>
-                    <a:latin typeface="+mn-lt"/>
-                    <a:ea typeface="+mn-ea"/>
-                    <a:cs typeface="+mn-cs"/>
-                  </a:rPr>
-                  <a:t>7</a:t>
-                </a:r>
-              </a:p>
-            </p:txBody>
-          </p:sp>
-        </p:grpSp>
-        <p:grpSp>
-          <p:nvGrpSpPr>
-            <p:cNvPr id="52" name="Group 52"/>
-            <p:cNvGrpSpPr/>
-            <p:nvPr/>
-          </p:nvGrpSpPr>
-          <p:grpSpPr>
-            <a:xfrm>
-              <a:off x="3905250" y="5105400"/>
-              <a:ext cx="2857500" cy="1009650"/>
-              <a:chOff x="3905250" y="5105400"/>
-              <a:chExt cx="2857500" cy="1009650"/>
-            </a:xfrm>
-          </p:grpSpPr>
-          <p:sp>
-            <p:nvSpPr>
-              <p:cNvPr id="48" name="Rectangle 48"/>
-              <p:cNvSpPr/>
-              <p:nvPr/>
-            </p:nvSpPr>
-            <p:spPr>
-              <a:xfrm>
-                <a:off x="3905250" y="5581650"/>
-                <a:ext cx="2857500" cy="533400"/>
-              </a:xfrm>
-              <a:prstGeom prst="roundRect">
-                <a:avLst>
-                  <a:gd name="adj" fmla="val 32143"/>
-                </a:avLst>
-              </a:prstGeom>
-              <a:solidFill>
-                <a:srgbClr val="FFFFFF"/>
-              </a:solidFill>
-              <a:ln w="28575">
-                <a:solidFill>
-                  <a:srgbClr val="D85C45"/>
-                </a:solidFill>
-              </a:ln>
-            </p:spPr>
-          </p:sp>
-          <p:sp>
-            <p:nvSpPr>
-              <p:cNvPr id="49" name="TextBox 49"/>
-              <p:cNvSpPr txBox="1"/>
-              <p:nvPr/>
-            </p:nvSpPr>
-            <p:spPr>
-              <a:xfrm>
-                <a:off x="4561561" y="5749290"/>
-                <a:ext cx="1544879" cy="352044"/>
-              </a:xfrm>
-              <a:prstGeom prst="rect">
-                <a:avLst/>
-              </a:prstGeom>
-              <a:noFill/>
-              <a:ln>
-                <a:noFill/>
-              </a:ln>
-            </p:spPr>
-            <p:txBody>
-              <a:bodyPr wrap="none" lIns="0" tIns="0" rIns="0" bIns="0" anchor="t" anchorCtr="0">
-                <a:spAutoFit/>
-              </a:bodyPr>
-              <a:lstStyle/>
-              <a:p>
-                <a:pPr algn="ctr"/>
-                <a:r>
-                  <a:rPr lang="zh-CN" sz="1800" b="1" dirty="0">
-                    <a:solidFill>
-                      <a:srgbClr val="D85C45"/>
-                    </a:solidFill>
-                    <a:latin typeface="+mn-lt"/>
-                    <a:ea typeface="+mn-ea"/>
-                    <a:cs typeface="+mn-cs"/>
-                  </a:rPr>
-                  <a:t>逐项运行验证</a:t>
-                </a:r>
-              </a:p>
-            </p:txBody>
-          </p:sp>
-          <p:sp>
-            <p:nvSpPr>
-              <p:cNvPr id="50" name="Ellipse 50"/>
-              <p:cNvSpPr/>
-              <p:nvPr/>
-            </p:nvSpPr>
-            <p:spPr>
-              <a:xfrm>
-                <a:off x="5010150" y="5105400"/>
-                <a:ext cx="647700" cy="647700"/>
-              </a:xfrm>
-              <a:prstGeom prst="ellipse">
-                <a:avLst/>
-              </a:prstGeom>
-              <a:solidFill>
-                <a:srgbClr val="D85C45"/>
-              </a:solidFill>
-              <a:ln>
-                <a:noFill/>
-              </a:ln>
-            </p:spPr>
-          </p:sp>
-          <p:sp>
-            <p:nvSpPr>
-              <p:cNvPr id="51" name="TextBox 51"/>
-              <p:cNvSpPr txBox="1"/>
-              <p:nvPr/>
-            </p:nvSpPr>
-            <p:spPr>
-              <a:xfrm>
-                <a:off x="5228516" y="5274945"/>
-                <a:ext cx="210967" cy="469392"/>
-              </a:xfrm>
-              <a:prstGeom prst="rect">
-                <a:avLst/>
-              </a:prstGeom>
-              <a:noFill/>
-              <a:ln>
-                <a:noFill/>
-              </a:ln>
-            </p:spPr>
-            <p:txBody>
-              <a:bodyPr wrap="none" lIns="0" tIns="0" rIns="0" bIns="0" anchor="t" anchorCtr="0">
-                <a:spAutoFit/>
-              </a:bodyPr>
-              <a:lstStyle/>
-              <a:p>
-                <a:pPr algn="ctr"/>
-                <a:r>
-                  <a:rPr lang="en-US" sz="2400" b="1" dirty="0">
-                    <a:solidFill>
-                      <a:srgbClr val="FFFFFF"/>
-                    </a:solidFill>
-                    <a:latin typeface="+mn-lt"/>
-                    <a:ea typeface="+mn-ea"/>
-                    <a:cs typeface="+mn-cs"/>
-                  </a:rPr>
-                  <a:t>8</a:t>
-                </a:r>
-              </a:p>
-            </p:txBody>
-          </p:sp>
-        </p:grpSp>
-        <p:grpSp>
-          <p:nvGrpSpPr>
-            <p:cNvPr id="57" name="Group 57"/>
-            <p:cNvGrpSpPr/>
-            <p:nvPr/>
-          </p:nvGrpSpPr>
-          <p:grpSpPr>
-            <a:xfrm>
-              <a:off x="8572500" y="5105400"/>
-              <a:ext cx="2857500" cy="1009650"/>
-              <a:chOff x="8572500" y="5105400"/>
-              <a:chExt cx="2857500" cy="1009650"/>
-            </a:xfrm>
-          </p:grpSpPr>
-          <p:sp>
-            <p:nvSpPr>
-              <p:cNvPr id="53" name="Rectangle 53"/>
-              <p:cNvSpPr/>
-              <p:nvPr/>
-            </p:nvSpPr>
-            <p:spPr>
-              <a:xfrm>
-                <a:off x="8572500" y="5581650"/>
-                <a:ext cx="2857500" cy="533400"/>
-              </a:xfrm>
-              <a:prstGeom prst="roundRect">
-                <a:avLst>
-                  <a:gd name="adj" fmla="val 32143"/>
-                </a:avLst>
-              </a:prstGeom>
-              <a:solidFill>
-                <a:schemeClr val="accent1"/>
-              </a:solidFill>
-              <a:ln>
-                <a:noFill/>
-              </a:ln>
-            </p:spPr>
-          </p:sp>
-          <p:sp>
-            <p:nvSpPr>
-              <p:cNvPr id="54" name="TextBox 54"/>
-              <p:cNvSpPr txBox="1"/>
-              <p:nvPr/>
-            </p:nvSpPr>
-            <p:spPr>
-              <a:xfrm>
-                <a:off x="9101595" y="5749290"/>
-                <a:ext cx="1799311" cy="352044"/>
-              </a:xfrm>
-              <a:prstGeom prst="rect">
-                <a:avLst/>
-              </a:prstGeom>
-              <a:noFill/>
-              <a:ln>
-                <a:noFill/>
-              </a:ln>
-            </p:spPr>
-            <p:txBody>
-              <a:bodyPr wrap="none" lIns="0" tIns="0" rIns="0" bIns="0" anchor="t" anchorCtr="0">
-                <a:spAutoFit/>
-              </a:bodyPr>
-              <a:lstStyle/>
-              <a:p>
-                <a:pPr algn="ctr"/>
-                <a:r>
-                  <a:rPr lang="zh-CN" sz="1800" b="1" dirty="0">
-                    <a:solidFill>
-                      <a:srgbClr val="FFFFFF"/>
-                    </a:solidFill>
-                    <a:latin typeface="+mn-lt"/>
-                    <a:ea typeface="+mn-ea"/>
-                    <a:cs typeface="+mn-cs"/>
-                  </a:rPr>
-                  <a:t>保存场景并打包</a:t>
-                </a:r>
-              </a:p>
-            </p:txBody>
-          </p:sp>
-          <p:sp>
-            <p:nvSpPr>
-              <p:cNvPr id="55" name="Ellipse 55"/>
-              <p:cNvSpPr/>
-              <p:nvPr/>
-            </p:nvSpPr>
-            <p:spPr>
-              <a:xfrm>
-                <a:off x="9677400" y="5105400"/>
-                <a:ext cx="647700" cy="647700"/>
-              </a:xfrm>
-              <a:prstGeom prst="ellipse">
-                <a:avLst/>
-              </a:prstGeom>
-              <a:solidFill>
-                <a:schemeClr val="accent1"/>
-              </a:solidFill>
-              <a:ln>
-                <a:noFill/>
-              </a:ln>
-            </p:spPr>
-          </p:sp>
-          <p:sp>
-            <p:nvSpPr>
-              <p:cNvPr id="56" name="TextBox 56"/>
-              <p:cNvSpPr txBox="1"/>
-              <p:nvPr/>
-            </p:nvSpPr>
-            <p:spPr>
-              <a:xfrm>
-                <a:off x="9895766" y="5274945"/>
-                <a:ext cx="210967" cy="469392"/>
-              </a:xfrm>
-              <a:prstGeom prst="rect">
-                <a:avLst/>
-              </a:prstGeom>
-              <a:noFill/>
-              <a:ln>
-                <a:noFill/>
-              </a:ln>
-            </p:spPr>
-            <p:txBody>
-              <a:bodyPr wrap="none" lIns="0" tIns="0" rIns="0" bIns="0" anchor="t" anchorCtr="0">
-                <a:spAutoFit/>
-              </a:bodyPr>
-              <a:lstStyle/>
-              <a:p>
-                <a:pPr algn="ctr"/>
-                <a:r>
-                  <a:rPr lang="en-US" sz="2400" b="1" dirty="0">
-                    <a:solidFill>
-                      <a:srgbClr val="FFFFFF"/>
-                    </a:solidFill>
-                    <a:latin typeface="+mn-lt"/>
-                    <a:ea typeface="+mn-ea"/>
-                    <a:cs typeface="+mn-cs"/>
-                  </a:rPr>
-                  <a:t>9</a:t>
-                </a:r>
-              </a:p>
-            </p:txBody>
-          </p:sp>
-        </p:grpSp>
-      </p:grpSp>
-      <p:grpSp>
-        <p:nvGrpSpPr>
-          <p:cNvPr id="62" name="Group 62"/>
-          <p:cNvGrpSpPr/>
-          <p:nvPr/>
-        </p:nvGrpSpPr>
-        <p:grpSpPr>
-          <a:xfrm>
-            <a:off x="552450" y="6353175"/>
-            <a:ext cx="11055858" cy="432626"/>
-            <a:chOff x="552450" y="6353175"/>
-            <a:chExt cx="11055858" cy="432626"/>
-          </a:xfrm>
-        </p:grpSpPr>
-        <p:sp>
-          <p:nvSpPr>
-            <p:cNvPr id="59" name="Line 59"/>
-            <p:cNvSpPr/>
-            <p:nvPr/>
-          </p:nvSpPr>
-          <p:spPr>
-            <a:xfrm>
-              <a:off x="552450" y="6353175"/>
-              <a:ext cx="10668000" cy="9525"/>
-            </a:xfrm>
-            <a:custGeom>
-              <a:avLst/>
-              <a:gdLst/>
-              <a:ahLst/>
-              <a:cxnLst/>
-              <a:rect l="l" t="t" r="r" b="b"/>
-              <a:pathLst>
-                <a:path w="10668000" h="9525">
-                  <a:moveTo>
-                    <a:pt x="0" y="0"/>
-                  </a:moveTo>
-                  <a:lnTo>
-                    <a:pt x="10668000" y="0"/>
-                  </a:lnTo>
-                </a:path>
-              </a:pathLst>
-            </a:custGeom>
-            <a:noFill/>
-            <a:ln w="19050">
-              <a:solidFill>
-                <a:schemeClr val="accent4"/>
-              </a:solidFill>
-            </a:ln>
-          </p:spPr>
-        </p:sp>
-        <p:sp>
-          <p:nvSpPr>
-            <p:cNvPr id="60" name="TextBox 60"/>
-            <p:cNvSpPr txBox="1"/>
-            <p:nvPr/>
-          </p:nvSpPr>
-          <p:spPr>
-            <a:xfrm>
-              <a:off x="564642" y="6521768"/>
-              <a:ext cx="2948769" cy="264033"/>
-            </a:xfrm>
-            <a:prstGeom prst="rect">
-              <a:avLst/>
-            </a:prstGeom>
-            <a:noFill/>
-            <a:ln>
-              <a:noFill/>
-            </a:ln>
-          </p:spPr>
-          <p:txBody>
-            <a:bodyPr wrap="none" lIns="0" tIns="0" rIns="0" bIns="0" anchor="t" anchorCtr="0">
-              <a:spAutoFit/>
-            </a:bodyPr>
-            <a:lstStyle/>
-            <a:p>
-              <a:pPr algn="l"/>
-              <a:r>
-                <a:rPr lang="zh-CN" sz="1350" dirty="0">
-                  <a:solidFill>
-                    <a:schemeClr val="accent5"/>
-                  </a:solidFill>
-                  <a:latin typeface="+mn-lt"/>
-                  <a:ea typeface="+mn-ea"/>
-                  <a:cs typeface="+mn-cs"/>
-                </a:rPr>
-                <a:t>综合练习 · 让知识在一个场景里闭环</a:t>
-              </a:r>
-            </a:p>
-          </p:txBody>
-        </p:sp>
-        <p:sp>
-          <p:nvSpPr>
-            <p:cNvPr id="61" name="TextBox 61"/>
-            <p:cNvSpPr txBox="1"/>
-            <p:nvPr/>
-          </p:nvSpPr>
-          <p:spPr>
-            <a:xfrm>
-              <a:off x="11394681" y="6521768"/>
-              <a:ext cx="213627" cy="264033"/>
-            </a:xfrm>
-            <a:prstGeom prst="rect">
-              <a:avLst/>
-            </a:prstGeom>
-            <a:noFill/>
-            <a:ln>
-              <a:noFill/>
-            </a:ln>
-          </p:spPr>
-          <p:txBody>
-            <a:bodyPr wrap="none" lIns="0" tIns="0" rIns="0" bIns="0" anchor="t" anchorCtr="0">
-              <a:spAutoFit/>
-            </a:bodyPr>
-            <a:lstStyle/>
-            <a:p>
-              <a:pPr algn="r"/>
-              <a:fld id="{DAD15D95-BE8E-4D87-BF41-FEB6568C5127}" type="slidenum">
-                <a:rPr lang="en-US" sz="1350" dirty="0">
-                  <a:solidFill>
-                    <a:schemeClr val="accent5"/>
-                  </a:solidFill>
-                  <a:latin typeface="+mn-lt"/>
-                  <a:ea typeface="+mn-ea"/>
-                  <a:cs typeface="+mn-cs"/>
-                </a:rPr>
-                <a:t>12</a:t>
-              </a:fld>
-            </a:p>
-          </p:txBody>
-        </p:sp>
-      </p:grpSp>
-    </p:spTree>
-  </p:cSld>
-  <p:clrMapOvr>
-    <a:masterClrMapping/>
-  </p:clrMapOvr>
-  <p:transition p14:dur="400">
-    <p:fade/>
-  </p:transition>
-</p:sld>
-</file>
-
-<file path=ppt/slides/slide13.xml><?xml version="1.0" encoding="utf-8"?>
-<p:sld xmlns:a="http://schemas.openxmlformats.org/drawingml/2006/main" xmlns:p="http://schemas.openxmlformats.org/presentationml/2006/main" xmlns:p14="http://schemas.microsoft.com/office/powerpoint/2010/main">
+<p:sld xmlns:a="http://schemas.openxmlformats.org/drawingml/2006/main" xmlns:r="http://schemas.openxmlformats.org/officeDocument/2006/relationships" xmlns:p="http://schemas.openxmlformats.org/presentationml/2006/main">
   <p:cSld>
     <p:spTree>
       <p:nvGrpSpPr>
@@ -8801,6 +7159,14 @@
               </a:rPr>
               <a:t>最后一步：把场景交付为 Windows 程序</a:t>
             </a:r>
+            <a:endParaRPr lang="zh-CN" sz="4200" b="1" dirty="0">
+              <a:solidFill>
+                <a:schemeClr val="dk1"/>
+              </a:solidFill>
+              <a:latin typeface="+mj-lt"/>
+              <a:ea typeface="+mj-ea"/>
+              <a:cs typeface="+mj-cs"/>
+            </a:endParaRPr>
           </a:p>
         </p:txBody>
       </p:sp>
@@ -8841,6 +7207,14 @@
               </a:rPr>
               <a:t>打包不是“另一个世界”，只是把已验证的场景与资产装进运行时</a:t>
             </a:r>
+            <a:endParaRPr lang="zh-CN" sz="1800" dirty="0">
+              <a:solidFill>
+                <a:schemeClr val="dk2"/>
+              </a:solidFill>
+              <a:latin typeface="+mn-lt"/>
+              <a:ea typeface="+mn-ea"/>
+              <a:cs typeface="+mn-cs"/>
+            </a:endParaRPr>
           </a:p>
         </p:txBody>
       </p:sp>
@@ -8852,7 +7226,7 @@
         </p:nvGrpSpPr>
         <p:grpSpPr>
           <a:xfrm>
-            <a:off x="699973" y="1828800"/>
+            <a:off x="1167333" y="2741930"/>
             <a:ext cx="9827374" cy="1967484"/>
             <a:chOff x="699973" y="1828800"/>
             <a:chExt cx="9827374" cy="1967484"/>
@@ -8931,6 +7305,14 @@
                   </a:rPr>
                   <a:t>01</a:t>
                 </a:r>
+                <a:endParaRPr lang="en-US" sz="2700" b="1" dirty="0">
+                  <a:solidFill>
+                    <a:srgbClr val="FFFFFF"/>
+                  </a:solidFill>
+                  <a:latin typeface="+mn-lt"/>
+                  <a:ea typeface="+mn-ea"/>
+                  <a:cs typeface="+mn-cs"/>
+                </a:endParaRPr>
               </a:p>
             </p:txBody>
           </p:sp>
@@ -8971,6 +7353,14 @@
                   </a:rPr>
                   <a:t>保存场景</a:t>
                 </a:r>
+                <a:endParaRPr lang="zh-CN" sz="2400" b="1" dirty="0">
+                  <a:solidFill>
+                    <a:schemeClr val="dk1"/>
+                  </a:solidFill>
+                  <a:latin typeface="+mn-lt"/>
+                  <a:ea typeface="+mn-ea"/>
+                  <a:cs typeface="+mn-cs"/>
+                </a:endParaRPr>
               </a:p>
             </p:txBody>
           </p:sp>
@@ -9011,6 +7401,14 @@
                   </a:rPr>
                   <a:t>确认无报错</a:t>
                 </a:r>
+                <a:endParaRPr lang="zh-CN" sz="1800" dirty="0">
+                  <a:solidFill>
+                    <a:schemeClr val="dk2"/>
+                  </a:solidFill>
+                  <a:latin typeface="+mn-lt"/>
+                  <a:ea typeface="+mn-ea"/>
+                  <a:cs typeface="+mn-cs"/>
+                </a:endParaRPr>
               </a:p>
             </p:txBody>
           </p:sp>
@@ -9136,6 +7534,14 @@
                   </a:rPr>
                   <a:t>02</a:t>
                 </a:r>
+                <a:endParaRPr lang="en-US" sz="2700" b="1" dirty="0">
+                  <a:solidFill>
+                    <a:srgbClr val="FFFFFF"/>
+                  </a:solidFill>
+                  <a:latin typeface="+mn-lt"/>
+                  <a:ea typeface="+mn-ea"/>
+                  <a:cs typeface="+mn-cs"/>
+                </a:endParaRPr>
               </a:p>
             </p:txBody>
           </p:sp>
@@ -9176,6 +7582,14 @@
                   </a:rPr>
                   <a:t>打开 Build Profiles</a:t>
                 </a:r>
+                <a:endParaRPr lang="zh-CN" sz="2400" b="1" dirty="0">
+                  <a:solidFill>
+                    <a:schemeClr val="dk1"/>
+                  </a:solidFill>
+                  <a:latin typeface="+mn-lt"/>
+                  <a:ea typeface="+mn-ea"/>
+                  <a:cs typeface="+mn-cs"/>
+                </a:endParaRPr>
               </a:p>
             </p:txBody>
           </p:sp>
@@ -9216,6 +7630,14 @@
                   </a:rPr>
                   <a:t>选择 Windows</a:t>
                 </a:r>
+                <a:endParaRPr lang="zh-CN" sz="1800" dirty="0">
+                  <a:solidFill>
+                    <a:schemeClr val="dk2"/>
+                  </a:solidFill>
+                  <a:latin typeface="+mn-lt"/>
+                  <a:ea typeface="+mn-ea"/>
+                  <a:cs typeface="+mn-cs"/>
+                </a:endParaRPr>
               </a:p>
             </p:txBody>
           </p:sp>
@@ -9341,6 +7763,14 @@
                   </a:rPr>
                   <a:t>03</a:t>
                 </a:r>
+                <a:endParaRPr lang="en-US" sz="2700" b="1" dirty="0">
+                  <a:solidFill>
+                    <a:srgbClr val="FFFFFF"/>
+                  </a:solidFill>
+                  <a:latin typeface="+mn-lt"/>
+                  <a:ea typeface="+mn-ea"/>
+                  <a:cs typeface="+mn-cs"/>
+                </a:endParaRPr>
               </a:p>
             </p:txBody>
           </p:sp>
@@ -9381,6 +7811,14 @@
                   </a:rPr>
                   <a:t>加入场景</a:t>
                 </a:r>
+                <a:endParaRPr lang="zh-CN" sz="2400" b="1" dirty="0">
+                  <a:solidFill>
+                    <a:schemeClr val="dk1"/>
+                  </a:solidFill>
+                  <a:latin typeface="+mn-lt"/>
+                  <a:ea typeface="+mn-ea"/>
+                  <a:cs typeface="+mn-cs"/>
+                </a:endParaRPr>
               </a:p>
             </p:txBody>
           </p:sp>
@@ -9421,6 +7859,14 @@
                   </a:rPr>
                   <a:t>Scenes In Build</a:t>
                 </a:r>
+                <a:endParaRPr lang="en-US" sz="1800" dirty="0">
+                  <a:solidFill>
+                    <a:schemeClr val="dk2"/>
+                  </a:solidFill>
+                  <a:latin typeface="+mn-lt"/>
+                  <a:ea typeface="+mn-ea"/>
+                  <a:cs typeface="+mn-cs"/>
+                </a:endParaRPr>
               </a:p>
             </p:txBody>
           </p:sp>
@@ -9546,6 +7992,14 @@
                   </a:rPr>
                   <a:t>04</a:t>
                 </a:r>
+                <a:endParaRPr lang="en-US" sz="2700" b="1" dirty="0">
+                  <a:solidFill>
+                    <a:srgbClr val="FFFFFF"/>
+                  </a:solidFill>
+                  <a:latin typeface="+mn-lt"/>
+                  <a:ea typeface="+mn-ea"/>
+                  <a:cs typeface="+mn-cs"/>
+                </a:endParaRPr>
               </a:p>
             </p:txBody>
           </p:sp>
@@ -9586,6 +8040,14 @@
                   </a:rPr>
                   <a:t>Build 并运行</a:t>
                 </a:r>
+                <a:endParaRPr lang="zh-CN" sz="2400" b="1" dirty="0">
+                  <a:solidFill>
+                    <a:schemeClr val="dk1"/>
+                  </a:solidFill>
+                  <a:latin typeface="+mn-lt"/>
+                  <a:ea typeface="+mn-ea"/>
+                  <a:cs typeface="+mn-cs"/>
+                </a:endParaRPr>
               </a:p>
             </p:txBody>
           </p:sp>
@@ -9626,416 +8088,19 @@
                   </a:rPr>
                   <a:t>检查完整目录</a:t>
                 </a:r>
-              </a:p>
-            </p:txBody>
-          </p:sp>
-        </p:grpSp>
-      </p:grpSp>
-      <p:grpSp>
-        <p:nvGrpSpPr>
-          <p:cNvPr id="38" name="Group 38"/>
-          <p:cNvGrpSpPr/>
-          <p:nvPr/>
-        </p:nvGrpSpPr>
-        <p:grpSpPr>
-          <a:xfrm>
-            <a:off x="666750" y="4095750"/>
-            <a:ext cx="11855806" cy="1619250"/>
-            <a:chOff x="666750" y="4095750"/>
-            <a:chExt cx="11855806" cy="1619250"/>
-          </a:xfrm>
-        </p:grpSpPr>
-        <p:sp>
-          <p:nvSpPr>
-            <p:cNvPr id="28" name="Rectangle 28"/>
-            <p:cNvSpPr/>
-            <p:nvPr/>
-          </p:nvSpPr>
-          <p:spPr>
-            <a:xfrm>
-              <a:off x="666750" y="4095750"/>
-              <a:ext cx="10858500" cy="1619250"/>
-            </a:xfrm>
-            <a:prstGeom prst="roundRect">
-              <a:avLst>
-                <a:gd name="adj" fmla="val 17647"/>
-              </a:avLst>
-            </a:prstGeom>
-            <a:solidFill>
-              <a:schemeClr val="accent1"/>
-            </a:solidFill>
-            <a:ln>
-              <a:noFill/>
-            </a:ln>
-          </p:spPr>
-        </p:sp>
-        <p:grpSp>
-          <p:nvGrpSpPr>
-            <p:cNvPr id="35" name="Group 35"/>
-            <p:cNvGrpSpPr/>
-            <p:nvPr/>
-          </p:nvGrpSpPr>
-          <p:grpSpPr>
-            <a:xfrm>
-              <a:off x="1257300" y="4605338"/>
-              <a:ext cx="600074" cy="600075"/>
-              <a:chOff x="1257300" y="4605338"/>
-              <a:chExt cx="600074" cy="600075"/>
-            </a:xfrm>
-          </p:grpSpPr>
-          <p:sp>
-            <p:nvSpPr>
-              <p:cNvPr id="29" name="Freeform 29"/>
-              <p:cNvSpPr/>
-              <p:nvPr/>
-            </p:nvSpPr>
-            <p:spPr>
-              <a:xfrm>
-                <a:off x="1257300" y="4605338"/>
-                <a:ext cx="533400" cy="600075"/>
-              </a:xfrm>
-              <a:custGeom>
-                <a:avLst/>
-                <a:gdLst/>
-                <a:ahLst/>
-                <a:cxnLst/>
-                <a:rect l="l" t="t" r="r" b="b"/>
-                <a:pathLst>
-                  <a:path w="533400" h="600075">
-                    <a:moveTo>
-                      <a:pt x="266700" y="600075"/>
-                    </a:moveTo>
-                    <a:lnTo>
-                      <a:pt x="0" y="450056"/>
-                    </a:lnTo>
-                    <a:lnTo>
-                      <a:pt x="0" y="150019"/>
-                    </a:lnTo>
-                    <a:lnTo>
-                      <a:pt x="266700" y="0"/>
-                    </a:lnTo>
-                    <a:lnTo>
-                      <a:pt x="533400" y="150019"/>
-                    </a:lnTo>
-                    <a:lnTo>
-                      <a:pt x="533400" y="300038"/>
-                    </a:lnTo>
-                  </a:path>
-                </a:pathLst>
-              </a:custGeom>
-              <a:noFill/>
-              <a:ln w="19050">
-                <a:solidFill>
-                  <a:srgbClr val="FFFFFF"/>
-                </a:solidFill>
-              </a:ln>
-            </p:spPr>
-          </p:sp>
-          <p:sp>
-            <p:nvSpPr>
-              <p:cNvPr id="30" name="Freeform 30"/>
-              <p:cNvSpPr/>
-              <p:nvPr/>
-            </p:nvSpPr>
-            <p:spPr>
-              <a:xfrm>
-                <a:off x="1524000" y="4755356"/>
-                <a:ext cx="266700" cy="150019"/>
-              </a:xfrm>
-              <a:custGeom>
-                <a:avLst/>
-                <a:gdLst/>
-                <a:ahLst/>
-                <a:cxnLst/>
-                <a:rect l="l" t="t" r="r" b="b"/>
-                <a:pathLst>
-                  <a:path w="266700" h="150019">
-                    <a:moveTo>
-                      <a:pt x="0" y="150019"/>
-                    </a:moveTo>
-                    <a:lnTo>
-                      <a:pt x="266700" y="0"/>
-                    </a:lnTo>
-                  </a:path>
-                </a:pathLst>
-              </a:custGeom>
-              <a:noFill/>
-              <a:ln w="19050">
-                <a:solidFill>
-                  <a:srgbClr val="FFFFFF"/>
-                </a:solidFill>
-              </a:ln>
-            </p:spPr>
-          </p:sp>
-          <p:sp>
-            <p:nvSpPr>
-              <p:cNvPr id="31" name="Freeform 31"/>
-              <p:cNvSpPr/>
-              <p:nvPr/>
-            </p:nvSpPr>
-            <p:spPr>
-              <a:xfrm>
-                <a:off x="1524000" y="4905375"/>
-                <a:ext cx="9525" cy="300038"/>
-              </a:xfrm>
-              <a:custGeom>
-                <a:avLst/>
-                <a:gdLst/>
-                <a:ahLst/>
-                <a:cxnLst/>
-                <a:rect l="l" t="t" r="r" b="b"/>
-                <a:pathLst>
-                  <a:path w="9525" h="300038">
-                    <a:moveTo>
-                      <a:pt x="0" y="0"/>
-                    </a:moveTo>
-                    <a:lnTo>
-                      <a:pt x="0" y="300038"/>
-                    </a:lnTo>
-                  </a:path>
-                </a:pathLst>
-              </a:custGeom>
-              <a:noFill/>
-              <a:ln w="19050">
-                <a:solidFill>
-                  <a:srgbClr val="FFFFFF"/>
-                </a:solidFill>
-              </a:ln>
-            </p:spPr>
-          </p:sp>
-          <p:sp>
-            <p:nvSpPr>
-              <p:cNvPr id="32" name="Freeform 32"/>
-              <p:cNvSpPr/>
-              <p:nvPr/>
-            </p:nvSpPr>
-            <p:spPr>
-              <a:xfrm>
-                <a:off x="1257300" y="4755356"/>
-                <a:ext cx="266700" cy="150019"/>
-              </a:xfrm>
-              <a:custGeom>
-                <a:avLst/>
-                <a:gdLst/>
-                <a:ahLst/>
-                <a:cxnLst/>
-                <a:rect l="l" t="t" r="r" b="b"/>
-                <a:pathLst>
-                  <a:path w="266700" h="150019">
-                    <a:moveTo>
-                      <a:pt x="266700" y="150019"/>
-                    </a:moveTo>
-                    <a:lnTo>
-                      <a:pt x="0" y="0"/>
-                    </a:lnTo>
-                  </a:path>
-                </a:pathLst>
-              </a:custGeom>
-              <a:noFill/>
-              <a:ln w="19050">
-                <a:solidFill>
-                  <a:srgbClr val="FFFFFF"/>
-                </a:solidFill>
-              </a:ln>
-            </p:spPr>
-          </p:sp>
-          <p:sp>
-            <p:nvSpPr>
-              <p:cNvPr id="33" name="Freeform 33"/>
-              <p:cNvSpPr/>
-              <p:nvPr/>
-            </p:nvSpPr>
-            <p:spPr>
-              <a:xfrm>
-                <a:off x="1624012" y="5105400"/>
-                <a:ext cx="233362" cy="9525"/>
-              </a:xfrm>
-              <a:custGeom>
-                <a:avLst/>
-                <a:gdLst/>
-                <a:ahLst/>
-                <a:cxnLst/>
-                <a:rect l="l" t="t" r="r" b="b"/>
-                <a:pathLst>
-                  <a:path w="233362" h="9525">
-                    <a:moveTo>
-                      <a:pt x="0" y="0"/>
-                    </a:moveTo>
-                    <a:lnTo>
-                      <a:pt x="233362" y="0"/>
-                    </a:lnTo>
-                  </a:path>
-                </a:pathLst>
-              </a:custGeom>
-              <a:noFill/>
-              <a:ln w="19050">
-                <a:solidFill>
-                  <a:srgbClr val="FFFFFF"/>
-                </a:solidFill>
-              </a:ln>
-            </p:spPr>
-          </p:sp>
-          <p:sp>
-            <p:nvSpPr>
-              <p:cNvPr id="34" name="Freeform 34"/>
-              <p:cNvSpPr/>
-              <p:nvPr/>
-            </p:nvSpPr>
-            <p:spPr>
-              <a:xfrm>
-                <a:off x="1757362" y="5005388"/>
-                <a:ext cx="100012" cy="200025"/>
-              </a:xfrm>
-              <a:custGeom>
-                <a:avLst/>
-                <a:gdLst/>
-                <a:ahLst/>
-                <a:cxnLst/>
-                <a:rect l="l" t="t" r="r" b="b"/>
-                <a:pathLst>
-                  <a:path w="100012" h="200025">
-                    <a:moveTo>
-                      <a:pt x="0" y="0"/>
-                    </a:moveTo>
-                    <a:lnTo>
-                      <a:pt x="100012" y="100012"/>
-                    </a:lnTo>
-                    <a:lnTo>
-                      <a:pt x="0" y="200025"/>
-                    </a:lnTo>
-                  </a:path>
-                </a:pathLst>
-              </a:custGeom>
-              <a:noFill/>
-              <a:ln w="19050">
-                <a:solidFill>
-                  <a:srgbClr val="FFFFFF"/>
-                </a:solidFill>
-              </a:ln>
-            </p:spPr>
-          </p:sp>
-        </p:grpSp>
-        <p:sp>
-          <p:nvSpPr>
-            <p:cNvPr id="36" name="TextBox 36"/>
-            <p:cNvSpPr txBox="1"/>
-            <p:nvPr/>
-          </p:nvSpPr>
-          <p:spPr>
-            <a:xfrm>
-              <a:off x="2269998" y="4365308"/>
-              <a:ext cx="1813027" cy="616077"/>
-            </a:xfrm>
-            <a:prstGeom prst="rect">
-              <a:avLst/>
-            </a:prstGeom>
-            <a:noFill/>
-            <a:ln>
-              <a:noFill/>
-            </a:ln>
-          </p:spPr>
-          <p:txBody>
-            <a:bodyPr wrap="none" lIns="0" tIns="0" rIns="0" bIns="0" anchor="t" anchorCtr="0">
-              <a:spAutoFit/>
-            </a:bodyPr>
-            <a:lstStyle/>
-            <a:p>
-              <a:pPr algn="l"/>
-              <a:r>
-                <a:rPr lang="zh-CN" sz="3150" b="1" dirty="0">
+                <a:endParaRPr lang="zh-CN" sz="1800" dirty="0">
                   <a:solidFill>
-                    <a:srgbClr val="FFFFFF"/>
+                    <a:schemeClr val="dk2"/>
                   </a:solidFill>
                   <a:latin typeface="+mn-lt"/>
                   <a:ea typeface="+mn-ea"/>
                   <a:cs typeface="+mn-cs"/>
-                </a:rPr>
-                <a:t>最终闭环</a:t>
-              </a:r>
-            </a:p>
-          </p:txBody>
-        </p:sp>
-        <p:sp>
-          <p:nvSpPr>
-            <p:cNvPr id="37" name="TextBox 37"/>
-            <p:cNvSpPr txBox="1"/>
-            <p:nvPr/>
-          </p:nvSpPr>
-          <p:spPr>
-            <a:xfrm>
-              <a:off x="2273808" y="4960620"/>
-              <a:ext cx="10248748" cy="469392"/>
-            </a:xfrm>
-            <a:prstGeom prst="rect">
-              <a:avLst/>
-            </a:prstGeom>
-            <a:noFill/>
-            <a:ln>
-              <a:noFill/>
-            </a:ln>
-          </p:spPr>
-          <p:txBody>
-            <a:bodyPr wrap="none" lIns="0" tIns="0" rIns="0" bIns="0" anchor="t" anchorCtr="0">
-              <a:spAutoFit/>
-            </a:bodyPr>
-            <a:lstStyle/>
-            <a:p>
-              <a:pPr algn="l"/>
-              <a:r>
-                <a:rPr lang="zh-CN" sz="2400" dirty="0">
-                  <a:solidFill>
-                    <a:srgbClr val="FFFFFF"/>
-                  </a:solidFill>
-                  <a:latin typeface="+mn-lt"/>
-                  <a:ea typeface="+mn-ea"/>
-                  <a:cs typeface="+mn-cs"/>
-                </a:rPr>
-                <a:t>层级组织 → 组件组合 → 物理交互 → 渲染呈现 → Prefab 复用 → 打包交付</a:t>
-              </a:r>
-            </a:p>
-          </p:txBody>
-        </p:sp>
+                </a:endParaRPr>
+              </a:p>
+            </p:txBody>
+          </p:sp>
+        </p:grpSp>
       </p:grpSp>
-      <p:sp>
-        <p:nvSpPr>
-          <p:cNvPr id="39" name="TextBox 39"/>
-          <p:cNvSpPr txBox="1"/>
-          <p:nvPr/>
-        </p:nvSpPr>
-        <p:spPr>
-          <a:xfrm>
-            <a:off x="2316328" y="5794058"/>
-            <a:ext cx="7559345" cy="616077"/>
-          </a:xfrm>
-          <a:prstGeom prst="rect">
-            <a:avLst/>
-          </a:prstGeom>
-          <a:noFill/>
-          <a:ln>
-            <a:noFill/>
-          </a:ln>
-        </p:spPr>
-        <p:txBody>
-          <a:bodyPr wrap="none" lIns="0" tIns="0" rIns="0" bIns="0" anchor="t" anchorCtr="0">
-            <a:spAutoFit/>
-          </a:bodyPr>
-          <a:lstStyle/>
-          <a:p>
-            <a:pPr algn="ctr"/>
-            <a:r>
-              <a:rPr lang="zh-CN" sz="3150" b="1" dirty="0">
-                <a:solidFill>
-                  <a:schemeClr val="dk1"/>
-                </a:solidFill>
-                <a:latin typeface="+mj-lt"/>
-                <a:ea typeface="+mj-ea"/>
-                <a:cs typeface="+mj-cs"/>
-              </a:rPr>
-              <a:t>会搭、会动、会看、会复用、会交付</a:t>
-            </a:r>
-          </a:p>
-        </p:txBody>
-      </p:sp>
       <p:grpSp>
         <p:nvGrpSpPr>
           <p:cNvPr id="43" name="Group 43"/>
@@ -10088,46 +8153,6 @@
         </p:sp>
         <p:sp>
           <p:nvSpPr>
-            <p:cNvPr id="41" name="TextBox 41"/>
-            <p:cNvSpPr txBox="1"/>
-            <p:nvPr/>
-          </p:nvSpPr>
-          <p:spPr>
-            <a:xfrm>
-              <a:off x="564642" y="6521768"/>
-              <a:ext cx="2311146" cy="264033"/>
-            </a:xfrm>
-            <a:prstGeom prst="rect">
-              <a:avLst/>
-            </a:prstGeom>
-            <a:noFill/>
-            <a:ln>
-              <a:noFill/>
-            </a:ln>
-          </p:spPr>
-          <p:txBody>
-            <a:bodyPr wrap="none" lIns="0" tIns="0" rIns="0" bIns="0" anchor="t" anchorCtr="0">
-              <a:spAutoFit/>
-            </a:bodyPr>
-            <a:lstStyle/>
-            <a:p>
-              <a:pPr algn="l"/>
-              <a:r>
-                <a:rPr lang="zh-CN" sz="1350" dirty="0">
-                  <a:solidFill>
-                    <a:schemeClr val="accent5"/>
-                  </a:solidFill>
-                  <a:latin typeface="+mn-lt"/>
-                  <a:ea typeface="+mn-ea"/>
-                  <a:cs typeface="+mn-cs"/>
-                </a:rPr>
-                <a:t>Unity 基础 · 从场景到 Build</a:t>
-              </a:r>
-            </a:p>
-          </p:txBody>
-        </p:sp>
-        <p:sp>
-          <p:nvSpPr>
             <p:cNvPr id="42" name="TextBox 42"/>
             <p:cNvSpPr txBox="1"/>
             <p:nvPr/>
@@ -10161,8 +8186,15 @@
                   <a:ea typeface="+mn-ea"/>
                   <a:cs typeface="+mn-cs"/>
                 </a:rPr>
-                <a:t>13</a:t>
               </a:fld>
+              <a:endParaRPr lang="en-US" sz="1350" dirty="0">
+                <a:solidFill>
+                  <a:schemeClr val="accent5"/>
+                </a:solidFill>
+                <a:latin typeface="+mn-lt"/>
+                <a:ea typeface="+mn-ea"/>
+                <a:cs typeface="+mn-cs"/>
+              </a:endParaRPr>
             </a:p>
           </p:txBody>
         </p:sp>
@@ -10172,9 +8204,18 @@
   <p:clrMapOvr>
     <a:masterClrMapping/>
   </p:clrMapOvr>
-  <p:transition p14:dur="400">
-    <p:fade/>
-  </p:transition>
+  <mc:AlternateContent xmlns:mc="http://schemas.openxmlformats.org/markup-compatibility/2006">
+    <mc:Choice xmlns:p14="http://schemas.microsoft.com/office/powerpoint/2010/main" Requires="p14">
+      <p:transition p14:dur="400">
+        <p:fade/>
+      </p:transition>
+    </mc:Choice>
+    <mc:Fallback>
+      <p:transition>
+        <p:fade/>
+      </p:transition>
+    </mc:Fallback>
+  </mc:AlternateContent>
 </p:sld>
 </file>
 
@@ -10232,6 +8273,14 @@
               </a:rPr>
               <a:t>一张地图，串起 Unity 的基础工作流</a:t>
             </a:r>
+            <a:endParaRPr lang="zh-CN" sz="4200" b="1" dirty="0">
+              <a:solidFill>
+                <a:schemeClr val="dk1"/>
+              </a:solidFill>
+              <a:latin typeface="+mj-lt"/>
+              <a:ea typeface="+mj-ea"/>
+              <a:cs typeface="+mj-cs"/>
+            </a:endParaRPr>
           </a:p>
         </p:txBody>
       </p:sp>
@@ -10310,6 +8359,14 @@
               </a:rPr>
               <a:t>从“组织场景”出发，到“交付可运行程序”结束</a:t>
             </a:r>
+            <a:endParaRPr lang="zh-CN" sz="1800" dirty="0">
+              <a:solidFill>
+                <a:schemeClr val="dk2"/>
+              </a:solidFill>
+              <a:latin typeface="+mn-lt"/>
+              <a:ea typeface="+mn-ea"/>
+              <a:cs typeface="+mn-cs"/>
+            </a:endParaRPr>
           </a:p>
         </p:txBody>
       </p:sp>
@@ -10400,6 +8457,14 @@
                   </a:rPr>
                   <a:t>01</a:t>
                 </a:r>
+                <a:endParaRPr lang="en-US" sz="2400" b="1" dirty="0">
+                  <a:solidFill>
+                    <a:srgbClr val="FFFFFF"/>
+                  </a:solidFill>
+                  <a:latin typeface="+mn-lt"/>
+                  <a:ea typeface="+mn-ea"/>
+                  <a:cs typeface="+mn-cs"/>
+                </a:endParaRPr>
               </a:p>
             </p:txBody>
           </p:sp>
@@ -11015,6 +9080,14 @@
                   </a:rPr>
                   <a:t>场景与层级</a:t>
                 </a:r>
+                <a:endParaRPr lang="zh-CN" sz="2400" b="1" dirty="0">
+                  <a:solidFill>
+                    <a:schemeClr val="dk1"/>
+                  </a:solidFill>
+                  <a:latin typeface="+mn-lt"/>
+                  <a:ea typeface="+mn-ea"/>
+                  <a:cs typeface="+mn-cs"/>
+                </a:endParaRPr>
               </a:p>
             </p:txBody>
           </p:sp>
@@ -11055,6 +9128,14 @@
                   </a:rPr>
                   <a:t>Scene · GameObject · Component · Transform</a:t>
                 </a:r>
+                <a:endParaRPr lang="en-US" sz="1800" dirty="0">
+                  <a:solidFill>
+                    <a:schemeClr val="dk2"/>
+                  </a:solidFill>
+                  <a:latin typeface="+mn-lt"/>
+                  <a:ea typeface="+mn-ea"/>
+                  <a:cs typeface="+mn-cs"/>
+                </a:endParaRPr>
               </a:p>
             </p:txBody>
           </p:sp>
@@ -11095,6 +9176,14 @@
                   </a:rPr>
                   <a:t>先理解对象如何被组织，再谈功能如何叠加</a:t>
                 </a:r>
+                <a:endParaRPr lang="zh-CN" sz="1800" dirty="0">
+                  <a:solidFill>
+                    <a:schemeClr val="accent5"/>
+                  </a:solidFill>
+                  <a:latin typeface="+mn-lt"/>
+                  <a:ea typeface="+mn-ea"/>
+                  <a:cs typeface="+mn-cs"/>
+                </a:endParaRPr>
               </a:p>
             </p:txBody>
           </p:sp>
@@ -11172,6 +9261,14 @@
                   </a:rPr>
                   <a:t>02</a:t>
                 </a:r>
+                <a:endParaRPr lang="en-US" sz="2400" b="1" dirty="0">
+                  <a:solidFill>
+                    <a:srgbClr val="FFFFFF"/>
+                  </a:solidFill>
+                  <a:latin typeface="+mn-lt"/>
+                  <a:ea typeface="+mn-ea"/>
+                  <a:cs typeface="+mn-cs"/>
+                </a:endParaRPr>
               </a:p>
             </p:txBody>
           </p:sp>
@@ -11412,6 +9509,14 @@
                   </a:rPr>
                   <a:t>碰撞与物理</a:t>
                 </a:r>
+                <a:endParaRPr lang="zh-CN" sz="2400" b="1" dirty="0">
+                  <a:solidFill>
+                    <a:schemeClr val="dk1"/>
+                  </a:solidFill>
+                  <a:latin typeface="+mn-lt"/>
+                  <a:ea typeface="+mn-ea"/>
+                  <a:cs typeface="+mn-cs"/>
+                </a:endParaRPr>
               </a:p>
             </p:txBody>
           </p:sp>
@@ -11452,6 +9557,14 @@
                   </a:rPr>
                   <a:t>Collider · Rigidbody · Trigger</a:t>
                 </a:r>
+                <a:endParaRPr lang="en-US" sz="1800" dirty="0">
+                  <a:solidFill>
+                    <a:schemeClr val="dk2"/>
+                  </a:solidFill>
+                  <a:latin typeface="+mn-lt"/>
+                  <a:ea typeface="+mn-ea"/>
+                  <a:cs typeface="+mn-cs"/>
+                </a:endParaRPr>
               </a:p>
             </p:txBody>
           </p:sp>
@@ -11492,6 +9605,14 @@
                   </a:rPr>
                   <a:t>明确“谁移动、谁阻挡、谁只负责检测”</a:t>
                 </a:r>
+                <a:endParaRPr lang="zh-CN" sz="1800" dirty="0">
+                  <a:solidFill>
+                    <a:schemeClr val="accent5"/>
+                  </a:solidFill>
+                  <a:latin typeface="+mn-lt"/>
+                  <a:ea typeface="+mn-ea"/>
+                  <a:cs typeface="+mn-cs"/>
+                </a:endParaRPr>
               </a:p>
             </p:txBody>
           </p:sp>
@@ -11569,6 +9690,14 @@
                   </a:rPr>
                   <a:t>03</a:t>
                 </a:r>
+                <a:endParaRPr lang="en-US" sz="2400" b="1" dirty="0">
+                  <a:solidFill>
+                    <a:srgbClr val="FFFFFF"/>
+                  </a:solidFill>
+                  <a:latin typeface="+mn-lt"/>
+                  <a:ea typeface="+mn-ea"/>
+                  <a:cs typeface="+mn-cs"/>
+                </a:endParaRPr>
               </a:p>
             </p:txBody>
           </p:sp>
@@ -11890,6 +10019,14 @@
                   </a:rPr>
                   <a:t>渲染与镜头</a:t>
                 </a:r>
+                <a:endParaRPr lang="zh-CN" sz="2400" b="1" dirty="0">
+                  <a:solidFill>
+                    <a:schemeClr val="dk1"/>
+                  </a:solidFill>
+                  <a:latin typeface="+mn-lt"/>
+                  <a:ea typeface="+mn-ea"/>
+                  <a:cs typeface="+mn-cs"/>
+                </a:endParaRPr>
               </a:p>
             </p:txBody>
           </p:sp>
@@ -11930,6 +10067,14 @@
                   </a:rPr>
                   <a:t>材质 · 灯光 · 相机 · RenderTexture</a:t>
                 </a:r>
+                <a:endParaRPr lang="zh-CN" sz="1800" dirty="0">
+                  <a:solidFill>
+                    <a:schemeClr val="dk2"/>
+                  </a:solidFill>
+                  <a:latin typeface="+mn-lt"/>
+                  <a:ea typeface="+mn-ea"/>
+                  <a:cs typeface="+mn-cs"/>
+                </a:endParaRPr>
               </a:p>
             </p:txBody>
           </p:sp>
@@ -11970,6 +10115,14 @@
                   </a:rPr>
                   <a:t>让场景“看得见”，也让画面“送得到”</a:t>
                 </a:r>
+                <a:endParaRPr lang="zh-CN" sz="1800" dirty="0">
+                  <a:solidFill>
+                    <a:schemeClr val="accent5"/>
+                  </a:solidFill>
+                  <a:latin typeface="+mn-lt"/>
+                  <a:ea typeface="+mn-ea"/>
+                  <a:cs typeface="+mn-cs"/>
+                </a:endParaRPr>
               </a:p>
             </p:txBody>
           </p:sp>
@@ -12047,6 +10200,14 @@
                   </a:rPr>
                   <a:t>04</a:t>
                 </a:r>
+                <a:endParaRPr lang="en-US" sz="2400" b="1" dirty="0">
+                  <a:solidFill>
+                    <a:srgbClr val="FFFFFF"/>
+                  </a:solidFill>
+                  <a:latin typeface="+mn-lt"/>
+                  <a:ea typeface="+mn-ea"/>
+                  <a:cs typeface="+mn-cs"/>
+                </a:endParaRPr>
               </a:p>
             </p:txBody>
           </p:sp>
@@ -12359,6 +10520,14 @@
                   </a:rPr>
                   <a:t>复用与打包</a:t>
                 </a:r>
+                <a:endParaRPr lang="zh-CN" sz="2400" b="1" dirty="0">
+                  <a:solidFill>
+                    <a:schemeClr val="dk1"/>
+                  </a:solidFill>
+                  <a:latin typeface="+mn-lt"/>
+                  <a:ea typeface="+mn-ea"/>
+                  <a:cs typeface="+mn-cs"/>
+                </a:endParaRPr>
               </a:p>
             </p:txBody>
           </p:sp>
@@ -12399,6 +10568,14 @@
                   </a:rPr>
                   <a:t>Prefab · PlayerRoot · Build Profiles</a:t>
                 </a:r>
+                <a:endParaRPr lang="en-US" sz="1800" dirty="0">
+                  <a:solidFill>
+                    <a:schemeClr val="dk2"/>
+                  </a:solidFill>
+                  <a:latin typeface="+mn-lt"/>
+                  <a:ea typeface="+mn-ea"/>
+                  <a:cs typeface="+mn-cs"/>
+                </a:endParaRPr>
               </a:p>
             </p:txBody>
           </p:sp>
@@ -12439,6 +10616,14 @@
                   </a:rPr>
                   <a:t>把可复用对象整理成稳定、可交付的工程</a:t>
                 </a:r>
+                <a:endParaRPr lang="zh-CN" sz="1800" dirty="0">
+                  <a:solidFill>
+                    <a:schemeClr val="accent5"/>
+                  </a:solidFill>
+                  <a:latin typeface="+mn-lt"/>
+                  <a:ea typeface="+mn-ea"/>
+                  <a:cs typeface="+mn-cs"/>
+                </a:endParaRPr>
               </a:p>
             </p:txBody>
           </p:sp>
@@ -12496,46 +10681,6 @@
         </p:sp>
         <p:sp>
           <p:nvSpPr>
-            <p:cNvPr id="65" name="TextBox 65"/>
-            <p:cNvSpPr txBox="1"/>
-            <p:nvPr/>
-          </p:nvSpPr>
-          <p:spPr>
-            <a:xfrm>
-              <a:off x="564642" y="6521768"/>
-              <a:ext cx="1842470" cy="264033"/>
-            </a:xfrm>
-            <a:prstGeom prst="rect">
-              <a:avLst/>
-            </a:prstGeom>
-            <a:noFill/>
-            <a:ln>
-              <a:noFill/>
-            </a:ln>
-          </p:spPr>
-          <p:txBody>
-            <a:bodyPr wrap="none" lIns="0" tIns="0" rIns="0" bIns="0" anchor="t" anchorCtr="0">
-              <a:spAutoFit/>
-            </a:bodyPr>
-            <a:lstStyle/>
-            <a:p>
-              <a:pPr algn="l"/>
-              <a:r>
-                <a:rPr lang="zh-CN" sz="1350" dirty="0">
-                  <a:solidFill>
-                    <a:schemeClr val="accent5"/>
-                  </a:solidFill>
-                  <a:latin typeface="+mn-lt"/>
-                  <a:ea typeface="+mn-ea"/>
-                  <a:cs typeface="+mn-cs"/>
-                </a:rPr>
-                <a:t>Unity 基础 · 学习路线</a:t>
-              </a:r>
-            </a:p>
-          </p:txBody>
-        </p:sp>
-        <p:sp>
-          <p:nvSpPr>
             <p:cNvPr id="66" name="TextBox 66"/>
             <p:cNvSpPr txBox="1"/>
             <p:nvPr/>
@@ -12571,6 +10716,14 @@
                 </a:rPr>
                 <a:t>02</a:t>
               </a:r>
+              <a:endParaRPr lang="en-US" sz="1350" dirty="0">
+                <a:solidFill>
+                  <a:schemeClr val="accent5"/>
+                </a:solidFill>
+                <a:latin typeface="+mn-lt"/>
+                <a:ea typeface="+mn-ea"/>
+                <a:cs typeface="+mn-cs"/>
+              </a:endParaRPr>
             </a:p>
           </p:txBody>
         </p:sp>
@@ -12580,9 +10733,18 @@
   <p:clrMapOvr>
     <a:masterClrMapping/>
   </p:clrMapOvr>
-  <p:transition xmlns:p14="http://schemas.microsoft.com/office/powerpoint/2010/main" p14:dur="400">
-    <p:fade/>
-  </p:transition>
+  <mc:AlternateContent xmlns:mc="http://schemas.openxmlformats.org/markup-compatibility/2006">
+    <mc:Choice xmlns:p14="http://schemas.microsoft.com/office/powerpoint/2010/main" Requires="p14">
+      <p:transition p14:dur="400">
+        <p:fade/>
+      </p:transition>
+    </mc:Choice>
+    <mc:Fallback>
+      <p:transition>
+        <p:fade/>
+      </p:transition>
+    </mc:Fallback>
+  </mc:AlternateContent>
 </p:sld>
 </file>
 
@@ -12640,6 +10802,14 @@
               </a:rPr>
               <a:t>Unity 的基本语法：对象是容器，组件给能力</a:t>
             </a:r>
+            <a:endParaRPr lang="zh-CN" sz="4200" b="1" dirty="0">
+              <a:solidFill>
+                <a:schemeClr val="dk1"/>
+              </a:solidFill>
+              <a:latin typeface="+mj-lt"/>
+              <a:ea typeface="+mj-ea"/>
+              <a:cs typeface="+mj-cs"/>
+            </a:endParaRPr>
           </a:p>
         </p:txBody>
       </p:sp>
@@ -12680,6 +10850,14 @@
               </a:rPr>
               <a:t>场景负责组织对象，对象通过组合组件获得行为</a:t>
             </a:r>
+            <a:endParaRPr lang="zh-CN" sz="1800" dirty="0">
+              <a:solidFill>
+                <a:schemeClr val="dk2"/>
+              </a:solidFill>
+              <a:latin typeface="+mn-lt"/>
+              <a:ea typeface="+mn-ea"/>
+              <a:cs typeface="+mn-cs"/>
+            </a:endParaRPr>
           </a:p>
         </p:txBody>
       </p:sp>
@@ -13493,6 +11671,14 @@
               </a:rPr>
               <a:t>Scene 场景</a:t>
             </a:r>
+            <a:endParaRPr lang="zh-CN" sz="2400" b="1" dirty="0">
+              <a:solidFill>
+                <a:srgbClr val="FFFFFF"/>
+              </a:solidFill>
+              <a:latin typeface="+mn-lt"/>
+              <a:ea typeface="+mn-ea"/>
+              <a:cs typeface="+mn-cs"/>
+            </a:endParaRPr>
           </a:p>
         </p:txBody>
       </p:sp>
@@ -13558,7 +11744,7 @@
             </p:nvSpPr>
             <p:spPr>
               <a:xfrm>
-                <a:off x="895350" y="2914650"/>
+                <a:off x="895350" y="2933700"/>
                 <a:ext cx="3238500" cy="704850"/>
               </a:xfrm>
               <a:prstGeom prst="roundRect">
@@ -13815,6 +12001,14 @@
                   </a:rPr>
                   <a:t>Environment</a:t>
                 </a:r>
+                <a:endParaRPr lang="en-US" sz="2400" b="1" dirty="0">
+                  <a:solidFill>
+                    <a:schemeClr val="accent1"/>
+                  </a:solidFill>
+                  <a:latin typeface="+mn-lt"/>
+                  <a:ea typeface="+mn-ea"/>
+                  <a:cs typeface="+mn-cs"/>
+                </a:endParaRPr>
               </a:p>
             </p:txBody>
           </p:sp>
@@ -13855,6 +12049,14 @@
                   </a:rPr>
                   <a:t>地面 · 墙体 · 道具</a:t>
                 </a:r>
+                <a:endParaRPr lang="zh-CN" sz="1800" dirty="0">
+                  <a:solidFill>
+                    <a:schemeClr val="dk2"/>
+                  </a:solidFill>
+                  <a:latin typeface="+mn-lt"/>
+                  <a:ea typeface="+mn-ea"/>
+                  <a:cs typeface="+mn-cs"/>
+                </a:endParaRPr>
               </a:p>
             </p:txBody>
           </p:sp>
@@ -13895,6 +12097,14 @@
                   </a:rPr>
                   <a:t>灯光 · 天空盒</a:t>
                 </a:r>
+                <a:endParaRPr lang="zh-CN" sz="1800" dirty="0">
+                  <a:solidFill>
+                    <a:schemeClr val="dk2"/>
+                  </a:solidFill>
+                  <a:latin typeface="+mn-lt"/>
+                  <a:ea typeface="+mn-ea"/>
+                  <a:cs typeface="+mn-cs"/>
+                </a:endParaRPr>
               </a:p>
             </p:txBody>
           </p:sp>
@@ -13973,6 +12183,14 @@
                   </a:rPr>
                   <a:t>负责构成世界</a:t>
                 </a:r>
+                <a:endParaRPr lang="zh-CN" sz="1800" b="1" dirty="0">
+                  <a:solidFill>
+                    <a:schemeClr val="dk1"/>
+                  </a:solidFill>
+                  <a:latin typeface="+mn-lt"/>
+                  <a:ea typeface="+mn-ea"/>
+                  <a:cs typeface="+mn-cs"/>
+                </a:endParaRPr>
               </a:p>
             </p:txBody>
           </p:sp>
@@ -14016,6 +12234,12 @@
                 </a:solidFill>
               </a:ln>
             </p:spPr>
+            <p:txBody>
+              <a:bodyPr/>
+              <a:p>
+                <a:endParaRPr lang="zh-CN" altLang="en-US"/>
+              </a:p>
+            </p:txBody>
           </p:sp>
           <p:sp>
             <p:nvSpPr>
@@ -14025,7 +12249,7 @@
             </p:nvSpPr>
             <p:spPr>
               <a:xfrm>
-                <a:off x="4476750" y="2914650"/>
+                <a:off x="4476750" y="2940050"/>
                 <a:ext cx="3238500" cy="704850"/>
               </a:xfrm>
               <a:prstGeom prst="roundRect">
@@ -14269,6 +12493,14 @@
                   </a:rPr>
                   <a:t>Player</a:t>
                 </a:r>
+                <a:endParaRPr lang="en-US" sz="2400" b="1" dirty="0">
+                  <a:solidFill>
+                    <a:srgbClr val="2F8F6A"/>
+                  </a:solidFill>
+                  <a:latin typeface="+mn-lt"/>
+                  <a:ea typeface="+mn-ea"/>
+                  <a:cs typeface="+mn-cs"/>
+                </a:endParaRPr>
               </a:p>
             </p:txBody>
           </p:sp>
@@ -14442,6 +12674,14 @@
                     </a:rPr>
                     <a:t>Transform</a:t>
                   </a:r>
+                  <a:endParaRPr lang="en-US" sz="1800" b="1" dirty="0">
+                    <a:solidFill>
+                      <a:schemeClr val="dk1"/>
+                    </a:solidFill>
+                    <a:latin typeface="+mn-lt"/>
+                    <a:ea typeface="+mn-ea"/>
+                    <a:cs typeface="+mn-cs"/>
+                  </a:endParaRPr>
                 </a:p>
               </p:txBody>
             </p:sp>
@@ -14482,6 +12722,14 @@
                     </a:rPr>
                     <a:t>Collider</a:t>
                   </a:r>
+                  <a:endParaRPr lang="en-US" sz="1800" b="1" dirty="0">
+                    <a:solidFill>
+                      <a:schemeClr val="dk1"/>
+                    </a:solidFill>
+                    <a:latin typeface="+mn-lt"/>
+                    <a:ea typeface="+mn-ea"/>
+                    <a:cs typeface="+mn-cs"/>
+                  </a:endParaRPr>
                 </a:p>
               </p:txBody>
             </p:sp>
@@ -14522,6 +12770,14 @@
                     </a:rPr>
                     <a:t>Renderer</a:t>
                   </a:r>
+                  <a:endParaRPr lang="en-US" sz="1800" b="1" dirty="0">
+                    <a:solidFill>
+                      <a:schemeClr val="dk1"/>
+                    </a:solidFill>
+                    <a:latin typeface="+mn-lt"/>
+                    <a:ea typeface="+mn-ea"/>
+                    <a:cs typeface="+mn-cs"/>
+                  </a:endParaRPr>
                 </a:p>
               </p:txBody>
             </p:sp>
@@ -14562,6 +12818,14 @@
                     </a:rPr>
                     <a:t>Script</a:t>
                   </a:r>
+                  <a:endParaRPr lang="en-US" sz="1800" b="1" dirty="0">
+                    <a:solidFill>
+                      <a:schemeClr val="dk1"/>
+                    </a:solidFill>
+                    <a:latin typeface="+mn-lt"/>
+                    <a:ea typeface="+mn-ea"/>
+                    <a:cs typeface="+mn-cs"/>
+                  </a:endParaRPr>
                 </a:p>
               </p:txBody>
             </p:sp>
@@ -14603,6 +12867,14 @@
                   </a:rPr>
                   <a:t>能力来自组件组合</a:t>
                 </a:r>
+                <a:endParaRPr lang="zh-CN" sz="1800" dirty="0">
+                  <a:solidFill>
+                    <a:schemeClr val="dk2"/>
+                  </a:solidFill>
+                  <a:latin typeface="+mn-lt"/>
+                  <a:ea typeface="+mn-ea"/>
+                  <a:cs typeface="+mn-cs"/>
+                </a:endParaRPr>
               </a:p>
             </p:txBody>
           </p:sp>
@@ -14655,7 +12927,7 @@
             </p:nvSpPr>
             <p:spPr>
               <a:xfrm>
-                <a:off x="8058150" y="2914650"/>
+                <a:off x="8058150" y="2933700"/>
                 <a:ext cx="3238500" cy="704850"/>
               </a:xfrm>
               <a:prstGeom prst="roundRect">
@@ -14867,6 +13139,14 @@
                   </a:rPr>
                   <a:t>Camera</a:t>
                 </a:r>
+                <a:endParaRPr lang="en-US" sz="2400" b="1" dirty="0">
+                  <a:solidFill>
+                    <a:srgbClr val="8C5A00"/>
+                  </a:solidFill>
+                  <a:latin typeface="+mn-lt"/>
+                  <a:ea typeface="+mn-ea"/>
+                  <a:cs typeface="+mn-cs"/>
+                </a:endParaRPr>
               </a:p>
             </p:txBody>
           </p:sp>
@@ -14907,6 +13187,14 @@
                   </a:rPr>
                   <a:t>位置与朝向</a:t>
                 </a:r>
+                <a:endParaRPr lang="zh-CN" sz="1800" dirty="0">
+                  <a:solidFill>
+                    <a:schemeClr val="dk2"/>
+                  </a:solidFill>
+                  <a:latin typeface="+mn-lt"/>
+                  <a:ea typeface="+mn-ea"/>
+                  <a:cs typeface="+mn-cs"/>
+                </a:endParaRPr>
               </a:p>
             </p:txBody>
           </p:sp>
@@ -14947,6 +13235,14 @@
                   </a:rPr>
                   <a:t>视野与裁剪面</a:t>
                 </a:r>
+                <a:endParaRPr lang="zh-CN" sz="1800" dirty="0">
+                  <a:solidFill>
+                    <a:schemeClr val="dk2"/>
+                  </a:solidFill>
+                  <a:latin typeface="+mn-lt"/>
+                  <a:ea typeface="+mn-ea"/>
+                  <a:cs typeface="+mn-cs"/>
+                </a:endParaRPr>
               </a:p>
             </p:txBody>
           </p:sp>
@@ -15025,6 +13321,14 @@
                   </a:rPr>
                   <a:t>决定玩家看见什么</a:t>
                 </a:r>
+                <a:endParaRPr lang="zh-CN" sz="1800" b="1" dirty="0">
+                  <a:solidFill>
+                    <a:schemeClr val="dk1"/>
+                  </a:solidFill>
+                  <a:latin typeface="+mn-lt"/>
+                  <a:ea typeface="+mn-ea"/>
+                  <a:cs typeface="+mn-cs"/>
+                </a:endParaRPr>
               </a:p>
             </p:txBody>
           </p:sp>
@@ -15082,46 +13386,6 @@
         </p:sp>
         <p:sp>
           <p:nvSpPr>
-            <p:cNvPr id="71" name="TextBox 71"/>
-            <p:cNvSpPr txBox="1"/>
-            <p:nvPr/>
-          </p:nvSpPr>
-          <p:spPr>
-            <a:xfrm>
-              <a:off x="564642" y="6521768"/>
-              <a:ext cx="2921422" cy="264033"/>
-            </a:xfrm>
-            <a:prstGeom prst="rect">
-              <a:avLst/>
-            </a:prstGeom>
-            <a:noFill/>
-            <a:ln>
-              <a:noFill/>
-            </a:ln>
-          </p:spPr>
-          <p:txBody>
-            <a:bodyPr wrap="none" lIns="0" tIns="0" rIns="0" bIns="0" anchor="t" anchorCtr="0">
-              <a:spAutoFit/>
-            </a:bodyPr>
-            <a:lstStyle/>
-            <a:p>
-              <a:pPr algn="l"/>
-              <a:r>
-                <a:rPr lang="en-US" sz="1350" dirty="0">
-                  <a:solidFill>
-                    <a:schemeClr val="accent5"/>
-                  </a:solidFill>
-                  <a:latin typeface="+mn-lt"/>
-                  <a:ea typeface="+mn-ea"/>
-                  <a:cs typeface="+mn-cs"/>
-                </a:rPr>
-                <a:t>Scene → GameObject → Component</a:t>
-              </a:r>
-            </a:p>
-          </p:txBody>
-        </p:sp>
-        <p:sp>
-          <p:nvSpPr>
             <p:cNvPr id="72" name="TextBox 72"/>
             <p:cNvSpPr txBox="1"/>
             <p:nvPr/>
@@ -15157,6 +13421,14 @@
                 </a:rPr>
                 <a:t>03</a:t>
               </a:r>
+              <a:endParaRPr lang="en-US" sz="1350" dirty="0">
+                <a:solidFill>
+                  <a:schemeClr val="accent5"/>
+                </a:solidFill>
+                <a:latin typeface="+mn-lt"/>
+                <a:ea typeface="+mn-ea"/>
+                <a:cs typeface="+mn-cs"/>
+              </a:endParaRPr>
             </a:p>
           </p:txBody>
         </p:sp>
@@ -15166,9 +13438,18 @@
   <p:clrMapOvr>
     <a:masterClrMapping/>
   </p:clrMapOvr>
-  <p:transition xmlns:p14="http://schemas.microsoft.com/office/powerpoint/2010/main" p14:dur="400">
-    <p:fade/>
-  </p:transition>
+  <mc:AlternateContent xmlns:mc="http://schemas.openxmlformats.org/markup-compatibility/2006">
+    <mc:Choice xmlns:p14="http://schemas.microsoft.com/office/powerpoint/2010/main" Requires="p14">
+      <p:transition p14:dur="400">
+        <p:fade/>
+      </p:transition>
+    </mc:Choice>
+    <mc:Fallback>
+      <p:transition>
+        <p:fade/>
+      </p:transition>
+    </mc:Fallback>
+  </mc:AlternateContent>
 </p:sld>
 </file>
 
@@ -15226,6 +13507,14 @@
               </a:rPr>
               <a:t>Transform：位置、旋转、缩放，以及父子关系</a:t>
             </a:r>
+            <a:endParaRPr lang="zh-CN" sz="4200" b="1" dirty="0">
+              <a:solidFill>
+                <a:schemeClr val="dk1"/>
+              </a:solidFill>
+              <a:latin typeface="+mj-lt"/>
+              <a:ea typeface="+mj-ea"/>
+              <a:cs typeface="+mj-cs"/>
+            </a:endParaRPr>
           </a:p>
         </p:txBody>
       </p:sp>
@@ -15266,6 +13555,14 @@
               </a:rPr>
               <a:t>每个 GameObject 都有 Transform；子物体会继承父物体的空间变化</a:t>
             </a:r>
+            <a:endParaRPr lang="zh-CN" sz="1800" dirty="0">
+              <a:solidFill>
+                <a:schemeClr val="dk2"/>
+              </a:solidFill>
+              <a:latin typeface="+mn-lt"/>
+              <a:ea typeface="+mn-ea"/>
+              <a:cs typeface="+mn-cs"/>
+            </a:endParaRPr>
           </a:p>
         </p:txBody>
       </p:sp>
@@ -15346,6 +13643,14 @@
                 </a:rPr>
                 <a:t>空间坐标系</a:t>
               </a:r>
+              <a:endParaRPr lang="zh-CN" sz="2700" b="1" dirty="0">
+                <a:solidFill>
+                  <a:schemeClr val="accent1"/>
+                </a:solidFill>
+                <a:latin typeface="+mn-lt"/>
+                <a:ea typeface="+mn-ea"/>
+                <a:cs typeface="+mn-cs"/>
+              </a:endParaRPr>
             </a:p>
           </p:txBody>
         </p:sp>
@@ -15357,10 +13662,10 @@
           </p:nvGrpSpPr>
           <p:grpSpPr>
             <a:xfrm>
-              <a:off x="1448181" y="1939290"/>
-              <a:ext cx="2626081" cy="2761869"/>
-              <a:chOff x="1448181" y="1939290"/>
-              <a:chExt cx="2626081" cy="2761869"/>
+              <a:off x="1858056" y="2263167"/>
+              <a:ext cx="1697956" cy="1898242"/>
+              <a:chOff x="1858056" y="2263167"/>
+              <a:chExt cx="1697956" cy="1898242"/>
             </a:xfrm>
           </p:grpSpPr>
           <p:sp>
@@ -15371,7 +13676,7 @@
             </p:nvSpPr>
             <p:spPr>
               <a:xfrm>
-                <a:off x="2543175" y="3514725"/>
+                <a:off x="1926988" y="3908425"/>
                 <a:ext cx="1143000" cy="9525"/>
               </a:xfrm>
               <a:custGeom>
@@ -15407,7 +13712,7 @@
             </p:nvSpPr>
             <p:spPr>
               <a:xfrm>
-                <a:off x="3533775" y="3400425"/>
+                <a:off x="2979646" y="3794125"/>
                 <a:ext cx="190500" cy="228600"/>
               </a:xfrm>
               <a:custGeom>
@@ -15447,7 +13752,7 @@
             </p:nvSpPr>
             <p:spPr>
               <a:xfrm>
-                <a:off x="2543175" y="2371725"/>
+                <a:off x="2066688" y="2765425"/>
                 <a:ext cx="9525" cy="1143000"/>
               </a:xfrm>
               <a:custGeom>
@@ -15483,7 +13788,7 @@
             </p:nvSpPr>
             <p:spPr>
               <a:xfrm>
-                <a:off x="2428875" y="2333625"/>
+                <a:off x="1948649" y="2727325"/>
                 <a:ext cx="228600" cy="190500"/>
               </a:xfrm>
               <a:custGeom>
@@ -15523,7 +13828,7 @@
             </p:nvSpPr>
             <p:spPr>
               <a:xfrm>
-                <a:off x="1762125" y="3514725"/>
+                <a:off x="1990448" y="3279775"/>
                 <a:ext cx="781050" cy="742950"/>
               </a:xfrm>
               <a:custGeom>
@@ -15558,8 +13863,8 @@
               <p:nvPr/>
             </p:nvSpPr>
             <p:spPr>
-              <a:xfrm>
-                <a:off x="1724025" y="4029075"/>
+              <a:xfrm rot="10800000">
+                <a:off x="2597150" y="3203575"/>
                 <a:ext cx="266700" cy="266700"/>
               </a:xfrm>
               <a:custGeom>
@@ -15590,6 +13895,12 @@
                 <a:round/>
               </a:ln>
             </p:spPr>
+            <p:txBody>
+              <a:bodyPr/>
+              <a:p>
+                <a:endParaRPr lang="zh-CN" altLang="en-US"/>
+              </a:p>
+            </p:txBody>
           </p:sp>
           <p:sp>
             <p:nvSpPr>
@@ -15599,7 +13910,7 @@
             </p:nvSpPr>
             <p:spPr>
               <a:xfrm>
-                <a:off x="2333625" y="3305175"/>
+                <a:off x="1858056" y="3698875"/>
                 <a:ext cx="419100" cy="419100"/>
               </a:xfrm>
               <a:prstGeom prst="ellipse">
@@ -15623,7 +13934,7 @@
             </p:nvSpPr>
             <p:spPr>
               <a:xfrm>
-                <a:off x="3915156" y="3415665"/>
+                <a:off x="3396906" y="3809365"/>
                 <a:ext cx="159106" cy="352044"/>
               </a:xfrm>
               <a:prstGeom prst="rect">
@@ -15646,12 +13957,20 @@
                     <a:solidFill>
                       <a:srgbClr val="D85C45"/>
                     </a:solidFill>
-                    <a:latin typeface="Consolas"/>
-                    <a:ea typeface="Consolas"/>
-                    <a:cs typeface="Consolas"/>
+                    <a:latin typeface="Consolas" panose="020B0609020204030204"/>
+                    <a:ea typeface="Consolas" panose="020B0609020204030204"/>
+                    <a:cs typeface="Consolas" panose="020B0609020204030204"/>
                   </a:rPr>
                   <a:t>X</a:t>
                 </a:r>
+                <a:endParaRPr lang="en-US" sz="1800" dirty="0">
+                  <a:solidFill>
+                    <a:srgbClr val="D85C45"/>
+                  </a:solidFill>
+                  <a:latin typeface="Consolas" panose="020B0609020204030204"/>
+                  <a:ea typeface="Consolas" panose="020B0609020204030204"/>
+                  <a:cs typeface="Consolas" panose="020B0609020204030204"/>
+                </a:endParaRPr>
               </a:p>
             </p:txBody>
           </p:sp>
@@ -15663,7 +13982,7 @@
             </p:nvSpPr>
             <p:spPr>
               <a:xfrm>
-                <a:off x="2457831" y="1939290"/>
+                <a:off x="2172081" y="2263167"/>
                 <a:ext cx="159106" cy="352044"/>
               </a:xfrm>
               <a:prstGeom prst="rect">
@@ -15686,12 +14005,20 @@
                     <a:solidFill>
                       <a:srgbClr val="2F8F6A"/>
                     </a:solidFill>
-                    <a:latin typeface="Consolas"/>
-                    <a:ea typeface="Consolas"/>
-                    <a:cs typeface="Consolas"/>
+                    <a:latin typeface="Consolas" panose="020B0609020204030204"/>
+                    <a:ea typeface="Consolas" panose="020B0609020204030204"/>
+                    <a:cs typeface="Consolas" panose="020B0609020204030204"/>
                   </a:rPr>
                   <a:t>Y</a:t>
                 </a:r>
+                <a:endParaRPr lang="en-US" sz="1800" dirty="0">
+                  <a:solidFill>
+                    <a:srgbClr val="2F8F6A"/>
+                  </a:solidFill>
+                  <a:latin typeface="Consolas" panose="020B0609020204030204"/>
+                  <a:ea typeface="Consolas" panose="020B0609020204030204"/>
+                  <a:cs typeface="Consolas" panose="020B0609020204030204"/>
+                </a:endParaRPr>
               </a:p>
             </p:txBody>
           </p:sp>
@@ -15703,7 +14030,7 @@
             </p:nvSpPr>
             <p:spPr>
               <a:xfrm>
-                <a:off x="1448181" y="4349115"/>
+                <a:off x="2910586" y="3118485"/>
                 <a:ext cx="159106" cy="352044"/>
               </a:xfrm>
               <a:prstGeom prst="rect">
@@ -15726,12 +14053,20 @@
                     <a:solidFill>
                       <a:schemeClr val="accent1"/>
                     </a:solidFill>
-                    <a:latin typeface="Consolas"/>
-                    <a:ea typeface="Consolas"/>
-                    <a:cs typeface="Consolas"/>
+                    <a:latin typeface="Consolas" panose="020B0609020204030204"/>
+                    <a:ea typeface="Consolas" panose="020B0609020204030204"/>
+                    <a:cs typeface="Consolas" panose="020B0609020204030204"/>
                   </a:rPr>
                   <a:t>Z</a:t>
                 </a:r>
+                <a:endParaRPr lang="en-US" sz="1800" dirty="0">
+                  <a:solidFill>
+                    <a:schemeClr val="accent1"/>
+                  </a:solidFill>
+                  <a:latin typeface="Consolas" panose="020B0609020204030204"/>
+                  <a:ea typeface="Consolas" panose="020B0609020204030204"/>
+                  <a:cs typeface="Consolas" panose="020B0609020204030204"/>
+                </a:endParaRPr>
               </a:p>
             </p:txBody>
           </p:sp>
@@ -15797,6 +14132,14 @@
                 </a:rPr>
                 <a:t>本地坐标 ≠ 世界坐标</a:t>
               </a:r>
+              <a:endParaRPr lang="zh-CN" sz="1800" dirty="0">
+                <a:solidFill>
+                  <a:schemeClr val="dk2"/>
+                </a:solidFill>
+                <a:latin typeface="+mn-lt"/>
+                <a:ea typeface="+mn-ea"/>
+                <a:cs typeface="+mn-cs"/>
+              </a:endParaRPr>
             </a:p>
           </p:txBody>
         </p:sp>
@@ -16119,6 +14462,14 @@
                   </a:rPr>
                   <a:t>Position</a:t>
                 </a:r>
+                <a:endParaRPr lang="en-US" sz="2400" b="1" dirty="0">
+                  <a:solidFill>
+                    <a:schemeClr val="dk1"/>
+                  </a:solidFill>
+                  <a:latin typeface="+mn-lt"/>
+                  <a:ea typeface="+mn-ea"/>
+                  <a:cs typeface="+mn-cs"/>
+                </a:endParaRPr>
               </a:p>
             </p:txBody>
           </p:sp>
@@ -16159,6 +14510,14 @@
                   </a:rPr>
                   <a:t>在哪里</a:t>
                 </a:r>
+                <a:endParaRPr lang="zh-CN" sz="1800" dirty="0">
+                  <a:solidFill>
+                    <a:schemeClr val="dk2"/>
+                  </a:solidFill>
+                  <a:latin typeface="+mn-lt"/>
+                  <a:ea typeface="+mn-ea"/>
+                  <a:cs typeface="+mn-cs"/>
+                </a:endParaRPr>
               </a:p>
             </p:txBody>
           </p:sp>
@@ -16318,6 +14677,14 @@
                   </a:rPr>
                   <a:t>Rotation</a:t>
                 </a:r>
+                <a:endParaRPr lang="en-US" sz="2400" b="1" dirty="0">
+                  <a:solidFill>
+                    <a:schemeClr val="dk1"/>
+                  </a:solidFill>
+                  <a:latin typeface="+mn-lt"/>
+                  <a:ea typeface="+mn-ea"/>
+                  <a:cs typeface="+mn-cs"/>
+                </a:endParaRPr>
               </a:p>
             </p:txBody>
           </p:sp>
@@ -16358,6 +14725,14 @@
                   </a:rPr>
                   <a:t>朝向哪里</a:t>
                 </a:r>
+                <a:endParaRPr lang="zh-CN" sz="1800" dirty="0">
+                  <a:solidFill>
+                    <a:schemeClr val="dk2"/>
+                  </a:solidFill>
+                  <a:latin typeface="+mn-lt"/>
+                  <a:ea typeface="+mn-ea"/>
+                  <a:cs typeface="+mn-cs"/>
+                </a:endParaRPr>
               </a:p>
             </p:txBody>
           </p:sp>
@@ -16519,6 +14894,14 @@
                   </a:rPr>
                   <a:t>Scale</a:t>
                 </a:r>
+                <a:endParaRPr lang="en-US" sz="2400" b="1" dirty="0">
+                  <a:solidFill>
+                    <a:schemeClr val="dk1"/>
+                  </a:solidFill>
+                  <a:latin typeface="+mn-lt"/>
+                  <a:ea typeface="+mn-ea"/>
+                  <a:cs typeface="+mn-cs"/>
+                </a:endParaRPr>
               </a:p>
             </p:txBody>
           </p:sp>
@@ -16559,6 +14942,14 @@
                   </a:rPr>
                   <a:t>有多大</a:t>
                 </a:r>
+                <a:endParaRPr lang="zh-CN" sz="1800" dirty="0">
+                  <a:solidFill>
+                    <a:schemeClr val="dk2"/>
+                  </a:solidFill>
+                  <a:latin typeface="+mn-lt"/>
+                  <a:ea typeface="+mn-ea"/>
+                  <a:cs typeface="+mn-cs"/>
+                </a:endParaRPr>
               </a:p>
             </p:txBody>
           </p:sp>
@@ -16626,6 +15017,14 @@
                 </a:rPr>
                 <a:t>父子层级：一起移动，分别控制</a:t>
               </a:r>
+              <a:endParaRPr lang="zh-CN" sz="2700" b="1" dirty="0">
+                <a:solidFill>
+                  <a:schemeClr val="dk1"/>
+                </a:solidFill>
+                <a:latin typeface="+mn-lt"/>
+                <a:ea typeface="+mn-ea"/>
+                <a:cs typeface="+mn-cs"/>
+              </a:endParaRPr>
             </a:p>
           </p:txBody>
         </p:sp>
@@ -16849,6 +15248,14 @@
                 </a:rPr>
                 <a:t>PlayerRoot</a:t>
               </a:r>
+              <a:endParaRPr lang="en-US" sz="1800" b="1" dirty="0">
+                <a:solidFill>
+                  <a:srgbClr val="FFFFFF"/>
+                </a:solidFill>
+                <a:latin typeface="+mn-lt"/>
+                <a:ea typeface="+mn-ea"/>
+                <a:cs typeface="+mn-cs"/>
+              </a:endParaRPr>
             </a:p>
           </p:txBody>
         </p:sp>
@@ -16915,6 +15322,14 @@
                 </a:rPr>
                 <a:t>Visual</a:t>
               </a:r>
+              <a:endParaRPr lang="en-US" sz="1800" dirty="0">
+                <a:solidFill>
+                  <a:srgbClr val="2F8F6A"/>
+                </a:solidFill>
+                <a:latin typeface="+mn-lt"/>
+                <a:ea typeface="+mn-ea"/>
+                <a:cs typeface="+mn-cs"/>
+              </a:endParaRPr>
             </a:p>
           </p:txBody>
         </p:sp>
@@ -16981,6 +15396,14 @@
                 </a:rPr>
                 <a:t>CameraPivot</a:t>
               </a:r>
+              <a:endParaRPr lang="en-US" sz="1800" dirty="0">
+                <a:solidFill>
+                  <a:srgbClr val="8C5A00"/>
+                </a:solidFill>
+                <a:latin typeface="+mn-lt"/>
+                <a:ea typeface="+mn-ea"/>
+                <a:cs typeface="+mn-cs"/>
+              </a:endParaRPr>
             </a:p>
           </p:txBody>
         </p:sp>
@@ -17037,46 +15460,6 @@
         </p:sp>
         <p:sp>
           <p:nvSpPr>
-            <p:cNvPr id="56" name="TextBox 56"/>
-            <p:cNvSpPr txBox="1"/>
-            <p:nvPr/>
-          </p:nvSpPr>
-          <p:spPr>
-            <a:xfrm>
-              <a:off x="564642" y="6521768"/>
-              <a:ext cx="2893905" cy="264033"/>
-            </a:xfrm>
-            <a:prstGeom prst="rect">
-              <a:avLst/>
-            </a:prstGeom>
-            <a:noFill/>
-            <a:ln>
-              <a:noFill/>
-            </a:ln>
-          </p:spPr>
-          <p:txBody>
-            <a:bodyPr wrap="none" lIns="0" tIns="0" rIns="0" bIns="0" anchor="t" anchorCtr="0">
-              <a:spAutoFit/>
-            </a:bodyPr>
-            <a:lstStyle/>
-            <a:p>
-              <a:pPr algn="l"/>
-              <a:r>
-                <a:rPr lang="en-US" sz="1350" dirty="0">
-                  <a:solidFill>
-                    <a:schemeClr val="accent5"/>
-                  </a:solidFill>
-                  <a:latin typeface="+mn-lt"/>
-                  <a:ea typeface="+mn-ea"/>
-                  <a:cs typeface="+mn-cs"/>
-                </a:rPr>
-                <a:t>Transform · Local / World Space</a:t>
-              </a:r>
-            </a:p>
-          </p:txBody>
-        </p:sp>
-        <p:sp>
-          <p:nvSpPr>
             <p:cNvPr id="57" name="TextBox 57"/>
             <p:cNvSpPr txBox="1"/>
             <p:nvPr/>
@@ -17112,6 +15495,14 @@
                 </a:rPr>
                 <a:t>04</a:t>
               </a:r>
+              <a:endParaRPr lang="en-US" sz="1350" dirty="0">
+                <a:solidFill>
+                  <a:schemeClr val="accent5"/>
+                </a:solidFill>
+                <a:latin typeface="+mn-lt"/>
+                <a:ea typeface="+mn-ea"/>
+                <a:cs typeface="+mn-cs"/>
+              </a:endParaRPr>
             </a:p>
           </p:txBody>
         </p:sp>
@@ -17121,9 +15512,18 @@
   <p:clrMapOvr>
     <a:masterClrMapping/>
   </p:clrMapOvr>
-  <p:transition xmlns:p14="http://schemas.microsoft.com/office/powerpoint/2010/main" p14:dur="400">
-    <p:fade/>
-  </p:transition>
+  <mc:AlternateContent xmlns:mc="http://schemas.openxmlformats.org/markup-compatibility/2006">
+    <mc:Choice xmlns:p14="http://schemas.microsoft.com/office/powerpoint/2010/main" Requires="p14">
+      <p:transition p14:dur="400">
+        <p:fade/>
+      </p:transition>
+    </mc:Choice>
+    <mc:Fallback>
+      <p:transition>
+        <p:fade/>
+      </p:transition>
+    </mc:Fallback>
+  </mc:AlternateContent>
 </p:sld>
 </file>
 
@@ -17181,6 +15581,14 @@
               </a:rPr>
               <a:t>Collider 选型：先选简单形状，再考虑精确贴合</a:t>
             </a:r>
+            <a:endParaRPr lang="zh-CN" sz="4200" b="1" dirty="0">
+              <a:solidFill>
+                <a:schemeClr val="dk1"/>
+              </a:solidFill>
+              <a:latin typeface="+mj-lt"/>
+              <a:ea typeface="+mj-ea"/>
+              <a:cs typeface="+mj-cs"/>
+            </a:endParaRPr>
           </a:p>
         </p:txBody>
       </p:sp>
@@ -17221,6 +15629,14 @@
               </a:rPr>
               <a:t>碰撞体定义物理边界；它可以和可见模型完全不同</a:t>
             </a:r>
+            <a:endParaRPr lang="zh-CN" sz="1800" dirty="0">
+              <a:solidFill>
+                <a:schemeClr val="dk2"/>
+              </a:solidFill>
+              <a:latin typeface="+mn-lt"/>
+              <a:ea typeface="+mn-ea"/>
+              <a:cs typeface="+mn-cs"/>
+            </a:endParaRPr>
           </a:p>
         </p:txBody>
       </p:sp>
@@ -17489,6 +15905,14 @@
                   </a:rPr>
                   <a:t>Box Collider</a:t>
                 </a:r>
+                <a:endParaRPr lang="en-US" sz="2400" b="1" dirty="0">
+                  <a:solidFill>
+                    <a:schemeClr val="dk1"/>
+                  </a:solidFill>
+                  <a:latin typeface="+mn-lt"/>
+                  <a:ea typeface="+mn-ea"/>
+                  <a:cs typeface="+mn-cs"/>
+                </a:endParaRPr>
               </a:p>
             </p:txBody>
           </p:sp>
@@ -17529,6 +15953,14 @@
                   </a:rPr>
                   <a:t>墙体 · 地面 · 箱子</a:t>
                 </a:r>
+                <a:endParaRPr lang="zh-CN" sz="1800" dirty="0">
+                  <a:solidFill>
+                    <a:schemeClr val="dk2"/>
+                  </a:solidFill>
+                  <a:latin typeface="+mn-lt"/>
+                  <a:ea typeface="+mn-ea"/>
+                  <a:cs typeface="+mn-cs"/>
+                </a:endParaRPr>
               </a:p>
             </p:txBody>
           </p:sp>
@@ -17569,6 +16001,14 @@
                   </a:rPr>
                   <a:t>性能优先，首选</a:t>
                 </a:r>
+                <a:endParaRPr lang="zh-CN" sz="1800" dirty="0">
+                  <a:solidFill>
+                    <a:srgbClr val="2F8F6A"/>
+                  </a:solidFill>
+                  <a:latin typeface="+mn-lt"/>
+                  <a:ea typeface="+mn-ea"/>
+                  <a:cs typeface="+mn-cs"/>
+                </a:endParaRPr>
               </a:p>
             </p:txBody>
           </p:sp>
@@ -17703,6 +16143,14 @@
                   </a:rPr>
                   <a:t>Sphere Collider</a:t>
                 </a:r>
+                <a:endParaRPr lang="en-US" sz="2400" b="1" dirty="0">
+                  <a:solidFill>
+                    <a:schemeClr val="dk1"/>
+                  </a:solidFill>
+                  <a:latin typeface="+mn-lt"/>
+                  <a:ea typeface="+mn-ea"/>
+                  <a:cs typeface="+mn-cs"/>
+                </a:endParaRPr>
               </a:p>
             </p:txBody>
           </p:sp>
@@ -17743,6 +16191,14 @@
                   </a:rPr>
                   <a:t>球体 · 范围检测</a:t>
                 </a:r>
+                <a:endParaRPr lang="zh-CN" sz="1800" dirty="0">
+                  <a:solidFill>
+                    <a:schemeClr val="dk2"/>
+                  </a:solidFill>
+                  <a:latin typeface="+mn-lt"/>
+                  <a:ea typeface="+mn-ea"/>
+                  <a:cs typeface="+mn-cs"/>
+                </a:endParaRPr>
               </a:p>
             </p:txBody>
           </p:sp>
@@ -17783,6 +16239,14 @@
                   </a:rPr>
                   <a:t>旋转稳定，计算轻</a:t>
                 </a:r>
+                <a:endParaRPr lang="zh-CN" sz="1800" dirty="0">
+                  <a:solidFill>
+                    <a:srgbClr val="2F8F6A"/>
+                  </a:solidFill>
+                  <a:latin typeface="+mn-lt"/>
+                  <a:ea typeface="+mn-ea"/>
+                  <a:cs typeface="+mn-cs"/>
+                </a:endParaRPr>
               </a:p>
             </p:txBody>
           </p:sp>
@@ -17923,6 +16387,14 @@
                   </a:rPr>
                   <a:t>Capsule Collider</a:t>
                 </a:r>
+                <a:endParaRPr lang="en-US" sz="2400" b="1" dirty="0">
+                  <a:solidFill>
+                    <a:schemeClr val="dk1"/>
+                  </a:solidFill>
+                  <a:latin typeface="+mn-lt"/>
+                  <a:ea typeface="+mn-ea"/>
+                  <a:cs typeface="+mn-cs"/>
+                </a:endParaRPr>
               </a:p>
             </p:txBody>
           </p:sp>
@@ -17963,6 +16435,14 @@
                   </a:rPr>
                   <a:t>角色 · 柱状物体</a:t>
                 </a:r>
+                <a:endParaRPr lang="zh-CN" sz="1800" dirty="0">
+                  <a:solidFill>
+                    <a:schemeClr val="dk2"/>
+                  </a:solidFill>
+                  <a:latin typeface="+mn-lt"/>
+                  <a:ea typeface="+mn-ea"/>
+                  <a:cs typeface="+mn-cs"/>
+                </a:endParaRPr>
               </a:p>
             </p:txBody>
           </p:sp>
@@ -18003,6 +16483,14 @@
                   </a:rPr>
                   <a:t>转角不易卡住</a:t>
                 </a:r>
+                <a:endParaRPr lang="zh-CN" sz="1800" dirty="0">
+                  <a:solidFill>
+                    <a:srgbClr val="8C5A00"/>
+                  </a:solidFill>
+                  <a:latin typeface="+mn-lt"/>
+                  <a:ea typeface="+mn-ea"/>
+                  <a:cs typeface="+mn-cs"/>
+                </a:endParaRPr>
               </a:p>
             </p:txBody>
           </p:sp>
@@ -18288,6 +16776,14 @@
                   </a:rPr>
                   <a:t>Mesh Collider</a:t>
                 </a:r>
+                <a:endParaRPr lang="en-US" sz="2400" b="1" dirty="0">
+                  <a:solidFill>
+                    <a:schemeClr val="dk1"/>
+                  </a:solidFill>
+                  <a:latin typeface="+mn-lt"/>
+                  <a:ea typeface="+mn-ea"/>
+                  <a:cs typeface="+mn-cs"/>
+                </a:endParaRPr>
               </a:p>
             </p:txBody>
           </p:sp>
@@ -18328,6 +16824,14 @@
                   </a:rPr>
                   <a:t>复杂静态模型 · 不规则地形</a:t>
                 </a:r>
+                <a:endParaRPr lang="zh-CN" sz="1800" dirty="0">
+                  <a:solidFill>
+                    <a:schemeClr val="dk2"/>
+                  </a:solidFill>
+                  <a:latin typeface="+mn-lt"/>
+                  <a:ea typeface="+mn-ea"/>
+                  <a:cs typeface="+mn-cs"/>
+                </a:endParaRPr>
               </a:p>
             </p:txBody>
           </p:sp>
@@ -18368,6 +16872,14 @@
                   </a:rPr>
                   <a:t>开销较大，谨慎用于动态物体</a:t>
                 </a:r>
+                <a:endParaRPr lang="zh-CN" sz="1800" dirty="0">
+                  <a:solidFill>
+                    <a:srgbClr val="D85C45"/>
+                  </a:solidFill>
+                  <a:latin typeface="+mn-lt"/>
+                  <a:ea typeface="+mn-ea"/>
+                  <a:cs typeface="+mn-cs"/>
+                </a:endParaRPr>
               </a:p>
             </p:txBody>
           </p:sp>
@@ -18635,6 +17147,14 @@
                   </a:rPr>
                   <a:t>选型顺序</a:t>
                 </a:r>
+                <a:endParaRPr lang="zh-CN" sz="2400" b="1" dirty="0">
+                  <a:solidFill>
+                    <a:schemeClr val="dk1"/>
+                  </a:solidFill>
+                  <a:latin typeface="+mn-lt"/>
+                  <a:ea typeface="+mn-ea"/>
+                  <a:cs typeface="+mn-cs"/>
+                </a:endParaRPr>
               </a:p>
             </p:txBody>
           </p:sp>
@@ -18675,6 +17195,14 @@
                   </a:rPr>
                   <a:t>① 盒 → ② 球 / 胶囊</a:t>
                 </a:r>
+                <a:endParaRPr lang="zh-CN" sz="1800" dirty="0">
+                  <a:solidFill>
+                    <a:schemeClr val="dk1"/>
+                  </a:solidFill>
+                  <a:latin typeface="+mn-lt"/>
+                  <a:ea typeface="+mn-ea"/>
+                  <a:cs typeface="+mn-cs"/>
+                </a:endParaRPr>
               </a:p>
             </p:txBody>
           </p:sp>
@@ -18715,6 +17243,14 @@
                   </a:rPr>
                   <a:t>③ 组合体 → ④ 网格</a:t>
                 </a:r>
+                <a:endParaRPr lang="zh-CN" sz="1800" dirty="0">
+                  <a:solidFill>
+                    <a:schemeClr val="dk1"/>
+                  </a:solidFill>
+                  <a:latin typeface="+mn-lt"/>
+                  <a:ea typeface="+mn-ea"/>
+                  <a:cs typeface="+mn-cs"/>
+                </a:endParaRPr>
               </a:p>
             </p:txBody>
           </p:sp>
@@ -18810,46 +17346,6 @@
         </p:sp>
         <p:sp>
           <p:nvSpPr>
-            <p:cNvPr id="49" name="TextBox 49"/>
-            <p:cNvSpPr txBox="1"/>
-            <p:nvPr/>
-          </p:nvSpPr>
-          <p:spPr>
-            <a:xfrm>
-              <a:off x="564642" y="6521768"/>
-              <a:ext cx="1990363" cy="264033"/>
-            </a:xfrm>
-            <a:prstGeom prst="rect">
-              <a:avLst/>
-            </a:prstGeom>
-            <a:noFill/>
-            <a:ln>
-              <a:noFill/>
-            </a:ln>
-          </p:spPr>
-          <p:txBody>
-            <a:bodyPr wrap="none" lIns="0" tIns="0" rIns="0" bIns="0" anchor="t" anchorCtr="0">
-              <a:spAutoFit/>
-            </a:bodyPr>
-            <a:lstStyle/>
-            <a:p>
-              <a:pPr algn="l"/>
-              <a:r>
-                <a:rPr lang="zh-CN" sz="1350" dirty="0">
-                  <a:solidFill>
-                    <a:schemeClr val="accent5"/>
-                  </a:solidFill>
-                  <a:latin typeface="+mn-lt"/>
-                  <a:ea typeface="+mn-ea"/>
-                  <a:cs typeface="+mn-cs"/>
-                </a:rPr>
-                <a:t>Collider · 物理边界选型</a:t>
-              </a:r>
-            </a:p>
-          </p:txBody>
-        </p:sp>
-        <p:sp>
-          <p:nvSpPr>
             <p:cNvPr id="50" name="TextBox 50"/>
             <p:cNvSpPr txBox="1"/>
             <p:nvPr/>
@@ -18885,6 +17381,14 @@
                 </a:rPr>
                 <a:t>05</a:t>
               </a:r>
+              <a:endParaRPr lang="en-US" sz="1350" dirty="0">
+                <a:solidFill>
+                  <a:schemeClr val="accent5"/>
+                </a:solidFill>
+                <a:latin typeface="+mn-lt"/>
+                <a:ea typeface="+mn-ea"/>
+                <a:cs typeface="+mn-cs"/>
+              </a:endParaRPr>
             </a:p>
           </p:txBody>
         </p:sp>
@@ -18894,9 +17398,18 @@
   <p:clrMapOvr>
     <a:masterClrMapping/>
   </p:clrMapOvr>
-  <p:transition xmlns:p14="http://schemas.microsoft.com/office/powerpoint/2010/main" p14:dur="400">
-    <p:fade/>
-  </p:transition>
+  <mc:AlternateContent xmlns:mc="http://schemas.openxmlformats.org/markup-compatibility/2006">
+    <mc:Choice xmlns:p14="http://schemas.microsoft.com/office/powerpoint/2010/main" Requires="p14">
+      <p:transition p14:dur="400">
+        <p:fade/>
+      </p:transition>
+    </mc:Choice>
+    <mc:Fallback>
+      <p:transition>
+        <p:fade/>
+      </p:transition>
+    </mc:Fallback>
+  </mc:AlternateContent>
 </p:sld>
 </file>
 
@@ -18926,7 +17439,7 @@
         <p:spPr>
           <a:xfrm>
             <a:off x="552450" y="270510"/>
-            <a:ext cx="15209887" cy="819150"/>
+            <a:ext cx="4823460" cy="645795"/>
           </a:xfrm>
           <a:prstGeom prst="rect">
             <a:avLst/>
@@ -18952,8 +17465,16 @@
                 <a:ea typeface="+mj-ea"/>
                 <a:cs typeface="+mj-cs"/>
               </a:rPr>
-              <a:t>物理对象的三种角色：Static、Dynamic、Kinematic</a:t>
+              <a:t>物理对象的三种角色</a:t>
             </a:r>
+            <a:endParaRPr lang="zh-CN" sz="4200" b="1" dirty="0">
+              <a:solidFill>
+                <a:schemeClr val="dk1"/>
+              </a:solidFill>
+              <a:latin typeface="+mj-lt"/>
+              <a:ea typeface="+mj-ea"/>
+              <a:cs typeface="+mj-cs"/>
+            </a:endParaRPr>
           </a:p>
         </p:txBody>
       </p:sp>
@@ -18994,6 +17515,14 @@
               </a:rPr>
               <a:t>先确定“谁驱动移动”，再配置 Rigidbody 与 Collider</a:t>
             </a:r>
+            <a:endParaRPr lang="zh-CN" sz="1800" dirty="0">
+              <a:solidFill>
+                <a:schemeClr val="dk2"/>
+              </a:solidFill>
+              <a:latin typeface="+mn-lt"/>
+              <a:ea typeface="+mn-ea"/>
+              <a:cs typeface="+mn-cs"/>
+            </a:endParaRPr>
           </a:p>
         </p:txBody>
       </p:sp>
@@ -19112,183 +17641,17 @@
                   </a:rPr>
                   <a:t>Static 静态</a:t>
                 </a:r>
-              </a:p>
-            </p:txBody>
-          </p:sp>
-          <p:grpSp>
-            <p:nvGrpSpPr>
-              <p:cNvPr id="11" name="Group 11"/>
-              <p:cNvGrpSpPr/>
-              <p:nvPr/>
-            </p:nvGrpSpPr>
-            <p:grpSpPr>
-              <a:xfrm>
-                <a:off x="3035300" y="1824038"/>
-                <a:ext cx="330201" cy="371476"/>
-                <a:chOff x="3035300" y="1824038"/>
-                <a:chExt cx="330201" cy="371476"/>
-              </a:xfrm>
-            </p:grpSpPr>
-            <p:sp>
-              <p:nvSpPr>
-                <p:cNvPr id="7" name="Freeform 7"/>
-                <p:cNvSpPr/>
-                <p:nvPr/>
-              </p:nvSpPr>
-              <p:spPr>
-                <a:xfrm>
-                  <a:off x="3035300" y="1824038"/>
-                  <a:ext cx="330201" cy="371476"/>
-                </a:xfrm>
-                <a:custGeom>
-                  <a:avLst/>
-                  <a:gdLst/>
-                  <a:ahLst/>
-                  <a:cxnLst/>
-                  <a:rect l="l" t="t" r="r" b="b"/>
-                  <a:pathLst>
-                    <a:path w="330201" h="371476">
-                      <a:moveTo>
-                        <a:pt x="165100" y="0"/>
-                      </a:moveTo>
-                      <a:lnTo>
-                        <a:pt x="330201" y="92869"/>
-                      </a:lnTo>
-                      <a:lnTo>
-                        <a:pt x="330201" y="278607"/>
-                      </a:lnTo>
-                      <a:lnTo>
-                        <a:pt x="165100" y="371476"/>
-                      </a:lnTo>
-                      <a:lnTo>
-                        <a:pt x="0" y="278607"/>
-                      </a:lnTo>
-                      <a:lnTo>
-                        <a:pt x="0" y="92869"/>
-                      </a:lnTo>
-                      <a:lnTo>
-                        <a:pt x="165100" y="0"/>
-                      </a:lnTo>
-                    </a:path>
-                  </a:pathLst>
-                </a:custGeom>
-                <a:noFill/>
-                <a:ln w="19050">
+                <a:endParaRPr lang="zh-CN" sz="2700" b="1" dirty="0">
                   <a:solidFill>
                     <a:srgbClr val="FFFFFF"/>
                   </a:solidFill>
-                </a:ln>
-              </p:spPr>
-            </p:sp>
-            <p:sp>
-              <p:nvSpPr>
-                <p:cNvPr id="8" name="Freeform 8"/>
-                <p:cNvSpPr/>
-                <p:nvPr/>
-              </p:nvSpPr>
-              <p:spPr>
-                <a:xfrm>
-                  <a:off x="3200400" y="1916906"/>
-                  <a:ext cx="165100" cy="92869"/>
-                </a:xfrm>
-                <a:custGeom>
-                  <a:avLst/>
-                  <a:gdLst/>
-                  <a:ahLst/>
-                  <a:cxnLst/>
-                  <a:rect l="l" t="t" r="r" b="b"/>
-                  <a:pathLst>
-                    <a:path w="165100" h="92869">
-                      <a:moveTo>
-                        <a:pt x="0" y="92869"/>
-                      </a:moveTo>
-                      <a:lnTo>
-                        <a:pt x="165100" y="0"/>
-                      </a:lnTo>
-                    </a:path>
-                  </a:pathLst>
-                </a:custGeom>
-                <a:noFill/>
-                <a:ln w="19050">
-                  <a:solidFill>
-                    <a:srgbClr val="FFFFFF"/>
-                  </a:solidFill>
-                </a:ln>
-              </p:spPr>
-            </p:sp>
-            <p:sp>
-              <p:nvSpPr>
-                <p:cNvPr id="9" name="Freeform 9"/>
-                <p:cNvSpPr/>
-                <p:nvPr/>
-              </p:nvSpPr>
-              <p:spPr>
-                <a:xfrm>
-                  <a:off x="3200400" y="2009775"/>
-                  <a:ext cx="9525" cy="185738"/>
-                </a:xfrm>
-                <a:custGeom>
-                  <a:avLst/>
-                  <a:gdLst/>
-                  <a:ahLst/>
-                  <a:cxnLst/>
-                  <a:rect l="l" t="t" r="r" b="b"/>
-                  <a:pathLst>
-                    <a:path w="9525" h="185738">
-                      <a:moveTo>
-                        <a:pt x="0" y="0"/>
-                      </a:moveTo>
-                      <a:lnTo>
-                        <a:pt x="0" y="185738"/>
-                      </a:lnTo>
-                    </a:path>
-                  </a:pathLst>
-                </a:custGeom>
-                <a:noFill/>
-                <a:ln w="19050">
-                  <a:solidFill>
-                    <a:srgbClr val="FFFFFF"/>
-                  </a:solidFill>
-                </a:ln>
-              </p:spPr>
-            </p:sp>
-            <p:sp>
-              <p:nvSpPr>
-                <p:cNvPr id="10" name="Freeform 10"/>
-                <p:cNvSpPr/>
-                <p:nvPr/>
-              </p:nvSpPr>
-              <p:spPr>
-                <a:xfrm>
-                  <a:off x="3035300" y="1916906"/>
-                  <a:ext cx="165100" cy="92869"/>
-                </a:xfrm>
-                <a:custGeom>
-                  <a:avLst/>
-                  <a:gdLst/>
-                  <a:ahLst/>
-                  <a:cxnLst/>
-                  <a:rect l="l" t="t" r="r" b="b"/>
-                  <a:pathLst>
-                    <a:path w="165100" h="92869">
-                      <a:moveTo>
-                        <a:pt x="165100" y="92869"/>
-                      </a:moveTo>
-                      <a:lnTo>
-                        <a:pt x="0" y="0"/>
-                      </a:lnTo>
-                    </a:path>
-                  </a:pathLst>
-                </a:custGeom>
-                <a:noFill/>
-                <a:ln w="19050">
-                  <a:solidFill>
-                    <a:srgbClr val="FFFFFF"/>
-                  </a:solidFill>
-                </a:ln>
-              </p:spPr>
-            </p:sp>
-          </p:grpSp>
+                  <a:latin typeface="+mn-lt"/>
+                  <a:ea typeface="+mn-ea"/>
+                  <a:cs typeface="+mn-cs"/>
+                </a:endParaRPr>
+              </a:p>
+            </p:txBody>
+          </p:sp>
           <p:sp>
             <p:nvSpPr>
               <p:cNvPr id="12" name="TextBox 12"/>
@@ -19326,6 +17689,14 @@
                   </a:rPr>
                   <a:t>世界的一部分</a:t>
                 </a:r>
+                <a:endParaRPr lang="zh-CN" sz="2400" b="1" dirty="0">
+                  <a:solidFill>
+                    <a:schemeClr val="dk1"/>
+                  </a:solidFill>
+                  <a:latin typeface="+mn-lt"/>
+                  <a:ea typeface="+mn-ea"/>
+                  <a:cs typeface="+mn-cs"/>
+                </a:endParaRPr>
               </a:p>
             </p:txBody>
           </p:sp>
@@ -19354,7 +17725,7 @@
               </a:bodyPr>
               <a:lstStyle/>
               <a:p>
-                <a:pPr algn="l" marL="194310" indent="-194310">
+                <a:pPr marL="194310" indent="-194310" algn="l">
                   <a:buClr>
                     <a:schemeClr val="dk2"/>
                   </a:buClr>
@@ -19373,6 +17744,14 @@
                   </a:rPr>
                   <a:t>不挂 Rigidbody</a:t>
                 </a:r>
+                <a:endParaRPr lang="zh-CN" sz="1800" dirty="0">
+                  <a:solidFill>
+                    <a:schemeClr val="dk2"/>
+                  </a:solidFill>
+                  <a:latin typeface="+mn-lt"/>
+                  <a:ea typeface="+mn-ea"/>
+                  <a:cs typeface="+mn-cs"/>
+                </a:endParaRPr>
               </a:p>
             </p:txBody>
           </p:sp>
@@ -19401,7 +17780,7 @@
               </a:bodyPr>
               <a:lstStyle/>
               <a:p>
-                <a:pPr algn="l" marL="194310" indent="-194310">
+                <a:pPr marL="194310" indent="-194310" algn="l">
                   <a:buClr>
                     <a:schemeClr val="dk2"/>
                   </a:buClr>
@@ -19420,6 +17799,14 @@
                   </a:rPr>
                   <a:t>由 Collider 阻挡</a:t>
                 </a:r>
+                <a:endParaRPr lang="zh-CN" sz="1800" dirty="0">
+                  <a:solidFill>
+                    <a:schemeClr val="dk2"/>
+                  </a:solidFill>
+                  <a:latin typeface="+mn-lt"/>
+                  <a:ea typeface="+mn-ea"/>
+                  <a:cs typeface="+mn-cs"/>
+                </a:endParaRPr>
               </a:p>
             </p:txBody>
           </p:sp>
@@ -19448,7 +17835,7 @@
               </a:bodyPr>
               <a:lstStyle/>
               <a:p>
-                <a:pPr algn="l" marL="194310" indent="-194310">
+                <a:pPr marL="194310" indent="-194310" algn="l">
                   <a:buClr>
                     <a:schemeClr val="dk2"/>
                   </a:buClr>
@@ -19467,6 +17854,14 @@
                   </a:rPr>
                   <a:t>墙、地面、固定建筑</a:t>
                 </a:r>
+                <a:endParaRPr lang="zh-CN" sz="1800" dirty="0">
+                  <a:solidFill>
+                    <a:schemeClr val="dk2"/>
+                  </a:solidFill>
+                  <a:latin typeface="+mn-lt"/>
+                  <a:ea typeface="+mn-ea"/>
+                  <a:cs typeface="+mn-cs"/>
+                </a:endParaRPr>
               </a:p>
             </p:txBody>
           </p:sp>
@@ -19531,6 +17926,14 @@
                   </a:rPr>
                   <a:t>性能稳定</a:t>
                 </a:r>
+                <a:endParaRPr lang="zh-CN" sz="1800" dirty="0">
+                  <a:solidFill>
+                    <a:schemeClr val="accent1"/>
+                  </a:solidFill>
+                  <a:latin typeface="+mn-lt"/>
+                  <a:ea typeface="+mn-ea"/>
+                  <a:cs typeface="+mn-cs"/>
+                </a:endParaRPr>
               </a:p>
             </p:txBody>
           </p:sp>
@@ -19571,6 +17974,14 @@
                   </a:rPr>
                   <a:t>不要在运行时移动</a:t>
                 </a:r>
+                <a:endParaRPr lang="zh-CN" sz="1800" b="1" dirty="0">
+                  <a:solidFill>
+                    <a:schemeClr val="accent1"/>
+                  </a:solidFill>
+                  <a:latin typeface="+mn-lt"/>
+                  <a:ea typeface="+mn-ea"/>
+                  <a:cs typeface="+mn-cs"/>
+                </a:endParaRPr>
               </a:p>
             </p:txBody>
           </p:sp>
@@ -19676,61 +18087,16 @@
                   </a:rPr>
                   <a:t>Dynamic 动态</a:t>
                 </a:r>
+                <a:endParaRPr lang="zh-CN" sz="2700" b="1" dirty="0">
+                  <a:solidFill>
+                    <a:srgbClr val="FFFFFF"/>
+                  </a:solidFill>
+                  <a:latin typeface="+mn-lt"/>
+                  <a:ea typeface="+mn-ea"/>
+                  <a:cs typeface="+mn-cs"/>
+                </a:endParaRPr>
               </a:p>
             </p:txBody>
-          </p:sp>
-          <p:sp>
-            <p:nvSpPr>
-              <p:cNvPr id="23" name="Freeform 23"/>
-              <p:cNvSpPr/>
-              <p:nvPr/>
-            </p:nvSpPr>
-            <p:spPr>
-              <a:xfrm>
-                <a:off x="6815138" y="1824038"/>
-                <a:ext cx="371476" cy="371476"/>
-              </a:xfrm>
-              <a:custGeom>
-                <a:avLst/>
-                <a:gdLst/>
-                <a:ahLst/>
-                <a:cxnLst/>
-                <a:rect l="l" t="t" r="r" b="b"/>
-                <a:pathLst>
-                  <a:path w="371476" h="371476">
-                    <a:moveTo>
-                      <a:pt x="0" y="185738"/>
-                    </a:moveTo>
-                    <a:cubicBezTo>
-                      <a:pt x="0" y="288318"/>
-                      <a:pt x="83158" y="371476"/>
-                      <a:pt x="185738" y="371476"/>
-                    </a:cubicBezTo>
-                    <a:cubicBezTo>
-                      <a:pt x="288318" y="371476"/>
-                      <a:pt x="371476" y="288318"/>
-                      <a:pt x="371476" y="185738"/>
-                    </a:cubicBezTo>
-                    <a:cubicBezTo>
-                      <a:pt x="371476" y="83158"/>
-                      <a:pt x="288318" y="0"/>
-                      <a:pt x="185738" y="0"/>
-                    </a:cubicBezTo>
-                    <a:cubicBezTo>
-                      <a:pt x="83158" y="0"/>
-                      <a:pt x="0" y="83158"/>
-                      <a:pt x="0" y="185738"/>
-                    </a:cubicBezTo>
-                  </a:path>
-                </a:pathLst>
-              </a:custGeom>
-              <a:noFill/>
-              <a:ln w="19050">
-                <a:solidFill>
-                  <a:srgbClr val="FFFFFF"/>
-                </a:solidFill>
-              </a:ln>
-            </p:spPr>
           </p:sp>
           <p:sp>
             <p:nvSpPr>
@@ -19769,6 +18135,14 @@
                   </a:rPr>
                   <a:t>由物理系统驱动</a:t>
                 </a:r>
+                <a:endParaRPr lang="zh-CN" sz="2400" b="1" dirty="0">
+                  <a:solidFill>
+                    <a:schemeClr val="dk1"/>
+                  </a:solidFill>
+                  <a:latin typeface="+mn-lt"/>
+                  <a:ea typeface="+mn-ea"/>
+                  <a:cs typeface="+mn-cs"/>
+                </a:endParaRPr>
               </a:p>
             </p:txBody>
           </p:sp>
@@ -19797,7 +18171,7 @@
               </a:bodyPr>
               <a:lstStyle/>
               <a:p>
-                <a:pPr algn="l" marL="194310" indent="-194310">
+                <a:pPr marL="194310" indent="-194310" algn="l">
                   <a:buClr>
                     <a:schemeClr val="dk2"/>
                   </a:buClr>
@@ -19816,6 +18190,14 @@
                   </a:rPr>
                   <a:t>Rigidbody + Collider</a:t>
                 </a:r>
+                <a:endParaRPr lang="en-US" sz="1800" dirty="0">
+                  <a:solidFill>
+                    <a:schemeClr val="dk2"/>
+                  </a:solidFill>
+                  <a:latin typeface="+mn-lt"/>
+                  <a:ea typeface="+mn-ea"/>
+                  <a:cs typeface="+mn-cs"/>
+                </a:endParaRPr>
               </a:p>
             </p:txBody>
           </p:sp>
@@ -19844,7 +18226,7 @@
               </a:bodyPr>
               <a:lstStyle/>
               <a:p>
-                <a:pPr algn="l" marL="194310" indent="-194310">
+                <a:pPr marL="194310" indent="-194310" algn="l">
                   <a:buClr>
                     <a:schemeClr val="dk2"/>
                   </a:buClr>
@@ -19863,6 +18245,14 @@
                   </a:rPr>
                   <a:t>受重力、力与碰撞影响</a:t>
                 </a:r>
+                <a:endParaRPr lang="zh-CN" sz="1800" dirty="0">
+                  <a:solidFill>
+                    <a:schemeClr val="dk2"/>
+                  </a:solidFill>
+                  <a:latin typeface="+mn-lt"/>
+                  <a:ea typeface="+mn-ea"/>
+                  <a:cs typeface="+mn-cs"/>
+                </a:endParaRPr>
               </a:p>
             </p:txBody>
           </p:sp>
@@ -19891,7 +18281,7 @@
               </a:bodyPr>
               <a:lstStyle/>
               <a:p>
-                <a:pPr algn="l" marL="194310" indent="-194310">
+                <a:pPr marL="194310" indent="-194310" algn="l">
                   <a:buClr>
                     <a:schemeClr val="dk2"/>
                   </a:buClr>
@@ -19910,6 +18300,14 @@
                   </a:rPr>
                   <a:t>球、箱子、可推动道具</a:t>
                 </a:r>
+                <a:endParaRPr lang="zh-CN" sz="1800" dirty="0">
+                  <a:solidFill>
+                    <a:schemeClr val="dk2"/>
+                  </a:solidFill>
+                  <a:latin typeface="+mn-lt"/>
+                  <a:ea typeface="+mn-ea"/>
+                  <a:cs typeface="+mn-cs"/>
+                </a:endParaRPr>
               </a:p>
             </p:txBody>
           </p:sp>
@@ -19974,6 +18372,14 @@
                   </a:rPr>
                   <a:t>用 AddForce / Velocity</a:t>
                 </a:r>
+                <a:endParaRPr lang="zh-CN" sz="1800" dirty="0">
+                  <a:solidFill>
+                    <a:srgbClr val="2F8F6A"/>
+                  </a:solidFill>
+                  <a:latin typeface="+mn-lt"/>
+                  <a:ea typeface="+mn-ea"/>
+                  <a:cs typeface="+mn-cs"/>
+                </a:endParaRPr>
               </a:p>
             </p:txBody>
           </p:sp>
@@ -20014,6 +18420,14 @@
                   </a:rPr>
                   <a:t>避免直接改 Transform</a:t>
                 </a:r>
+                <a:endParaRPr lang="zh-CN" sz="1800" b="1" dirty="0">
+                  <a:solidFill>
+                    <a:srgbClr val="2F8F6A"/>
+                  </a:solidFill>
+                  <a:latin typeface="+mn-lt"/>
+                  <a:ea typeface="+mn-ea"/>
+                  <a:cs typeface="+mn-cs"/>
+                </a:endParaRPr>
               </a:p>
             </p:txBody>
           </p:sp>
@@ -20119,200 +18533,17 @@
                   </a:rPr>
                   <a:t>Kinematic 运动学</a:t>
                 </a:r>
-              </a:p>
-            </p:txBody>
-          </p:sp>
-          <p:grpSp>
-            <p:nvGrpSpPr>
-              <p:cNvPr id="39" name="Group 39"/>
-              <p:cNvGrpSpPr/>
-              <p:nvPr/>
-            </p:nvGrpSpPr>
-            <p:grpSpPr>
-              <a:xfrm>
-                <a:off x="10868025" y="1824038"/>
-                <a:ext cx="247650" cy="371475"/>
-                <a:chOff x="10868025" y="1824038"/>
-                <a:chExt cx="247650" cy="371475"/>
-              </a:xfrm>
-            </p:grpSpPr>
-            <p:sp>
-              <p:nvSpPr>
-                <p:cNvPr id="35" name="Freeform 35"/>
-                <p:cNvSpPr/>
-                <p:nvPr/>
-              </p:nvSpPr>
-              <p:spPr>
-                <a:xfrm>
-                  <a:off x="10991850" y="1824038"/>
-                  <a:ext cx="41275" cy="41275"/>
-                </a:xfrm>
-                <a:custGeom>
-                  <a:avLst/>
-                  <a:gdLst/>
-                  <a:ahLst/>
-                  <a:cxnLst/>
-                  <a:rect l="l" t="t" r="r" b="b"/>
-                  <a:pathLst>
-                    <a:path w="41275" h="41275">
-                      <a:moveTo>
-                        <a:pt x="0" y="20638"/>
-                      </a:moveTo>
-                      <a:cubicBezTo>
-                        <a:pt x="0" y="32035"/>
-                        <a:pt x="9240" y="41275"/>
-                        <a:pt x="20638" y="41275"/>
-                      </a:cubicBezTo>
-                      <a:cubicBezTo>
-                        <a:pt x="32035" y="41275"/>
-                        <a:pt x="41275" y="32035"/>
-                        <a:pt x="41275" y="20638"/>
-                      </a:cubicBezTo>
-                      <a:cubicBezTo>
-                        <a:pt x="41275" y="9240"/>
-                        <a:pt x="32035" y="0"/>
-                        <a:pt x="20638" y="0"/>
-                      </a:cubicBezTo>
-                      <a:cubicBezTo>
-                        <a:pt x="9240" y="0"/>
-                        <a:pt x="0" y="9240"/>
-                        <a:pt x="0" y="20638"/>
-                      </a:cubicBezTo>
-                    </a:path>
-                  </a:pathLst>
-                </a:custGeom>
-                <a:noFill/>
-                <a:ln w="19050">
+                <a:endParaRPr lang="zh-CN" sz="2700" b="1" dirty="0">
                   <a:solidFill>
                     <a:srgbClr val="FFFFFF"/>
                   </a:solidFill>
-                </a:ln>
-              </p:spPr>
-            </p:sp>
-            <p:sp>
-              <p:nvSpPr>
-                <p:cNvPr id="36" name="Freeform 36"/>
-                <p:cNvSpPr/>
-                <p:nvPr/>
-              </p:nvSpPr>
-              <p:spPr>
-                <a:xfrm>
-                  <a:off x="10888663" y="2112963"/>
-                  <a:ext cx="61913" cy="82550"/>
-                </a:xfrm>
-                <a:custGeom>
-                  <a:avLst/>
-                  <a:gdLst/>
-                  <a:ahLst/>
-                  <a:cxnLst/>
-                  <a:rect l="l" t="t" r="r" b="b"/>
-                  <a:pathLst>
-                    <a:path w="61913" h="82550">
-                      <a:moveTo>
-                        <a:pt x="0" y="82550"/>
-                      </a:moveTo>
-                      <a:lnTo>
-                        <a:pt x="61913" y="0"/>
-                      </a:lnTo>
-                    </a:path>
-                  </a:pathLst>
-                </a:custGeom>
-                <a:noFill/>
-                <a:ln w="19050">
-                  <a:solidFill>
-                    <a:srgbClr val="FFFFFF"/>
-                  </a:solidFill>
-                </a:ln>
-              </p:spPr>
-            </p:sp>
-            <p:sp>
-              <p:nvSpPr>
-                <p:cNvPr id="37" name="Freeform 37"/>
-                <p:cNvSpPr/>
-                <p:nvPr/>
-              </p:nvSpPr>
-              <p:spPr>
-                <a:xfrm>
-                  <a:off x="10971213" y="1927225"/>
-                  <a:ext cx="103188" cy="268288"/>
-                </a:xfrm>
-                <a:custGeom>
-                  <a:avLst/>
-                  <a:gdLst/>
-                  <a:ahLst/>
-                  <a:cxnLst/>
-                  <a:rect l="l" t="t" r="r" b="b"/>
-                  <a:pathLst>
-                    <a:path w="103188" h="268288">
-                      <a:moveTo>
-                        <a:pt x="103188" y="268288"/>
-                      </a:moveTo>
-                      <a:lnTo>
-                        <a:pt x="61913" y="185738"/>
-                      </a:lnTo>
-                      <a:lnTo>
-                        <a:pt x="0" y="123825"/>
-                      </a:lnTo>
-                      <a:lnTo>
-                        <a:pt x="20638" y="0"/>
-                      </a:lnTo>
-                    </a:path>
-                  </a:pathLst>
-                </a:custGeom>
-                <a:noFill/>
-                <a:ln w="19050">
-                  <a:solidFill>
-                    <a:srgbClr val="FFFFFF"/>
-                  </a:solidFill>
-                </a:ln>
-              </p:spPr>
-            </p:sp>
-            <p:sp>
-              <p:nvSpPr>
-                <p:cNvPr id="38" name="Freeform 38"/>
-                <p:cNvSpPr/>
-                <p:nvPr/>
-              </p:nvSpPr>
-              <p:spPr>
-                <a:xfrm>
-                  <a:off x="10868025" y="1927225"/>
-                  <a:ext cx="247650" cy="82550"/>
-                </a:xfrm>
-                <a:custGeom>
-                  <a:avLst/>
-                  <a:gdLst/>
-                  <a:ahLst/>
-                  <a:cxnLst/>
-                  <a:rect l="l" t="t" r="r" b="b"/>
-                  <a:pathLst>
-                    <a:path w="247650" h="82550">
-                      <a:moveTo>
-                        <a:pt x="0" y="82550"/>
-                      </a:moveTo>
-                      <a:lnTo>
-                        <a:pt x="41275" y="20638"/>
-                      </a:lnTo>
-                      <a:lnTo>
-                        <a:pt x="123825" y="0"/>
-                      </a:lnTo>
-                      <a:lnTo>
-                        <a:pt x="185738" y="61913"/>
-                      </a:lnTo>
-                      <a:lnTo>
-                        <a:pt x="247650" y="82550"/>
-                      </a:lnTo>
-                    </a:path>
-                  </a:pathLst>
-                </a:custGeom>
-                <a:noFill/>
-                <a:ln w="19050">
-                  <a:solidFill>
-                    <a:srgbClr val="FFFFFF"/>
-                  </a:solidFill>
-                </a:ln>
-              </p:spPr>
-            </p:sp>
-          </p:grpSp>
+                  <a:latin typeface="+mn-lt"/>
+                  <a:ea typeface="+mn-ea"/>
+                  <a:cs typeface="+mn-cs"/>
+                </a:endParaRPr>
+              </a:p>
+            </p:txBody>
+          </p:sp>
           <p:sp>
             <p:nvSpPr>
               <p:cNvPr id="40" name="TextBox 40"/>
@@ -20350,6 +18581,14 @@
                   </a:rPr>
                   <a:t>由脚本驱动</a:t>
                 </a:r>
+                <a:endParaRPr lang="zh-CN" sz="2400" b="1" dirty="0">
+                  <a:solidFill>
+                    <a:schemeClr val="dk1"/>
+                  </a:solidFill>
+                  <a:latin typeface="+mn-lt"/>
+                  <a:ea typeface="+mn-ea"/>
+                  <a:cs typeface="+mn-cs"/>
+                </a:endParaRPr>
               </a:p>
             </p:txBody>
           </p:sp>
@@ -20378,7 +18617,7 @@
               </a:bodyPr>
               <a:lstStyle/>
               <a:p>
-                <a:pPr algn="l" marL="194310" indent="-194310">
+                <a:pPr marL="194310" indent="-194310" algn="l">
                   <a:buClr>
                     <a:schemeClr val="dk2"/>
                   </a:buClr>
@@ -20397,6 +18636,14 @@
                   </a:rPr>
                   <a:t>Rigidbody 勾选 Is Kinematic</a:t>
                 </a:r>
+                <a:endParaRPr lang="zh-CN" sz="1800" dirty="0">
+                  <a:solidFill>
+                    <a:schemeClr val="dk2"/>
+                  </a:solidFill>
+                  <a:latin typeface="+mn-lt"/>
+                  <a:ea typeface="+mn-ea"/>
+                  <a:cs typeface="+mn-cs"/>
+                </a:endParaRPr>
               </a:p>
             </p:txBody>
           </p:sp>
@@ -20425,7 +18672,7 @@
               </a:bodyPr>
               <a:lstStyle/>
               <a:p>
-                <a:pPr algn="l" marL="194310" indent="-194310">
+                <a:pPr marL="194310" indent="-194310" algn="l">
                   <a:buClr>
                     <a:schemeClr val="dk2"/>
                   </a:buClr>
@@ -20444,6 +18691,14 @@
                   </a:rPr>
                   <a:t>不被力推动，但能参与检测</a:t>
                 </a:r>
+                <a:endParaRPr lang="zh-CN" sz="1800" dirty="0">
+                  <a:solidFill>
+                    <a:schemeClr val="dk2"/>
+                  </a:solidFill>
+                  <a:latin typeface="+mn-lt"/>
+                  <a:ea typeface="+mn-ea"/>
+                  <a:cs typeface="+mn-cs"/>
+                </a:endParaRPr>
               </a:p>
             </p:txBody>
           </p:sp>
@@ -20472,7 +18727,7 @@
               </a:bodyPr>
               <a:lstStyle/>
               <a:p>
-                <a:pPr algn="l" marL="194310" indent="-194310">
+                <a:pPr marL="194310" indent="-194310" algn="l">
                   <a:buClr>
                     <a:schemeClr val="dk2"/>
                   </a:buClr>
@@ -20491,6 +18746,14 @@
                   </a:rPr>
                   <a:t>门、移动平台、动画机关</a:t>
                 </a:r>
+                <a:endParaRPr lang="zh-CN" sz="1800" dirty="0">
+                  <a:solidFill>
+                    <a:schemeClr val="dk2"/>
+                  </a:solidFill>
+                  <a:latin typeface="+mn-lt"/>
+                  <a:ea typeface="+mn-ea"/>
+                  <a:cs typeface="+mn-cs"/>
+                </a:endParaRPr>
               </a:p>
             </p:txBody>
           </p:sp>
@@ -20555,6 +18818,14 @@
                   </a:rPr>
                   <a:t>用 MovePosition</a:t>
                 </a:r>
+                <a:endParaRPr lang="zh-CN" sz="1800" dirty="0">
+                  <a:solidFill>
+                    <a:srgbClr val="8C5A00"/>
+                  </a:solidFill>
+                  <a:latin typeface="+mn-lt"/>
+                  <a:ea typeface="+mn-ea"/>
+                  <a:cs typeface="+mn-cs"/>
+                </a:endParaRPr>
               </a:p>
             </p:txBody>
           </p:sp>
@@ -20595,6 +18866,14 @@
                   </a:rPr>
                   <a:t>轨迹可控</a:t>
                 </a:r>
+                <a:endParaRPr lang="zh-CN" sz="1800" b="1" dirty="0">
+                  <a:solidFill>
+                    <a:srgbClr val="8C5A00"/>
+                  </a:solidFill>
+                  <a:latin typeface="+mn-lt"/>
+                  <a:ea typeface="+mn-ea"/>
+                  <a:cs typeface="+mn-cs"/>
+                </a:endParaRPr>
               </a:p>
             </p:txBody>
           </p:sp>
@@ -20652,46 +18931,6 @@
         </p:sp>
         <p:sp>
           <p:nvSpPr>
-            <p:cNvPr id="50" name="TextBox 50"/>
-            <p:cNvSpPr txBox="1"/>
-            <p:nvPr/>
-          </p:nvSpPr>
-          <p:spPr>
-            <a:xfrm>
-              <a:off x="564642" y="6521768"/>
-              <a:ext cx="2135124" cy="264033"/>
-            </a:xfrm>
-            <a:prstGeom prst="rect">
-              <a:avLst/>
-            </a:prstGeom>
-            <a:noFill/>
-            <a:ln>
-              <a:noFill/>
-            </a:ln>
-          </p:spPr>
-          <p:txBody>
-            <a:bodyPr wrap="none" lIns="0" tIns="0" rIns="0" bIns="0" anchor="t" anchorCtr="0">
-              <a:spAutoFit/>
-            </a:bodyPr>
-            <a:lstStyle/>
-            <a:p>
-              <a:pPr algn="l"/>
-              <a:r>
-                <a:rPr lang="zh-CN" sz="1350" dirty="0">
-                  <a:solidFill>
-                    <a:schemeClr val="accent5"/>
-                  </a:solidFill>
-                  <a:latin typeface="+mn-lt"/>
-                  <a:ea typeface="+mn-ea"/>
-                  <a:cs typeface="+mn-cs"/>
-                </a:rPr>
-                <a:t>Rigidbody · 运动责任划分</a:t>
-              </a:r>
-            </a:p>
-          </p:txBody>
-        </p:sp>
-        <p:sp>
-          <p:nvSpPr>
             <p:cNvPr id="51" name="TextBox 51"/>
             <p:cNvSpPr txBox="1"/>
             <p:nvPr/>
@@ -20727,6 +18966,14 @@
                 </a:rPr>
                 <a:t>06</a:t>
               </a:r>
+              <a:endParaRPr lang="en-US" sz="1350" dirty="0">
+                <a:solidFill>
+                  <a:schemeClr val="accent5"/>
+                </a:solidFill>
+                <a:latin typeface="+mn-lt"/>
+                <a:ea typeface="+mn-ea"/>
+                <a:cs typeface="+mn-cs"/>
+              </a:endParaRPr>
             </a:p>
           </p:txBody>
         </p:sp>
@@ -20736,9 +18983,18 @@
   <p:clrMapOvr>
     <a:masterClrMapping/>
   </p:clrMapOvr>
-  <p:transition xmlns:p14="http://schemas.microsoft.com/office/powerpoint/2010/main" p14:dur="400">
-    <p:fade/>
-  </p:transition>
+  <mc:AlternateContent xmlns:mc="http://schemas.openxmlformats.org/markup-compatibility/2006">
+    <mc:Choice xmlns:p14="http://schemas.microsoft.com/office/powerpoint/2010/main" Requires="p14">
+      <p:transition p14:dur="400">
+        <p:fade/>
+      </p:transition>
+    </mc:Choice>
+    <mc:Fallback>
+      <p:transition>
+        <p:fade/>
+      </p:transition>
+    </mc:Fallback>
+  </mc:AlternateContent>
 </p:sld>
 </file>
 
@@ -20768,7 +19024,7 @@
         <p:spPr>
           <a:xfrm>
             <a:off x="552450" y="270510"/>
-            <a:ext cx="14066733" cy="819150"/>
+            <a:ext cx="11376025" cy="645795"/>
           </a:xfrm>
           <a:prstGeom prst="rect">
             <a:avLst/>
@@ -20794,8 +19050,16 @@
                 <a:ea typeface="+mj-ea"/>
                 <a:cs typeface="+mj-cs"/>
               </a:rPr>
-              <a:t>Trigger：不阻挡，但能感知“进入、停留、离开”</a:t>
+              <a:t>Trigger：不阻挡，能感知“进入、停留、离开”</a:t>
             </a:r>
+            <a:endParaRPr lang="zh-CN" sz="4200" b="1" dirty="0">
+              <a:solidFill>
+                <a:schemeClr val="dk1"/>
+              </a:solidFill>
+              <a:latin typeface="+mj-lt"/>
+              <a:ea typeface="+mj-ea"/>
+              <a:cs typeface="+mj-cs"/>
+            </a:endParaRPr>
           </a:p>
         </p:txBody>
       </p:sp>
@@ -20836,6 +19100,14 @@
               </a:rPr>
               <a:t>适合门、任务区、拾取范围、检测区域与剧情触发</a:t>
             </a:r>
+            <a:endParaRPr lang="zh-CN" sz="1800" dirty="0">
+              <a:solidFill>
+                <a:schemeClr val="dk2"/>
+              </a:solidFill>
+              <a:latin typeface="+mn-lt"/>
+              <a:ea typeface="+mn-ea"/>
+              <a:cs typeface="+mn-cs"/>
+            </a:endParaRPr>
           </a:p>
         </p:txBody>
       </p:sp>
@@ -20916,6 +19188,14 @@
                 </a:rPr>
                 <a:t>事件顺序</a:t>
               </a:r>
+              <a:endParaRPr lang="zh-CN" sz="2700" b="1" dirty="0">
+                <a:solidFill>
+                  <a:srgbClr val="2F8F6A"/>
+                </a:solidFill>
+                <a:latin typeface="+mn-lt"/>
+                <a:ea typeface="+mn-ea"/>
+                <a:cs typeface="+mn-cs"/>
+              </a:endParaRPr>
             </a:p>
           </p:txBody>
         </p:sp>
@@ -21028,6 +19308,14 @@
                   </a:rPr>
                   <a:t>1</a:t>
                 </a:r>
+                <a:endParaRPr lang="en-US" sz="2400" b="1" dirty="0">
+                  <a:solidFill>
+                    <a:srgbClr val="FFFFFF"/>
+                  </a:solidFill>
+                  <a:latin typeface="+mn-lt"/>
+                  <a:ea typeface="+mn-ea"/>
+                  <a:cs typeface="+mn-cs"/>
+                </a:endParaRPr>
               </a:p>
             </p:txBody>
           </p:sp>
@@ -21062,12 +19350,20 @@
                     <a:solidFill>
                       <a:schemeClr val="dk1"/>
                     </a:solidFill>
-                    <a:latin typeface="Consolas"/>
-                    <a:ea typeface="Consolas"/>
-                    <a:cs typeface="Consolas"/>
+                    <a:latin typeface="Consolas" panose="020B0609020204030204"/>
+                    <a:ea typeface="Consolas" panose="020B0609020204030204"/>
+                    <a:cs typeface="Consolas" panose="020B0609020204030204"/>
                   </a:rPr>
                   <a:t>OnTriggerEnter</a:t>
                 </a:r>
+                <a:endParaRPr lang="en-US" sz="1800" b="1" dirty="0">
+                  <a:solidFill>
+                    <a:schemeClr val="dk1"/>
+                  </a:solidFill>
+                  <a:latin typeface="Consolas" panose="020B0609020204030204"/>
+                  <a:ea typeface="Consolas" panose="020B0609020204030204"/>
+                  <a:cs typeface="Consolas" panose="020B0609020204030204"/>
+                </a:endParaRPr>
               </a:p>
             </p:txBody>
           </p:sp>
@@ -21108,6 +19404,14 @@
                   </a:rPr>
                   <a:t>第一次进入检测区</a:t>
                 </a:r>
+                <a:endParaRPr lang="zh-CN" sz="1800" dirty="0">
+                  <a:solidFill>
+                    <a:schemeClr val="dk2"/>
+                  </a:solidFill>
+                  <a:latin typeface="+mn-lt"/>
+                  <a:ea typeface="+mn-ea"/>
+                  <a:cs typeface="+mn-cs"/>
+                </a:endParaRPr>
               </a:p>
             </p:txBody>
           </p:sp>
@@ -21170,6 +19474,14 @@
                   </a:rPr>
                   <a:t>2</a:t>
                 </a:r>
+                <a:endParaRPr lang="en-US" sz="2400" b="1" dirty="0">
+                  <a:solidFill>
+                    <a:srgbClr val="FFFFFF"/>
+                  </a:solidFill>
+                  <a:latin typeface="+mn-lt"/>
+                  <a:ea typeface="+mn-ea"/>
+                  <a:cs typeface="+mn-cs"/>
+                </a:endParaRPr>
               </a:p>
             </p:txBody>
           </p:sp>
@@ -21204,12 +19516,20 @@
                     <a:solidFill>
                       <a:schemeClr val="dk1"/>
                     </a:solidFill>
-                    <a:latin typeface="Consolas"/>
-                    <a:ea typeface="Consolas"/>
-                    <a:cs typeface="Consolas"/>
+                    <a:latin typeface="Consolas" panose="020B0609020204030204"/>
+                    <a:ea typeface="Consolas" panose="020B0609020204030204"/>
+                    <a:cs typeface="Consolas" panose="020B0609020204030204"/>
                   </a:rPr>
                   <a:t>OnTriggerStay</a:t>
                 </a:r>
+                <a:endParaRPr lang="en-US" sz="1800" b="1" dirty="0">
+                  <a:solidFill>
+                    <a:schemeClr val="dk1"/>
+                  </a:solidFill>
+                  <a:latin typeface="Consolas" panose="020B0609020204030204"/>
+                  <a:ea typeface="Consolas" panose="020B0609020204030204"/>
+                  <a:cs typeface="Consolas" panose="020B0609020204030204"/>
+                </a:endParaRPr>
               </a:p>
             </p:txBody>
           </p:sp>
@@ -21250,6 +19570,14 @@
                   </a:rPr>
                   <a:t>仍在区域内，每帧调用</a:t>
                 </a:r>
+                <a:endParaRPr lang="zh-CN" sz="1800" dirty="0">
+                  <a:solidFill>
+                    <a:schemeClr val="dk2"/>
+                  </a:solidFill>
+                  <a:latin typeface="+mn-lt"/>
+                  <a:ea typeface="+mn-ea"/>
+                  <a:cs typeface="+mn-cs"/>
+                </a:endParaRPr>
               </a:p>
             </p:txBody>
           </p:sp>
@@ -21312,6 +19640,14 @@
                   </a:rPr>
                   <a:t>3</a:t>
                 </a:r>
+                <a:endParaRPr lang="en-US" sz="2400" b="1" dirty="0">
+                  <a:solidFill>
+                    <a:srgbClr val="FFFFFF"/>
+                  </a:solidFill>
+                  <a:latin typeface="+mn-lt"/>
+                  <a:ea typeface="+mn-ea"/>
+                  <a:cs typeface="+mn-cs"/>
+                </a:endParaRPr>
               </a:p>
             </p:txBody>
           </p:sp>
@@ -21346,12 +19682,20 @@
                     <a:solidFill>
                       <a:schemeClr val="dk1"/>
                     </a:solidFill>
-                    <a:latin typeface="Consolas"/>
-                    <a:ea typeface="Consolas"/>
-                    <a:cs typeface="Consolas"/>
+                    <a:latin typeface="Consolas" panose="020B0609020204030204"/>
+                    <a:ea typeface="Consolas" panose="020B0609020204030204"/>
+                    <a:cs typeface="Consolas" panose="020B0609020204030204"/>
                   </a:rPr>
                   <a:t>OnTriggerExit</a:t>
                 </a:r>
+                <a:endParaRPr lang="en-US" sz="1800" b="1" dirty="0">
+                  <a:solidFill>
+                    <a:schemeClr val="dk1"/>
+                  </a:solidFill>
+                  <a:latin typeface="Consolas" panose="020B0609020204030204"/>
+                  <a:ea typeface="Consolas" panose="020B0609020204030204"/>
+                  <a:cs typeface="Consolas" panose="020B0609020204030204"/>
+                </a:endParaRPr>
               </a:p>
             </p:txBody>
           </p:sp>
@@ -21392,6 +19736,14 @@
                   </a:rPr>
                   <a:t>离开区域，收尾状态</a:t>
                 </a:r>
+                <a:endParaRPr lang="zh-CN" sz="1800" dirty="0">
+                  <a:solidFill>
+                    <a:schemeClr val="dk2"/>
+                  </a:solidFill>
+                  <a:latin typeface="+mn-lt"/>
+                  <a:ea typeface="+mn-ea"/>
+                  <a:cs typeface="+mn-cs"/>
+                </a:endParaRPr>
               </a:p>
             </p:txBody>
           </p:sp>
@@ -21660,6 +20012,14 @@
                 </a:rPr>
                 <a:t>事件没触发？按顺序检查</a:t>
               </a:r>
+              <a:endParaRPr lang="zh-CN" sz="2700" b="1" dirty="0">
+                <a:solidFill>
+                  <a:schemeClr val="dk1"/>
+                </a:solidFill>
+                <a:latin typeface="+mn-lt"/>
+                <a:ea typeface="+mn-ea"/>
+                <a:cs typeface="+mn-cs"/>
+              </a:endParaRPr>
             </a:p>
           </p:txBody>
         </p:sp>
@@ -21750,6 +20110,14 @@
                     </a:rPr>
                     <a:t>✓</a:t>
                   </a:r>
+                  <a:endParaRPr lang="en-US" sz="1800" dirty="0">
+                    <a:solidFill>
+                      <a:srgbClr val="FFFFFF"/>
+                    </a:solidFill>
+                    <a:latin typeface="+mn-lt"/>
+                    <a:ea typeface="+mn-ea"/>
+                    <a:cs typeface="+mn-cs"/>
+                  </a:endParaRPr>
                 </a:p>
               </p:txBody>
             </p:sp>
@@ -21790,6 +20158,14 @@
                     </a:rPr>
                     <a:t>至少一方有 Rigidbody</a:t>
                   </a:r>
+                  <a:endParaRPr lang="zh-CN" sz="1800" dirty="0">
+                    <a:solidFill>
+                      <a:schemeClr val="dk2"/>
+                    </a:solidFill>
+                    <a:latin typeface="+mn-lt"/>
+                    <a:ea typeface="+mn-ea"/>
+                    <a:cs typeface="+mn-cs"/>
+                  </a:endParaRPr>
                 </a:p>
               </p:txBody>
             </p:sp>
@@ -21867,6 +20243,14 @@
                     </a:rPr>
                     <a:t>✓</a:t>
                   </a:r>
+                  <a:endParaRPr lang="en-US" sz="1800" dirty="0">
+                    <a:solidFill>
+                      <a:srgbClr val="FFFFFF"/>
+                    </a:solidFill>
+                    <a:latin typeface="+mn-lt"/>
+                    <a:ea typeface="+mn-ea"/>
+                    <a:cs typeface="+mn-cs"/>
+                  </a:endParaRPr>
                 </a:p>
               </p:txBody>
             </p:sp>
@@ -21907,6 +20291,14 @@
                     </a:rPr>
                     <a:t>检测区勾选 Is Trigger</a:t>
                   </a:r>
+                  <a:endParaRPr lang="zh-CN" sz="1800" dirty="0">
+                    <a:solidFill>
+                      <a:schemeClr val="dk2"/>
+                    </a:solidFill>
+                    <a:latin typeface="+mn-lt"/>
+                    <a:ea typeface="+mn-ea"/>
+                    <a:cs typeface="+mn-cs"/>
+                  </a:endParaRPr>
                 </a:p>
               </p:txBody>
             </p:sp>
@@ -21984,6 +20376,14 @@
                     </a:rPr>
                     <a:t>✓</a:t>
                   </a:r>
+                  <a:endParaRPr lang="en-US" sz="1800" dirty="0">
+                    <a:solidFill>
+                      <a:srgbClr val="FFFFFF"/>
+                    </a:solidFill>
+                    <a:latin typeface="+mn-lt"/>
+                    <a:ea typeface="+mn-ea"/>
+                    <a:cs typeface="+mn-cs"/>
+                  </a:endParaRPr>
                 </a:p>
               </p:txBody>
             </p:sp>
@@ -22024,6 +20424,14 @@
                     </a:rPr>
                     <a:t>两者 Layer 允许相互碰撞</a:t>
                   </a:r>
+                  <a:endParaRPr lang="zh-CN" sz="1800" dirty="0">
+                    <a:solidFill>
+                      <a:schemeClr val="dk2"/>
+                    </a:solidFill>
+                    <a:latin typeface="+mn-lt"/>
+                    <a:ea typeface="+mn-ea"/>
+                    <a:cs typeface="+mn-cs"/>
+                  </a:endParaRPr>
                 </a:p>
               </p:txBody>
             </p:sp>
@@ -22101,6 +20509,14 @@
                     </a:rPr>
                     <a:t>✓</a:t>
                   </a:r>
+                  <a:endParaRPr lang="en-US" sz="1800" dirty="0">
+                    <a:solidFill>
+                      <a:srgbClr val="FFFFFF"/>
+                    </a:solidFill>
+                    <a:latin typeface="+mn-lt"/>
+                    <a:ea typeface="+mn-ea"/>
+                    <a:cs typeface="+mn-cs"/>
+                  </a:endParaRPr>
                 </a:p>
               </p:txBody>
             </p:sp>
@@ -22141,6 +20557,14 @@
                     </a:rPr>
                     <a:t>脚本挂在正确对象上</a:t>
                   </a:r>
+                  <a:endParaRPr lang="zh-CN" sz="1800" dirty="0">
+                    <a:solidFill>
+                      <a:schemeClr val="dk2"/>
+                    </a:solidFill>
+                    <a:latin typeface="+mn-lt"/>
+                    <a:ea typeface="+mn-ea"/>
+                    <a:cs typeface="+mn-cs"/>
+                  </a:endParaRPr>
                 </a:p>
               </p:txBody>
             </p:sp>
@@ -22218,6 +20642,14 @@
                     </a:rPr>
                     <a:t>✓</a:t>
                   </a:r>
+                  <a:endParaRPr lang="en-US" sz="1800" dirty="0">
+                    <a:solidFill>
+                      <a:srgbClr val="FFFFFF"/>
+                    </a:solidFill>
+                    <a:latin typeface="+mn-lt"/>
+                    <a:ea typeface="+mn-ea"/>
+                    <a:cs typeface="+mn-cs"/>
+                  </a:endParaRPr>
                 </a:p>
               </p:txBody>
             </p:sp>
@@ -22258,6 +20690,14 @@
                     </a:rPr>
                     <a:t>方法签名与 2D / 3D API 一致</a:t>
                   </a:r>
+                  <a:endParaRPr lang="zh-CN" sz="1800" dirty="0">
+                    <a:solidFill>
+                      <a:schemeClr val="dk2"/>
+                    </a:solidFill>
+                    <a:latin typeface="+mn-lt"/>
+                    <a:ea typeface="+mn-ea"/>
+                    <a:cs typeface="+mn-cs"/>
+                  </a:endParaRPr>
                 </a:p>
               </p:txBody>
             </p:sp>
@@ -22335,6 +20775,14 @@
                     </a:rPr>
                     <a:t>!</a:t>
                   </a:r>
+                  <a:endParaRPr lang="en-US" sz="1800" dirty="0">
+                    <a:solidFill>
+                      <a:srgbClr val="FFFFFF"/>
+                    </a:solidFill>
+                    <a:latin typeface="+mn-lt"/>
+                    <a:ea typeface="+mn-ea"/>
+                    <a:cs typeface="+mn-cs"/>
+                  </a:endParaRPr>
                 </a:p>
               </p:txBody>
             </p:sp>
@@ -22375,6 +20823,14 @@
                     </a:rPr>
                     <a:t>用 Console 日志定位到哪一步</a:t>
                   </a:r>
+                  <a:endParaRPr lang="zh-CN" sz="1800" dirty="0">
+                    <a:solidFill>
+                      <a:srgbClr val="8C5A00"/>
+                    </a:solidFill>
+                    <a:latin typeface="+mn-lt"/>
+                    <a:ea typeface="+mn-ea"/>
+                    <a:cs typeface="+mn-cs"/>
+                  </a:endParaRPr>
                 </a:p>
               </p:txBody>
             </p:sp>
@@ -22433,46 +20889,6 @@
         </p:sp>
         <p:sp>
           <p:nvSpPr>
-            <p:cNvPr id="55" name="TextBox 55"/>
-            <p:cNvSpPr txBox="1"/>
-            <p:nvPr/>
-          </p:nvSpPr>
-          <p:spPr>
-            <a:xfrm>
-              <a:off x="564642" y="6521768"/>
-              <a:ext cx="1799980" cy="264033"/>
-            </a:xfrm>
-            <a:prstGeom prst="rect">
-              <a:avLst/>
-            </a:prstGeom>
-            <a:noFill/>
-            <a:ln>
-              <a:noFill/>
-            </a:ln>
-          </p:spPr>
-          <p:txBody>
-            <a:bodyPr wrap="none" lIns="0" tIns="0" rIns="0" bIns="0" anchor="t" anchorCtr="0">
-              <a:spAutoFit/>
-            </a:bodyPr>
-            <a:lstStyle/>
-            <a:p>
-              <a:pPr algn="l"/>
-              <a:r>
-                <a:rPr lang="zh-CN" sz="1350" dirty="0">
-                  <a:solidFill>
-                    <a:schemeClr val="accent5"/>
-                  </a:solidFill>
-                  <a:latin typeface="+mn-lt"/>
-                  <a:ea typeface="+mn-ea"/>
-                  <a:cs typeface="+mn-cs"/>
-                </a:rPr>
-                <a:t>Trigger · 事件与排错</a:t>
-              </a:r>
-            </a:p>
-          </p:txBody>
-        </p:sp>
-        <p:sp>
-          <p:nvSpPr>
             <p:cNvPr id="56" name="TextBox 56"/>
             <p:cNvSpPr txBox="1"/>
             <p:nvPr/>
@@ -22508,6 +20924,14 @@
                 </a:rPr>
                 <a:t>07</a:t>
               </a:r>
+              <a:endParaRPr lang="en-US" sz="1350" dirty="0">
+                <a:solidFill>
+                  <a:schemeClr val="accent5"/>
+                </a:solidFill>
+                <a:latin typeface="+mn-lt"/>
+                <a:ea typeface="+mn-ea"/>
+                <a:cs typeface="+mn-cs"/>
+              </a:endParaRPr>
             </a:p>
           </p:txBody>
         </p:sp>
@@ -22517,9 +20941,18 @@
   <p:clrMapOvr>
     <a:masterClrMapping/>
   </p:clrMapOvr>
-  <p:transition xmlns:p14="http://schemas.microsoft.com/office/powerpoint/2010/main" p14:dur="400">
-    <p:fade/>
-  </p:transition>
+  <mc:AlternateContent xmlns:mc="http://schemas.openxmlformats.org/markup-compatibility/2006">
+    <mc:Choice xmlns:p14="http://schemas.microsoft.com/office/powerpoint/2010/main" Requires="p14">
+      <p:transition p14:dur="400">
+        <p:fade/>
+      </p:transition>
+    </mc:Choice>
+    <mc:Fallback>
+      <p:transition>
+        <p:fade/>
+      </p:transition>
+    </mc:Fallback>
+  </mc:AlternateContent>
 </p:sld>
 </file>
 
@@ -22549,7 +20982,7 @@
         <p:spPr>
           <a:xfrm>
             <a:off x="552450" y="270510"/>
-            <a:ext cx="16603348" cy="819150"/>
+            <a:ext cx="3215640" cy="645795"/>
           </a:xfrm>
           <a:prstGeom prst="rect">
             <a:avLst/>
@@ -22575,8 +21008,16 @@
                 <a:ea typeface="+mj-ea"/>
                 <a:cs typeface="+mj-cs"/>
               </a:rPr>
-              <a:t>从贴图到画面：Texture、Material、Shader、Renderer</a:t>
+              <a:t>从贴图到画面</a:t>
             </a:r>
+            <a:endParaRPr lang="zh-CN" sz="4200" b="1" dirty="0">
+              <a:solidFill>
+                <a:schemeClr val="dk1"/>
+              </a:solidFill>
+              <a:latin typeface="+mj-lt"/>
+              <a:ea typeface="+mj-ea"/>
+              <a:cs typeface="+mj-cs"/>
+            </a:endParaRPr>
           </a:p>
         </p:txBody>
       </p:sp>
@@ -22617,6 +21058,14 @@
               </a:rPr>
               <a:t>四者不是同义词，而是一条“数据 → 规则 → 绑定 → 输出”的链</a:t>
             </a:r>
+            <a:endParaRPr lang="zh-CN" sz="1800" dirty="0">
+              <a:solidFill>
+                <a:schemeClr val="dk2"/>
+              </a:solidFill>
+              <a:latin typeface="+mn-lt"/>
+              <a:ea typeface="+mn-ea"/>
+              <a:cs typeface="+mn-cs"/>
+            </a:endParaRPr>
           </a:p>
         </p:txBody>
       </p:sp>
@@ -22735,6 +21184,14 @@
                   </a:rPr>
                   <a:t>01</a:t>
                 </a:r>
+                <a:endParaRPr lang="en-US" sz="2400" b="1" dirty="0">
+                  <a:solidFill>
+                    <a:srgbClr val="FFFFFF"/>
+                  </a:solidFill>
+                  <a:latin typeface="+mn-lt"/>
+                  <a:ea typeface="+mn-ea"/>
+                  <a:cs typeface="+mn-cs"/>
+                </a:endParaRPr>
               </a:p>
             </p:txBody>
           </p:sp>
@@ -23030,6 +21487,14 @@
                   </a:rPr>
                   <a:t>Texture 贴图</a:t>
                 </a:r>
+                <a:endParaRPr lang="zh-CN" sz="2400" b="1" dirty="0">
+                  <a:solidFill>
+                    <a:schemeClr val="dk1"/>
+                  </a:solidFill>
+                  <a:latin typeface="+mn-lt"/>
+                  <a:ea typeface="+mn-ea"/>
+                  <a:cs typeface="+mn-cs"/>
+                </a:endParaRPr>
               </a:p>
             </p:txBody>
           </p:sp>
@@ -23070,6 +21535,14 @@
                   </a:rPr>
                   <a:t>颜色、法线、粗糙度等表面数据</a:t>
                 </a:r>
+                <a:endParaRPr lang="zh-CN" sz="1800" dirty="0">
+                  <a:solidFill>
+                    <a:schemeClr val="dk2"/>
+                  </a:solidFill>
+                  <a:latin typeface="+mn-lt"/>
+                  <a:ea typeface="+mn-ea"/>
+                  <a:cs typeface="+mn-cs"/>
+                </a:endParaRPr>
               </a:p>
             </p:txBody>
           </p:sp>
@@ -23175,6 +21648,14 @@
                   </a:rPr>
                   <a:t>02</a:t>
                 </a:r>
+                <a:endParaRPr lang="en-US" sz="2400" b="1" dirty="0">
+                  <a:solidFill>
+                    <a:srgbClr val="FFFFFF"/>
+                  </a:solidFill>
+                  <a:latin typeface="+mn-lt"/>
+                  <a:ea typeface="+mn-ea"/>
+                  <a:cs typeface="+mn-cs"/>
+                </a:endParaRPr>
               </a:p>
             </p:txBody>
           </p:sp>
@@ -23239,6 +21720,14 @@
                   </a:rPr>
                   <a:t>Shader 着色器</a:t>
                 </a:r>
+                <a:endParaRPr lang="zh-CN" sz="2400" b="1" dirty="0">
+                  <a:solidFill>
+                    <a:schemeClr val="dk1"/>
+                  </a:solidFill>
+                  <a:latin typeface="+mn-lt"/>
+                  <a:ea typeface="+mn-ea"/>
+                  <a:cs typeface="+mn-cs"/>
+                </a:endParaRPr>
               </a:p>
             </p:txBody>
           </p:sp>
@@ -23279,6 +21768,14 @@
                   </a:rPr>
                   <a:t>规定顶点与像素如何被计算</a:t>
                 </a:r>
+                <a:endParaRPr lang="zh-CN" sz="1800" dirty="0">
+                  <a:solidFill>
+                    <a:schemeClr val="dk2"/>
+                  </a:solidFill>
+                  <a:latin typeface="+mn-lt"/>
+                  <a:ea typeface="+mn-ea"/>
+                  <a:cs typeface="+mn-cs"/>
+                </a:endParaRPr>
               </a:p>
             </p:txBody>
           </p:sp>
@@ -23384,6 +21881,14 @@
                   </a:rPr>
                   <a:t>03</a:t>
                 </a:r>
+                <a:endParaRPr lang="en-US" sz="2400" b="1" dirty="0">
+                  <a:solidFill>
+                    <a:srgbClr val="FFFFFF"/>
+                  </a:solidFill>
+                  <a:latin typeface="+mn-lt"/>
+                  <a:ea typeface="+mn-ea"/>
+                  <a:cs typeface="+mn-cs"/>
+                </a:endParaRPr>
               </a:p>
             </p:txBody>
           </p:sp>
@@ -23679,6 +22184,14 @@
                   </a:rPr>
                   <a:t>Material 材质</a:t>
                 </a:r>
+                <a:endParaRPr lang="zh-CN" sz="2400" b="1" dirty="0">
+                  <a:solidFill>
+                    <a:schemeClr val="dk1"/>
+                  </a:solidFill>
+                  <a:latin typeface="+mn-lt"/>
+                  <a:ea typeface="+mn-ea"/>
+                  <a:cs typeface="+mn-cs"/>
+                </a:endParaRPr>
               </a:p>
             </p:txBody>
           </p:sp>
@@ -23719,6 +22232,14 @@
                   </a:rPr>
                   <a:t>选择 Shader，并保存它所需参数</a:t>
                 </a:r>
+                <a:endParaRPr lang="zh-CN" sz="1800" dirty="0">
+                  <a:solidFill>
+                    <a:schemeClr val="dk2"/>
+                  </a:solidFill>
+                  <a:latin typeface="+mn-lt"/>
+                  <a:ea typeface="+mn-ea"/>
+                  <a:cs typeface="+mn-cs"/>
+                </a:endParaRPr>
               </a:p>
             </p:txBody>
           </p:sp>
@@ -23824,6 +22345,14 @@
                   </a:rPr>
                   <a:t>04</a:t>
                 </a:r>
+                <a:endParaRPr lang="en-US" sz="2400" b="1" dirty="0">
+                  <a:solidFill>
+                    <a:srgbClr val="FFFFFF"/>
+                  </a:solidFill>
+                  <a:latin typeface="+mn-lt"/>
+                  <a:ea typeface="+mn-ea"/>
+                  <a:cs typeface="+mn-cs"/>
+                </a:endParaRPr>
               </a:p>
             </p:txBody>
           </p:sp>
@@ -24068,6 +22597,14 @@
                   </a:rPr>
                   <a:t>Renderer 渲染器</a:t>
                 </a:r>
+                <a:endParaRPr lang="zh-CN" sz="2400" b="1" dirty="0">
+                  <a:solidFill>
+                    <a:schemeClr val="dk1"/>
+                  </a:solidFill>
+                  <a:latin typeface="+mn-lt"/>
+                  <a:ea typeface="+mn-ea"/>
+                  <a:cs typeface="+mn-cs"/>
+                </a:endParaRPr>
               </a:p>
             </p:txBody>
           </p:sp>
@@ -24108,6 +22645,14 @@
                   </a:rPr>
                   <a:t>把网格与材质送入渲染管线</a:t>
                 </a:r>
+                <a:endParaRPr lang="zh-CN" sz="1800" dirty="0">
+                  <a:solidFill>
+                    <a:schemeClr val="dk2"/>
+                  </a:solidFill>
+                  <a:latin typeface="+mn-lt"/>
+                  <a:ea typeface="+mn-ea"/>
+                  <a:cs typeface="+mn-cs"/>
+                </a:endParaRPr>
               </a:p>
             </p:txBody>
           </p:sp>
@@ -24414,6 +22959,14 @@
                 </a:rPr>
                 <a:t>Skinned Mesh</a:t>
               </a:r>
+              <a:endParaRPr lang="en-US" sz="2700" b="1" dirty="0">
+                <a:solidFill>
+                  <a:schemeClr val="dk1"/>
+                </a:solidFill>
+                <a:latin typeface="+mn-lt"/>
+                <a:ea typeface="+mn-ea"/>
+                <a:cs typeface="+mn-cs"/>
+              </a:endParaRPr>
             </a:p>
           </p:txBody>
         </p:sp>
@@ -24454,6 +23007,14 @@
                 </a:rPr>
                 <a:t>Renderer</a:t>
               </a:r>
+              <a:endParaRPr lang="en-US" sz="2400" b="1" dirty="0">
+                <a:solidFill>
+                  <a:schemeClr val="accent1"/>
+                </a:solidFill>
+                <a:latin typeface="+mn-lt"/>
+                <a:ea typeface="+mn-ea"/>
+                <a:cs typeface="+mn-cs"/>
+              </a:endParaRPr>
             </a:p>
           </p:txBody>
         </p:sp>
@@ -24532,6 +23093,14 @@
                 </a:rPr>
                 <a:t>骨骼驱动网格变形</a:t>
               </a:r>
+              <a:endParaRPr lang="zh-CN" sz="1800" dirty="0">
+                <a:solidFill>
+                  <a:schemeClr val="dk2"/>
+                </a:solidFill>
+                <a:latin typeface="+mn-lt"/>
+                <a:ea typeface="+mn-ea"/>
+                <a:cs typeface="+mn-cs"/>
+              </a:endParaRPr>
             </a:p>
           </p:txBody>
         </p:sp>
@@ -24572,6 +23141,14 @@
                 </a:rPr>
                 <a:t>常用于角色与动画</a:t>
               </a:r>
+              <a:endParaRPr lang="zh-CN" sz="1800" dirty="0">
+                <a:solidFill>
+                  <a:schemeClr val="dk2"/>
+                </a:solidFill>
+                <a:latin typeface="+mn-lt"/>
+                <a:ea typeface="+mn-ea"/>
+                <a:cs typeface="+mn-cs"/>
+              </a:endParaRPr>
             </a:p>
           </p:txBody>
         </p:sp>
@@ -24636,6 +23213,14 @@
                 </a:rPr>
                 <a:t>网格会“动起来”</a:t>
               </a:r>
+              <a:endParaRPr lang="zh-CN" sz="1800" b="1" dirty="0">
+                <a:solidFill>
+                  <a:schemeClr val="accent1"/>
+                </a:solidFill>
+                <a:latin typeface="+mn-lt"/>
+                <a:ea typeface="+mn-ea"/>
+                <a:cs typeface="+mn-cs"/>
+              </a:endParaRPr>
             </a:p>
           </p:txBody>
         </p:sp>
@@ -24692,46 +23277,6 @@
         </p:sp>
         <p:sp>
           <p:nvSpPr>
-            <p:cNvPr id="60" name="TextBox 60"/>
-            <p:cNvSpPr txBox="1"/>
-            <p:nvPr/>
-          </p:nvSpPr>
-          <p:spPr>
-            <a:xfrm>
-              <a:off x="564642" y="6521768"/>
-              <a:ext cx="2948769" cy="264033"/>
-            </a:xfrm>
-            <a:prstGeom prst="rect">
-              <a:avLst/>
-            </a:prstGeom>
-            <a:noFill/>
-            <a:ln>
-              <a:noFill/>
-            </a:ln>
-          </p:spPr>
-          <p:txBody>
-            <a:bodyPr wrap="none" lIns="0" tIns="0" rIns="0" bIns="0" anchor="t" anchorCtr="0">
-              <a:spAutoFit/>
-            </a:bodyPr>
-            <a:lstStyle/>
-            <a:p>
-              <a:pPr algn="l"/>
-              <a:r>
-                <a:rPr lang="zh-CN" sz="1350" dirty="0">
-                  <a:solidFill>
-                    <a:schemeClr val="accent5"/>
-                  </a:solidFill>
-                  <a:latin typeface="+mn-lt"/>
-                  <a:ea typeface="+mn-ea"/>
-                  <a:cs typeface="+mn-cs"/>
-                </a:rPr>
-                <a:t>渲染关系 · 数据、规则、参数与输出</a:t>
-              </a:r>
-            </a:p>
-          </p:txBody>
-        </p:sp>
-        <p:sp>
-          <p:nvSpPr>
             <p:cNvPr id="61" name="TextBox 61"/>
             <p:cNvSpPr txBox="1"/>
             <p:nvPr/>
@@ -24767,6 +23312,14 @@
                 </a:rPr>
                 <a:t>08</a:t>
               </a:r>
+              <a:endParaRPr lang="en-US" sz="1350" dirty="0">
+                <a:solidFill>
+                  <a:schemeClr val="accent5"/>
+                </a:solidFill>
+                <a:latin typeface="+mn-lt"/>
+                <a:ea typeface="+mn-ea"/>
+                <a:cs typeface="+mn-cs"/>
+              </a:endParaRPr>
             </a:p>
           </p:txBody>
         </p:sp>
@@ -24776,9 +23329,18 @@
   <p:clrMapOvr>
     <a:masterClrMapping/>
   </p:clrMapOvr>
-  <p:transition xmlns:p14="http://schemas.microsoft.com/office/powerpoint/2010/main" p14:dur="400">
-    <p:fade/>
-  </p:transition>
+  <mc:AlternateContent xmlns:mc="http://schemas.openxmlformats.org/markup-compatibility/2006">
+    <mc:Choice xmlns:p14="http://schemas.microsoft.com/office/powerpoint/2010/main" Requires="p14">
+      <p:transition p14:dur="400">
+        <p:fade/>
+      </p:transition>
+    </mc:Choice>
+    <mc:Fallback>
+      <p:transition>
+        <p:fade/>
+      </p:transition>
+    </mc:Fallback>
+  </mc:AlternateContent>
 </p:sld>
 </file>
 
@@ -24836,6 +23398,14 @@
               </a:rPr>
               <a:t>让场景有氛围：天空盒、灯光与烘焙</a:t>
             </a:r>
+            <a:endParaRPr lang="zh-CN" sz="4200" b="1" dirty="0">
+              <a:solidFill>
+                <a:schemeClr val="dk1"/>
+              </a:solidFill>
+              <a:latin typeface="+mj-lt"/>
+              <a:ea typeface="+mj-ea"/>
+              <a:cs typeface="+mj-cs"/>
+            </a:endParaRPr>
           </a:p>
         </p:txBody>
       </p:sp>
@@ -24876,6 +23446,14 @@
               </a:rPr>
               <a:t>实时光负责变化，烘焙光负责稳定与性能</a:t>
             </a:r>
+            <a:endParaRPr lang="zh-CN" sz="1800" dirty="0">
+              <a:solidFill>
+                <a:schemeClr val="dk2"/>
+              </a:solidFill>
+              <a:latin typeface="+mn-lt"/>
+              <a:ea typeface="+mn-ea"/>
+              <a:cs typeface="+mn-cs"/>
+            </a:endParaRPr>
           </a:p>
         </p:txBody>
       </p:sp>
@@ -25283,6 +23861,14 @@
                 </a:rPr>
                 <a:t>Skybox + Directional Light</a:t>
               </a:r>
+              <a:endParaRPr lang="en-US" sz="3150" b="1" dirty="0">
+                <a:solidFill>
+                  <a:schemeClr val="dk1"/>
+                </a:solidFill>
+                <a:latin typeface="+mn-lt"/>
+                <a:ea typeface="+mn-ea"/>
+                <a:cs typeface="+mn-cs"/>
+              </a:endParaRPr>
             </a:p>
           </p:txBody>
         </p:sp>
@@ -25323,6 +23909,14 @@
                 </a:rPr>
                 <a:t>先定天空与主光方向，再补局部光源</a:t>
               </a:r>
+              <a:endParaRPr lang="zh-CN" sz="2400" dirty="0">
+                <a:solidFill>
+                  <a:schemeClr val="dk2"/>
+                </a:solidFill>
+                <a:latin typeface="+mn-lt"/>
+                <a:ea typeface="+mn-ea"/>
+                <a:cs typeface="+mn-cs"/>
+              </a:endParaRPr>
             </a:p>
           </p:txBody>
         </p:sp>
@@ -25387,6 +23981,14 @@
                 </a:rPr>
                 <a:t>环境色决定整体情绪</a:t>
               </a:r>
+              <a:endParaRPr lang="zh-CN" sz="1800" b="1" dirty="0">
+                <a:solidFill>
+                  <a:schemeClr val="accent1"/>
+                </a:solidFill>
+                <a:latin typeface="+mn-lt"/>
+                <a:ea typeface="+mn-ea"/>
+                <a:cs typeface="+mn-cs"/>
+              </a:endParaRPr>
             </a:p>
           </p:txBody>
         </p:sp>
@@ -25611,6 +24213,14 @@
                 </a:rPr>
                 <a:t>补光</a:t>
               </a:r>
+              <a:endParaRPr lang="zh-CN" sz="2400" b="1" dirty="0">
+                <a:solidFill>
+                  <a:srgbClr val="2F8F6A"/>
+                </a:solidFill>
+                <a:latin typeface="+mn-lt"/>
+                <a:ea typeface="+mn-ea"/>
+                <a:cs typeface="+mn-cs"/>
+              </a:endParaRPr>
             </a:p>
           </p:txBody>
         </p:sp>
@@ -25651,6 +24261,14 @@
                 </a:rPr>
                 <a:t>点光 / 聚光</a:t>
               </a:r>
+              <a:endParaRPr lang="zh-CN" sz="1800" dirty="0">
+                <a:solidFill>
+                  <a:schemeClr val="dk2"/>
+                </a:solidFill>
+                <a:latin typeface="+mn-lt"/>
+                <a:ea typeface="+mn-ea"/>
+                <a:cs typeface="+mn-cs"/>
+              </a:endParaRPr>
             </a:p>
           </p:txBody>
         </p:sp>
@@ -25755,6 +24373,14 @@
                 </a:rPr>
                 <a:t>标记静态物体</a:t>
               </a:r>
+              <a:endParaRPr lang="zh-CN" sz="2400" b="1" dirty="0">
+                <a:solidFill>
+                  <a:srgbClr val="FFFFFF"/>
+                </a:solidFill>
+                <a:latin typeface="+mn-lt"/>
+                <a:ea typeface="+mn-ea"/>
+                <a:cs typeface="+mn-cs"/>
+              </a:endParaRPr>
             </a:p>
           </p:txBody>
         </p:sp>
@@ -25795,6 +24421,14 @@
                 </a:rPr>
                 <a:t>Static</a:t>
               </a:r>
+              <a:endParaRPr lang="en-US" sz="1800" dirty="0">
+                <a:solidFill>
+                  <a:srgbClr val="FFFFFF"/>
+                </a:solidFill>
+                <a:latin typeface="+mn-lt"/>
+                <a:ea typeface="+mn-ea"/>
+                <a:cs typeface="+mn-cs"/>
+              </a:endParaRPr>
             </a:p>
           </p:txBody>
         </p:sp>
@@ -25884,6 +24518,14 @@
                 </a:rPr>
                 <a:t>配置灯光模式</a:t>
               </a:r>
+              <a:endParaRPr lang="zh-CN" sz="2400" b="1" dirty="0">
+                <a:solidFill>
+                  <a:srgbClr val="FFFFFF"/>
+                </a:solidFill>
+                <a:latin typeface="+mn-lt"/>
+                <a:ea typeface="+mn-ea"/>
+                <a:cs typeface="+mn-cs"/>
+              </a:endParaRPr>
             </a:p>
           </p:txBody>
         </p:sp>
@@ -25924,6 +24566,14 @@
                 </a:rPr>
                 <a:t>Baked / Mixed</a:t>
               </a:r>
+              <a:endParaRPr lang="en-US" sz="1800" dirty="0">
+                <a:solidFill>
+                  <a:srgbClr val="FFFFFF"/>
+                </a:solidFill>
+                <a:latin typeface="+mn-lt"/>
+                <a:ea typeface="+mn-ea"/>
+                <a:cs typeface="+mn-cs"/>
+              </a:endParaRPr>
             </a:p>
           </p:txBody>
         </p:sp>
@@ -26013,6 +24663,14 @@
                 </a:rPr>
                 <a:t>生成光照数据</a:t>
               </a:r>
+              <a:endParaRPr lang="zh-CN" sz="2400" b="1" dirty="0">
+                <a:solidFill>
+                  <a:srgbClr val="FFFFFF"/>
+                </a:solidFill>
+                <a:latin typeface="+mn-lt"/>
+                <a:ea typeface="+mn-ea"/>
+                <a:cs typeface="+mn-cs"/>
+              </a:endParaRPr>
             </a:p>
           </p:txBody>
         </p:sp>
@@ -26053,6 +24711,14 @@
                 </a:rPr>
                 <a:t>Generate Lighting</a:t>
               </a:r>
+              <a:endParaRPr lang="en-US" sz="1800" dirty="0">
+                <a:solidFill>
+                  <a:srgbClr val="FFFFFF"/>
+                </a:solidFill>
+                <a:latin typeface="+mn-lt"/>
+                <a:ea typeface="+mn-ea"/>
+                <a:cs typeface="+mn-cs"/>
+              </a:endParaRPr>
             </a:p>
           </p:txBody>
         </p:sp>
@@ -26142,6 +24808,14 @@
                 </a:rPr>
                 <a:t>验证与优化</a:t>
               </a:r>
+              <a:endParaRPr lang="zh-CN" sz="2400" b="1" dirty="0">
+                <a:solidFill>
+                  <a:srgbClr val="FFFFFF"/>
+                </a:solidFill>
+                <a:latin typeface="+mn-lt"/>
+                <a:ea typeface="+mn-ea"/>
+                <a:cs typeface="+mn-cs"/>
+              </a:endParaRPr>
             </a:p>
           </p:txBody>
         </p:sp>
@@ -26182,6 +24856,14 @@
                 </a:rPr>
                 <a:t>阴影 · 内存 · 效果</a:t>
               </a:r>
+              <a:endParaRPr lang="zh-CN" sz="1800" dirty="0">
+                <a:solidFill>
+                  <a:srgbClr val="FFFFFF"/>
+                </a:solidFill>
+                <a:latin typeface="+mn-lt"/>
+                <a:ea typeface="+mn-ea"/>
+                <a:cs typeface="+mn-cs"/>
+              </a:endParaRPr>
             </a:p>
           </p:txBody>
         </p:sp>
@@ -26238,46 +24920,6 @@
         </p:sp>
         <p:sp>
           <p:nvSpPr>
-            <p:cNvPr id="39" name="TextBox 39"/>
-            <p:cNvSpPr txBox="1"/>
-            <p:nvPr/>
-          </p:nvSpPr>
-          <p:spPr>
-            <a:xfrm>
-              <a:off x="564642" y="6521768"/>
-              <a:ext cx="2402165" cy="264033"/>
-            </a:xfrm>
-            <a:prstGeom prst="rect">
-              <a:avLst/>
-            </a:prstGeom>
-            <a:noFill/>
-            <a:ln>
-              <a:noFill/>
-            </a:ln>
-          </p:spPr>
-          <p:txBody>
-            <a:bodyPr wrap="none" lIns="0" tIns="0" rIns="0" bIns="0" anchor="t" anchorCtr="0">
-              <a:spAutoFit/>
-            </a:bodyPr>
-            <a:lstStyle/>
-            <a:p>
-              <a:pPr algn="l"/>
-              <a:r>
-                <a:rPr lang="zh-CN" sz="1350" dirty="0">
-                  <a:solidFill>
-                    <a:schemeClr val="accent5"/>
-                  </a:solidFill>
-                  <a:latin typeface="+mn-lt"/>
-                  <a:ea typeface="+mn-ea"/>
-                  <a:cs typeface="+mn-cs"/>
-                </a:rPr>
-                <a:t>Lighting · 实时与烘焙的平衡</a:t>
-              </a:r>
-            </a:p>
-          </p:txBody>
-        </p:sp>
-        <p:sp>
-          <p:nvSpPr>
             <p:cNvPr id="40" name="TextBox 40"/>
             <p:cNvSpPr txBox="1"/>
             <p:nvPr/>
@@ -26313,6 +24955,14 @@
                 </a:rPr>
                 <a:t>09</a:t>
               </a:r>
+              <a:endParaRPr lang="en-US" sz="1350" dirty="0">
+                <a:solidFill>
+                  <a:schemeClr val="accent5"/>
+                </a:solidFill>
+                <a:latin typeface="+mn-lt"/>
+                <a:ea typeface="+mn-ea"/>
+                <a:cs typeface="+mn-cs"/>
+              </a:endParaRPr>
             </a:p>
           </p:txBody>
         </p:sp>
@@ -26322,10 +24972,175 @@
   <p:clrMapOvr>
     <a:masterClrMapping/>
   </p:clrMapOvr>
-  <p:transition xmlns:p14="http://schemas.microsoft.com/office/powerpoint/2010/main" p14:dur="400">
-    <p:fade/>
-  </p:transition>
+  <mc:AlternateContent xmlns:mc="http://schemas.openxmlformats.org/markup-compatibility/2006">
+    <mc:Choice xmlns:p14="http://schemas.microsoft.com/office/powerpoint/2010/main" Requires="p14">
+      <p:transition p14:dur="400">
+        <p:fade/>
+      </p:transition>
+    </mc:Choice>
+    <mc:Fallback>
+      <p:transition>
+        <p:fade/>
+      </p:transition>
+    </mc:Fallback>
+  </mc:AlternateContent>
 </p:sld>
+</file>
+
+<file path=ppt/tags/tag1.xml><?xml version="1.0" encoding="utf-8"?>
+<p:tagLst xmlns:p="http://schemas.openxmlformats.org/presentationml/2006/main">
+  <p:tag name="KSO_WM_DIAGRAM_VIRTUALLY_FRAME" val="{&quot;height&quot;:352.5,&quot;left&quot;:577.5,&quot;top&quot;:61.5,&quot;width&quot;:318.75}"/>
+</p:tagLst>
+</file>
+
+<file path=ppt/tags/tag10.xml><?xml version="1.0" encoding="utf-8"?>
+<p:tagLst xmlns:p="http://schemas.openxmlformats.org/presentationml/2006/main">
+  <p:tag name="KSO_WM_DIAGRAM_VIRTUALLY_FRAME" val="{&quot;height&quot;:352.5,&quot;left&quot;:577.5,&quot;top&quot;:61.5,&quot;width&quot;:318.75}"/>
+</p:tagLst>
+</file>
+
+<file path=ppt/tags/tag11.xml><?xml version="1.0" encoding="utf-8"?>
+<p:tagLst xmlns:p="http://schemas.openxmlformats.org/presentationml/2006/main">
+  <p:tag name="KSO_WM_DIAGRAM_VIRTUALLY_FRAME" val="{&quot;height&quot;:352.5,&quot;left&quot;:577.5,&quot;top&quot;:61.5,&quot;width&quot;:318.75}"/>
+</p:tagLst>
+</file>
+
+<file path=ppt/tags/tag12.xml><?xml version="1.0" encoding="utf-8"?>
+<p:tagLst xmlns:p="http://schemas.openxmlformats.org/presentationml/2006/main">
+  <p:tag name="KSO_WM_DIAGRAM_VIRTUALLY_FRAME" val="{&quot;height&quot;:352.5,&quot;left&quot;:577.5,&quot;top&quot;:61.5,&quot;width&quot;:318.75}"/>
+</p:tagLst>
+</file>
+
+<file path=ppt/tags/tag13.xml><?xml version="1.0" encoding="utf-8"?>
+<p:tagLst xmlns:p="http://schemas.openxmlformats.org/presentationml/2006/main">
+  <p:tag name="KSO_WM_DIAGRAM_VIRTUALLY_FRAME" val="{&quot;height&quot;:352.5,&quot;left&quot;:577.5,&quot;top&quot;:61.5,&quot;width&quot;:318.75}"/>
+</p:tagLst>
+</file>
+
+<file path=ppt/tags/tag14.xml><?xml version="1.0" encoding="utf-8"?>
+<p:tagLst xmlns:p="http://schemas.openxmlformats.org/presentationml/2006/main">
+  <p:tag name="KSO_WM_DIAGRAM_VIRTUALLY_FRAME" val="{&quot;height&quot;:352.5,&quot;left&quot;:577.5,&quot;top&quot;:61.5,&quot;width&quot;:318.75}"/>
+</p:tagLst>
+</file>
+
+<file path=ppt/tags/tag15.xml><?xml version="1.0" encoding="utf-8"?>
+<p:tagLst xmlns:p="http://schemas.openxmlformats.org/presentationml/2006/main">
+  <p:tag name="KSO_WM_DIAGRAM_VIRTUALLY_FRAME" val="{&quot;height&quot;:352.5,&quot;left&quot;:577.5,&quot;top&quot;:61.5,&quot;width&quot;:318.75}"/>
+</p:tagLst>
+</file>
+
+<file path=ppt/tags/tag16.xml><?xml version="1.0" encoding="utf-8"?>
+<p:tagLst xmlns:p="http://schemas.openxmlformats.org/presentationml/2006/main">
+  <p:tag name="KSO_WM_DIAGRAM_VIRTUALLY_FRAME" val="{&quot;height&quot;:352.5,&quot;left&quot;:577.5,&quot;top&quot;:61.5,&quot;width&quot;:318.75}"/>
+</p:tagLst>
+</file>
+
+<file path=ppt/tags/tag17.xml><?xml version="1.0" encoding="utf-8"?>
+<p:tagLst xmlns:p="http://schemas.openxmlformats.org/presentationml/2006/main">
+  <p:tag name="KSO_WM_DIAGRAM_VIRTUALLY_FRAME" val="{&quot;height&quot;:352.5,&quot;left&quot;:577.5,&quot;top&quot;:61.5,&quot;width&quot;:318.75}"/>
+</p:tagLst>
+</file>
+
+<file path=ppt/tags/tag18.xml><?xml version="1.0" encoding="utf-8"?>
+<p:tagLst xmlns:p="http://schemas.openxmlformats.org/presentationml/2006/main">
+  <p:tag name="KSO_WM_DIAGRAM_VIRTUALLY_FRAME" val="{&quot;height&quot;:352.5,&quot;left&quot;:577.5,&quot;top&quot;:61.5,&quot;width&quot;:318.75}"/>
+</p:tagLst>
+</file>
+
+<file path=ppt/tags/tag19.xml><?xml version="1.0" encoding="utf-8"?>
+<p:tagLst xmlns:p="http://schemas.openxmlformats.org/presentationml/2006/main">
+  <p:tag name="KSO_WM_DIAGRAM_VIRTUALLY_FRAME" val="{&quot;height&quot;:352.5,&quot;left&quot;:577.5,&quot;top&quot;:61.5,&quot;width&quot;:318.75}"/>
+</p:tagLst>
+</file>
+
+<file path=ppt/tags/tag2.xml><?xml version="1.0" encoding="utf-8"?>
+<p:tagLst xmlns:p="http://schemas.openxmlformats.org/presentationml/2006/main">
+  <p:tag name="KSO_WM_DIAGRAM_VIRTUALLY_FRAME" val="{&quot;height&quot;:352.5,&quot;left&quot;:577.5,&quot;top&quot;:61.5,&quot;width&quot;:318.75}"/>
+</p:tagLst>
+</file>
+
+<file path=ppt/tags/tag20.xml><?xml version="1.0" encoding="utf-8"?>
+<p:tagLst xmlns:p="http://schemas.openxmlformats.org/presentationml/2006/main">
+  <p:tag name="KSO_WM_DIAGRAM_VIRTUALLY_FRAME" val="{&quot;height&quot;:352.5,&quot;left&quot;:577.5,&quot;top&quot;:61.5,&quot;width&quot;:318.75}"/>
+</p:tagLst>
+</file>
+
+<file path=ppt/tags/tag21.xml><?xml version="1.0" encoding="utf-8"?>
+<p:tagLst xmlns:p="http://schemas.openxmlformats.org/presentationml/2006/main">
+  <p:tag name="KSO_WM_DIAGRAM_VIRTUALLY_FRAME" val="{&quot;height&quot;:352.5,&quot;left&quot;:577.5,&quot;top&quot;:61.5,&quot;width&quot;:318.75}"/>
+</p:tagLst>
+</file>
+
+<file path=ppt/tags/tag22.xml><?xml version="1.0" encoding="utf-8"?>
+<p:tagLst xmlns:p="http://schemas.openxmlformats.org/presentationml/2006/main">
+  <p:tag name="KSO_WM_DIAGRAM_VIRTUALLY_FRAME" val="{&quot;height&quot;:352.5,&quot;left&quot;:577.5,&quot;top&quot;:61.5,&quot;width&quot;:318.75}"/>
+</p:tagLst>
+</file>
+
+<file path=ppt/tags/tag23.xml><?xml version="1.0" encoding="utf-8"?>
+<p:tagLst xmlns:p="http://schemas.openxmlformats.org/presentationml/2006/main">
+  <p:tag name="KSO_WM_DIAGRAM_VIRTUALLY_FRAME" val="{&quot;height&quot;:352.5,&quot;left&quot;:577.5,&quot;top&quot;:61.5,&quot;width&quot;:318.75}"/>
+</p:tagLst>
+</file>
+
+<file path=ppt/tags/tag24.xml><?xml version="1.0" encoding="utf-8"?>
+<p:tagLst xmlns:p="http://schemas.openxmlformats.org/presentationml/2006/main">
+  <p:tag name="KSO_WM_DIAGRAM_VIRTUALLY_FRAME" val="{&quot;height&quot;:352.5,&quot;left&quot;:577.5,&quot;top&quot;:61.5,&quot;width&quot;:318.75}"/>
+</p:tagLst>
+</file>
+
+<file path=ppt/tags/tag25.xml><?xml version="1.0" encoding="utf-8"?>
+<p:tagLst xmlns:p="http://schemas.openxmlformats.org/presentationml/2006/main">
+  <p:tag name="KSO_WM_DIAGRAM_VIRTUALLY_FRAME" val="{&quot;height&quot;:352.5,&quot;left&quot;:577.5,&quot;top&quot;:61.5,&quot;width&quot;:318.75}"/>
+</p:tagLst>
+</file>
+
+<file path=ppt/tags/tag26.xml><?xml version="1.0" encoding="utf-8"?>
+<p:tagLst xmlns:p="http://schemas.openxmlformats.org/presentationml/2006/main">
+  <p:tag name="KSO_WM_DIAGRAM_VIRTUALLY_FRAME" val="{&quot;height&quot;:352.5,&quot;left&quot;:577.5,&quot;top&quot;:61.5,&quot;width&quot;:318.75}"/>
+</p:tagLst>
+</file>
+
+<file path=ppt/tags/tag3.xml><?xml version="1.0" encoding="utf-8"?>
+<p:tagLst xmlns:p="http://schemas.openxmlformats.org/presentationml/2006/main">
+  <p:tag name="KSO_WM_DIAGRAM_VIRTUALLY_FRAME" val="{&quot;height&quot;:352.5,&quot;left&quot;:577.5,&quot;top&quot;:61.5,&quot;width&quot;:318.75}"/>
+</p:tagLst>
+</file>
+
+<file path=ppt/tags/tag4.xml><?xml version="1.0" encoding="utf-8"?>
+<p:tagLst xmlns:p="http://schemas.openxmlformats.org/presentationml/2006/main">
+  <p:tag name="KSO_WM_DIAGRAM_VIRTUALLY_FRAME" val="{&quot;height&quot;:352.5,&quot;left&quot;:577.5,&quot;top&quot;:61.5,&quot;width&quot;:318.75}"/>
+</p:tagLst>
+</file>
+
+<file path=ppt/tags/tag5.xml><?xml version="1.0" encoding="utf-8"?>
+<p:tagLst xmlns:p="http://schemas.openxmlformats.org/presentationml/2006/main">
+  <p:tag name="KSO_WM_DIAGRAM_VIRTUALLY_FRAME" val="{&quot;height&quot;:352.5,&quot;left&quot;:577.5,&quot;top&quot;:61.5,&quot;width&quot;:318.75}"/>
+</p:tagLst>
+</file>
+
+<file path=ppt/tags/tag6.xml><?xml version="1.0" encoding="utf-8"?>
+<p:tagLst xmlns:p="http://schemas.openxmlformats.org/presentationml/2006/main">
+  <p:tag name="KSO_WM_DIAGRAM_VIRTUALLY_FRAME" val="{&quot;height&quot;:352.5,&quot;left&quot;:577.5,&quot;top&quot;:61.5,&quot;width&quot;:318.75}"/>
+</p:tagLst>
+</file>
+
+<file path=ppt/tags/tag7.xml><?xml version="1.0" encoding="utf-8"?>
+<p:tagLst xmlns:p="http://schemas.openxmlformats.org/presentationml/2006/main">
+  <p:tag name="KSO_WM_DIAGRAM_VIRTUALLY_FRAME" val="{&quot;height&quot;:352.5,&quot;left&quot;:577.5,&quot;top&quot;:61.5,&quot;width&quot;:318.75}"/>
+</p:tagLst>
+</file>
+
+<file path=ppt/tags/tag8.xml><?xml version="1.0" encoding="utf-8"?>
+<p:tagLst xmlns:p="http://schemas.openxmlformats.org/presentationml/2006/main">
+  <p:tag name="KSO_WM_DIAGRAM_VIRTUALLY_FRAME" val="{&quot;height&quot;:352.5,&quot;left&quot;:577.5,&quot;top&quot;:61.5,&quot;width&quot;:318.75}"/>
+</p:tagLst>
+</file>
+
+<file path=ppt/tags/tag9.xml><?xml version="1.0" encoding="utf-8"?>
+<p:tagLst xmlns:p="http://schemas.openxmlformats.org/presentationml/2006/main">
+  <p:tag name="KSO_WM_DIAGRAM_VIRTUALLY_FRAME" val="{&quot;height&quot;:352.5,&quot;left&quot;:577.5,&quot;top&quot;:61.5,&quot;width&quot;:318.75}"/>
+</p:tagLst>
 </file>
 
 <file path=ppt/theme/theme1.xml><?xml version="1.0" encoding="utf-8"?>
@@ -26644,7 +25459,11 @@
       </a:style>
     </a:lnDef>
   </a:objectDefaults>
-  <a:extraClrSchemeLst/>
+  <a:extLst>
+    <a:ext uri="{05A4C25C-085E-4340-85A3-A5531E510DB2}">
+      <thm15:themeFamily xmlns:thm15="http://schemas.microsoft.com/office/thememl/2012/main" name="Office Theme" id="{62F939B6-93AF-4DB8-9C6B-D6C7DFDC589F}" vid="{4A3C46E8-61CC-4603-A589-7422A47A8E4A}"/>
+    </a:ext>
+  </a:extLst>
 </a:theme>
 </file>
 
@@ -26964,6 +25783,10 @@
       </a:style>
     </a:lnDef>
   </a:objectDefaults>
-  <a:extraClrSchemeLst/>
+  <a:extLst>
+    <a:ext uri="{05A4C25C-085E-4340-85A3-A5531E510DB2}">
+      <thm15:themeFamily xmlns:thm15="http://schemas.microsoft.com/office/thememl/2012/main" name="Office Theme" id="{62F939B6-93AF-4DB8-9C6B-D6C7DFDC589F}" vid="{4A3C46E8-61CC-4603-A589-7422A47A8E4A}"/>
+    </a:ext>
+  </a:extLst>
 </a:theme>
 </file>